--- a/RAG System Project.pptx
+++ b/RAG System Project.pptx
@@ -1,39 +1,39 @@
 
 <file path=ppt/presentation.xml><?xml version="1.0" encoding="utf-8"?>
-<p:presentation xmlns:a="http://schemas.openxmlformats.org/drawingml/2006/main" xmlns:r="http://schemas.openxmlformats.org/officeDocument/2006/relationships" xmlns:mc="http://schemas.openxmlformats.org/markup-compatibility/2006" xmlns:mv="urn:schemas-microsoft-com:mac:vml" xmlns:p="http://schemas.openxmlformats.org/presentationml/2006/main" xmlns:c="http://schemas.openxmlformats.org/drawingml/2006/chart" xmlns:dgm="http://schemas.openxmlformats.org/drawingml/2006/diagram" xmlns:o="urn:schemas-microsoft-com:office:office" xmlns:v="urn:schemas-microsoft-com:vml" xmlns:pvml="urn:schemas-microsoft-com:office:powerpoint" xmlns:com="http://schemas.openxmlformats.org/drawingml/2006/compatibility" xmlns:p14="http://schemas.microsoft.com/office/powerpoint/2010/main" xmlns:p15="http://schemas.microsoft.com/office/powerpoint/2012/main" xmlns:ahyp="http://schemas.microsoft.com/office/drawing/2018/hyperlinkcolor" autoCompressPictures="0" embedTrueTypeFonts="1" strictFirstAndLastChars="0" saveSubsetFonts="1">
+<p:presentation xmlns:a="http://schemas.openxmlformats.org/drawingml/2006/main" xmlns:r="http://schemas.openxmlformats.org/officeDocument/2006/relationships" xmlns:p="http://schemas.openxmlformats.org/presentationml/2006/main" strictFirstAndLastChars="0" embedTrueTypeFonts="1" saveSubsetFonts="1" autoCompressPictures="0">
   <p:sldMasterIdLst>
-    <p:sldMasterId id="2147483659" r:id="rId4"/>
+    <p:sldMasterId id="2147483659" r:id="rId1"/>
   </p:sldMasterIdLst>
   <p:notesMasterIdLst>
-    <p:notesMasterId r:id="rId5"/>
+    <p:notesMasterId r:id="rId7"/>
   </p:notesMasterIdLst>
   <p:sldIdLst>
-    <p:sldId id="256" r:id="rId6"/>
-    <p:sldId id="257" r:id="rId7"/>
-    <p:sldId id="258" r:id="rId8"/>
-    <p:sldId id="259" r:id="rId9"/>
-    <p:sldId id="260" r:id="rId10"/>
+    <p:sldId id="256" r:id="rId2"/>
+    <p:sldId id="257" r:id="rId3"/>
+    <p:sldId id="258" r:id="rId4"/>
+    <p:sldId id="259" r:id="rId5"/>
+    <p:sldId id="260" r:id="rId6"/>
   </p:sldIdLst>
-  <p:sldSz cy="5143500" cx="9144000"/>
+  <p:sldSz cx="9144000" cy="5143500" type="screen16x9"/>
   <p:notesSz cx="6858000" cy="9144000"/>
   <p:embeddedFontLst>
     <p:embeddedFont>
-      <p:font typeface="Economica"/>
-      <p:regular r:id="rId11"/>
-      <p:bold r:id="rId12"/>
-      <p:italic r:id="rId13"/>
-      <p:boldItalic r:id="rId14"/>
+      <p:font typeface="Economica" panose="020B0604020202020204" charset="0"/>
+      <p:regular r:id="rId8"/>
+      <p:bold r:id="rId9"/>
+      <p:italic r:id="rId10"/>
+      <p:boldItalic r:id="rId11"/>
     </p:embeddedFont>
     <p:embeddedFont>
-      <p:font typeface="Open Sans"/>
-      <p:regular r:id="rId15"/>
-      <p:bold r:id="rId16"/>
-      <p:italic r:id="rId17"/>
-      <p:boldItalic r:id="rId18"/>
+      <p:font typeface="Open Sans" panose="020B0606030504020204" pitchFamily="34" charset="0"/>
+      <p:regular r:id="rId12"/>
+      <p:bold r:id="rId13"/>
+      <p:italic r:id="rId14"/>
+      <p:boldItalic r:id="rId15"/>
     </p:embeddedFont>
   </p:embeddedFontLst>
   <p:defaultTextStyle>
-    <a:defPPr lvl="0" marR="0" rtl="0" algn="l">
+    <a:defPPr marR="0" lvl="0" algn="l" rtl="0">
       <a:lnSpc>
         <a:spcPct val="100000"/>
       </a:lnSpc>
@@ -44,7 +44,7 @@
         <a:spcPts val="0"/>
       </a:spcAft>
     </a:defPPr>
-    <a:lvl1pPr lvl="0" marR="0" rtl="0" algn="l">
+    <a:lvl1pPr marR="0" lvl="0" algn="l" rtl="0">
       <a:lnSpc>
         <a:spcPct val="100000"/>
       </a:lnSpc>
@@ -58,7 +58,7 @@
         <a:srgbClr val="000000"/>
       </a:buClr>
       <a:buFont typeface="Arial"/>
-      <a:defRPr b="0" i="0" sz="1400" u="none" cap="none" strike="noStrike">
+      <a:defRPr sz="1400" b="0" i="0" u="none" strike="noStrike" cap="none">
         <a:solidFill>
           <a:srgbClr val="000000"/>
         </a:solidFill>
@@ -68,7 +68,7 @@
         <a:sym typeface="Arial"/>
       </a:defRPr>
     </a:lvl1pPr>
-    <a:lvl2pPr lvl="1" marR="0" rtl="0" algn="l">
+    <a:lvl2pPr marR="0" lvl="1" algn="l" rtl="0">
       <a:lnSpc>
         <a:spcPct val="100000"/>
       </a:lnSpc>
@@ -82,7 +82,7 @@
         <a:srgbClr val="000000"/>
       </a:buClr>
       <a:buFont typeface="Arial"/>
-      <a:defRPr b="0" i="0" sz="1400" u="none" cap="none" strike="noStrike">
+      <a:defRPr sz="1400" b="0" i="0" u="none" strike="noStrike" cap="none">
         <a:solidFill>
           <a:srgbClr val="000000"/>
         </a:solidFill>
@@ -92,7 +92,7 @@
         <a:sym typeface="Arial"/>
       </a:defRPr>
     </a:lvl2pPr>
-    <a:lvl3pPr lvl="2" marR="0" rtl="0" algn="l">
+    <a:lvl3pPr marR="0" lvl="2" algn="l" rtl="0">
       <a:lnSpc>
         <a:spcPct val="100000"/>
       </a:lnSpc>
@@ -106,7 +106,7 @@
         <a:srgbClr val="000000"/>
       </a:buClr>
       <a:buFont typeface="Arial"/>
-      <a:defRPr b="0" i="0" sz="1400" u="none" cap="none" strike="noStrike">
+      <a:defRPr sz="1400" b="0" i="0" u="none" strike="noStrike" cap="none">
         <a:solidFill>
           <a:srgbClr val="000000"/>
         </a:solidFill>
@@ -116,7 +116,7 @@
         <a:sym typeface="Arial"/>
       </a:defRPr>
     </a:lvl3pPr>
-    <a:lvl4pPr lvl="3" marR="0" rtl="0" algn="l">
+    <a:lvl4pPr marR="0" lvl="3" algn="l" rtl="0">
       <a:lnSpc>
         <a:spcPct val="100000"/>
       </a:lnSpc>
@@ -130,7 +130,7 @@
         <a:srgbClr val="000000"/>
       </a:buClr>
       <a:buFont typeface="Arial"/>
-      <a:defRPr b="0" i="0" sz="1400" u="none" cap="none" strike="noStrike">
+      <a:defRPr sz="1400" b="0" i="0" u="none" strike="noStrike" cap="none">
         <a:solidFill>
           <a:srgbClr val="000000"/>
         </a:solidFill>
@@ -140,7 +140,7 @@
         <a:sym typeface="Arial"/>
       </a:defRPr>
     </a:lvl4pPr>
-    <a:lvl5pPr lvl="4" marR="0" rtl="0" algn="l">
+    <a:lvl5pPr marR="0" lvl="4" algn="l" rtl="0">
       <a:lnSpc>
         <a:spcPct val="100000"/>
       </a:lnSpc>
@@ -154,7 +154,7 @@
         <a:srgbClr val="000000"/>
       </a:buClr>
       <a:buFont typeface="Arial"/>
-      <a:defRPr b="0" i="0" sz="1400" u="none" cap="none" strike="noStrike">
+      <a:defRPr sz="1400" b="0" i="0" u="none" strike="noStrike" cap="none">
         <a:solidFill>
           <a:srgbClr val="000000"/>
         </a:solidFill>
@@ -164,7 +164,7 @@
         <a:sym typeface="Arial"/>
       </a:defRPr>
     </a:lvl5pPr>
-    <a:lvl6pPr lvl="5" marR="0" rtl="0" algn="l">
+    <a:lvl6pPr marR="0" lvl="5" algn="l" rtl="0">
       <a:lnSpc>
         <a:spcPct val="100000"/>
       </a:lnSpc>
@@ -178,7 +178,7 @@
         <a:srgbClr val="000000"/>
       </a:buClr>
       <a:buFont typeface="Arial"/>
-      <a:defRPr b="0" i="0" sz="1400" u="none" cap="none" strike="noStrike">
+      <a:defRPr sz="1400" b="0" i="0" u="none" strike="noStrike" cap="none">
         <a:solidFill>
           <a:srgbClr val="000000"/>
         </a:solidFill>
@@ -188,7 +188,7 @@
         <a:sym typeface="Arial"/>
       </a:defRPr>
     </a:lvl6pPr>
-    <a:lvl7pPr lvl="6" marR="0" rtl="0" algn="l">
+    <a:lvl7pPr marR="0" lvl="6" algn="l" rtl="0">
       <a:lnSpc>
         <a:spcPct val="100000"/>
       </a:lnSpc>
@@ -202,7 +202,7 @@
         <a:srgbClr val="000000"/>
       </a:buClr>
       <a:buFont typeface="Arial"/>
-      <a:defRPr b="0" i="0" sz="1400" u="none" cap="none" strike="noStrike">
+      <a:defRPr sz="1400" b="0" i="0" u="none" strike="noStrike" cap="none">
         <a:solidFill>
           <a:srgbClr val="000000"/>
         </a:solidFill>
@@ -212,7 +212,7 @@
         <a:sym typeface="Arial"/>
       </a:defRPr>
     </a:lvl7pPr>
-    <a:lvl8pPr lvl="7" marR="0" rtl="0" algn="l">
+    <a:lvl8pPr marR="0" lvl="7" algn="l" rtl="0">
       <a:lnSpc>
         <a:spcPct val="100000"/>
       </a:lnSpc>
@@ -226,7 +226,7 @@
         <a:srgbClr val="000000"/>
       </a:buClr>
       <a:buFont typeface="Arial"/>
-      <a:defRPr b="0" i="0" sz="1400" u="none" cap="none" strike="noStrike">
+      <a:defRPr sz="1400" b="0" i="0" u="none" strike="noStrike" cap="none">
         <a:solidFill>
           <a:srgbClr val="000000"/>
         </a:solidFill>
@@ -236,7 +236,7 @@
         <a:sym typeface="Arial"/>
       </a:defRPr>
     </a:lvl8pPr>
-    <a:lvl9pPr lvl="8" marR="0" rtl="0" algn="l">
+    <a:lvl9pPr marR="0" lvl="8" algn="l" rtl="0">
       <a:lnSpc>
         <a:spcPct val="100000"/>
       </a:lnSpc>
@@ -250,7 +250,7 @@
         <a:srgbClr val="000000"/>
       </a:buClr>
       <a:buFont typeface="Arial"/>
-      <a:defRPr b="0" i="0" sz="1400" u="none" cap="none" strike="noStrike">
+      <a:defRPr sz="1400" b="0" i="0" u="none" strike="noStrike" cap="none">
         <a:solidFill>
           <a:srgbClr val="000000"/>
         </a:solidFill>
@@ -263,7 +263,7 @@
   </p:defaultTextStyle>
   <p:extLst>
     <p:ext uri="{EFAFB233-063F-42B5-8137-9DF3F51BA10A}">
-      <p15:sldGuideLst>
+      <p15:sldGuideLst xmlns:p15="http://schemas.microsoft.com/office/powerpoint/2012/main">
         <p15:guide id="1" orient="horz" pos="1620">
           <p15:clr>
             <a:srgbClr val="747775"/>
@@ -281,11 +281,16 @@
 </file>
 
 <file path=ppt/notesMasters/notesMaster1.xml><?xml version="1.0" encoding="utf-8"?>
-<p:notesMaster xmlns:a="http://schemas.openxmlformats.org/drawingml/2006/main" xmlns:r="http://schemas.openxmlformats.org/officeDocument/2006/relationships" xmlns:mc="http://schemas.openxmlformats.org/markup-compatibility/2006" xmlns:mv="urn:schemas-microsoft-com:mac:vml" xmlns:p="http://schemas.openxmlformats.org/presentationml/2006/main" xmlns:c="http://schemas.openxmlformats.org/drawingml/2006/chart" xmlns:dgm="http://schemas.openxmlformats.org/drawingml/2006/diagram" xmlns:o="urn:schemas-microsoft-com:office:office" xmlns:v="urn:schemas-microsoft-com:vml" xmlns:pvml="urn:schemas-microsoft-com:office:powerpoint" xmlns:com="http://schemas.openxmlformats.org/drawingml/2006/compatibility" xmlns:p14="http://schemas.microsoft.com/office/powerpoint/2010/main" xmlns:p15="http://schemas.microsoft.com/office/powerpoint/2012/main" xmlns:ahyp="http://schemas.microsoft.com/office/drawing/2018/hyperlinkcolor">
+<p:notesMaster xmlns:a="http://schemas.openxmlformats.org/drawingml/2006/main" xmlns:r="http://schemas.openxmlformats.org/officeDocument/2006/relationships" xmlns:p="http://schemas.openxmlformats.org/presentationml/2006/main">
   <p:cSld>
+    <p:bg>
+      <p:bgRef idx="1001">
+        <a:schemeClr val="bg1"/>
+      </p:bgRef>
+    </p:bg>
     <p:spTree>
       <p:nvGrpSpPr>
-        <p:cNvPr id="2" name="Shape 2"/>
+        <p:cNvPr id="1" name="Shape 2"/>
         <p:cNvGrpSpPr/>
         <p:nvPr/>
       </p:nvGrpSpPr>
@@ -300,9 +305,11 @@
       <p:sp>
         <p:nvSpPr>
           <p:cNvPr id="3" name="Google Shape;3;n"/>
-          <p:cNvSpPr/>
+          <p:cNvSpPr>
+            <a:spLocks noGrp="1" noRot="1" noChangeAspect="1"/>
+          </p:cNvSpPr>
           <p:nvPr>
-            <p:ph idx="2" type="sldImg"/>
+            <p:ph type="sldImg" idx="2"/>
           </p:nvPr>
         </p:nvSpPr>
         <p:spPr>
@@ -311,9 +318,13 @@
             <a:ext cx="6096075" cy="3429000"/>
           </a:xfrm>
           <a:custGeom>
-            <a:rect b="b" l="l" r="r" t="t"/>
+            <a:avLst/>
+            <a:gdLst/>
+            <a:ahLst/>
+            <a:cxnLst/>
+            <a:rect l="l" t="t" r="r" b="b"/>
             <a:pathLst>
-              <a:path extrusionOk="0" h="120000" w="120000">
+              <a:path w="120000" h="120000" extrusionOk="0">
                 <a:moveTo>
                   <a:pt x="0" y="0"/>
                 </a:moveTo>
@@ -331,23 +342,25 @@
             </a:pathLst>
           </a:custGeom>
           <a:noFill/>
-          <a:ln cap="flat" cmpd="sng" w="9525">
+          <a:ln w="9525" cap="flat" cmpd="sng">
             <a:solidFill>
               <a:srgbClr val="000000"/>
             </a:solidFill>
             <a:prstDash val="solid"/>
             <a:round/>
-            <a:headEnd len="sm" w="sm" type="none"/>
-            <a:tailEnd len="sm" w="sm" type="none"/>
+            <a:headEnd type="none" w="sm" len="sm"/>
+            <a:tailEnd type="none" w="sm" len="sm"/>
           </a:ln>
         </p:spPr>
       </p:sp>
       <p:sp>
         <p:nvSpPr>
           <p:cNvPr id="4" name="Google Shape;4;n"/>
-          <p:cNvSpPr txBox="1"/>
+          <p:cNvSpPr txBox="1">
+            <a:spLocks noGrp="1"/>
+          </p:cNvSpPr>
           <p:nvPr>
-            <p:ph idx="1" type="body"/>
+            <p:ph type="body" idx="1"/>
           </p:nvPr>
         </p:nvSpPr>
         <p:spPr>
@@ -364,11 +377,11 @@
           </a:ln>
         </p:spPr>
         <p:txBody>
-          <a:bodyPr anchorCtr="0" anchor="t" bIns="91425" lIns="91425" spcFirstLastPara="1" rIns="91425" wrap="square" tIns="91425">
+          <a:bodyPr spcFirstLastPara="1" wrap="square" lIns="91425" tIns="91425" rIns="91425" bIns="91425" anchor="t" anchorCtr="0">
             <a:noAutofit/>
           </a:bodyPr>
           <a:lstStyle>
-            <a:lvl1pPr indent="-298450" lvl="0" marL="457200">
+            <a:lvl1pPr marL="457200" lvl="0" indent="-298450">
               <a:spcBef>
                 <a:spcPts val="0"/>
               </a:spcBef>
@@ -379,7 +392,7 @@
               <a:buChar char="●"/>
               <a:defRPr sz="1100"/>
             </a:lvl1pPr>
-            <a:lvl2pPr indent="-298450" lvl="1" marL="914400">
+            <a:lvl2pPr marL="914400" lvl="1" indent="-298450">
               <a:spcBef>
                 <a:spcPts val="0"/>
               </a:spcBef>
@@ -390,7 +403,7 @@
               <a:buChar char="○"/>
               <a:defRPr sz="1100"/>
             </a:lvl2pPr>
-            <a:lvl3pPr indent="-298450" lvl="2" marL="1371600">
+            <a:lvl3pPr marL="1371600" lvl="2" indent="-298450">
               <a:spcBef>
                 <a:spcPts val="0"/>
               </a:spcBef>
@@ -401,7 +414,7 @@
               <a:buChar char="■"/>
               <a:defRPr sz="1100"/>
             </a:lvl3pPr>
-            <a:lvl4pPr indent="-298450" lvl="3" marL="1828800">
+            <a:lvl4pPr marL="1828800" lvl="3" indent="-298450">
               <a:spcBef>
                 <a:spcPts val="0"/>
               </a:spcBef>
@@ -412,7 +425,7 @@
               <a:buChar char="●"/>
               <a:defRPr sz="1100"/>
             </a:lvl4pPr>
-            <a:lvl5pPr indent="-298450" lvl="4" marL="2286000">
+            <a:lvl5pPr marL="2286000" lvl="4" indent="-298450">
               <a:spcBef>
                 <a:spcPts val="0"/>
               </a:spcBef>
@@ -423,7 +436,7 @@
               <a:buChar char="○"/>
               <a:defRPr sz="1100"/>
             </a:lvl5pPr>
-            <a:lvl6pPr indent="-298450" lvl="5" marL="2743200">
+            <a:lvl6pPr marL="2743200" lvl="5" indent="-298450">
               <a:spcBef>
                 <a:spcPts val="0"/>
               </a:spcBef>
@@ -434,7 +447,7 @@
               <a:buChar char="■"/>
               <a:defRPr sz="1100"/>
             </a:lvl6pPr>
-            <a:lvl7pPr indent="-298450" lvl="6" marL="3200400">
+            <a:lvl7pPr marL="3200400" lvl="6" indent="-298450">
               <a:spcBef>
                 <a:spcPts val="0"/>
               </a:spcBef>
@@ -445,7 +458,7 @@
               <a:buChar char="●"/>
               <a:defRPr sz="1100"/>
             </a:lvl7pPr>
-            <a:lvl8pPr indent="-298450" lvl="7" marL="3657600">
+            <a:lvl8pPr marL="3657600" lvl="7" indent="-298450">
               <a:spcBef>
                 <a:spcPts val="0"/>
               </a:spcBef>
@@ -456,7 +469,7 @@
               <a:buChar char="○"/>
               <a:defRPr sz="1100"/>
             </a:lvl8pPr>
-            <a:lvl9pPr indent="-298450" lvl="8" marL="4114800">
+            <a:lvl9pPr marL="4114800" lvl="8" indent="-298450">
               <a:spcBef>
                 <a:spcPts val="0"/>
               </a:spcBef>
@@ -468,14 +481,16 @@
               <a:defRPr sz="1100"/>
             </a:lvl9pPr>
           </a:lstStyle>
-          <a:p/>
+          <a:p>
+            <a:endParaRPr/>
+          </a:p>
         </p:txBody>
       </p:sp>
     </p:spTree>
   </p:cSld>
-  <p:clrMap accent1="accent1" accent2="accent2" accent3="accent3" accent4="accent4" accent5="accent5" accent6="accent6" bg1="lt1" bg2="dk2" tx1="dk1" tx2="lt2" folHlink="folHlink" hlink="hlink"/>
+  <p:clrMap bg1="lt1" tx1="dk1" bg2="dk2" tx2="lt2" accent1="accent1" accent2="accent2" accent3="accent3" accent4="accent4" accent5="accent5" accent6="accent6" hlink="hlink" folHlink="folHlink"/>
   <p:notesStyle>
-    <a:defPPr lvl="0" marR="0" rtl="0" algn="l">
+    <a:defPPr marR="0" lvl="0" algn="l" rtl="0">
       <a:lnSpc>
         <a:spcPct val="100000"/>
       </a:lnSpc>
@@ -486,7 +501,7 @@
         <a:spcPts val="0"/>
       </a:spcAft>
     </a:defPPr>
-    <a:lvl1pPr lvl="0" marR="0" rtl="0" algn="l">
+    <a:lvl1pPr marR="0" lvl="0" algn="l" rtl="0">
       <a:lnSpc>
         <a:spcPct val="100000"/>
       </a:lnSpc>
@@ -500,7 +515,7 @@
         <a:srgbClr val="000000"/>
       </a:buClr>
       <a:buFont typeface="Arial"/>
-      <a:defRPr b="0" i="0" sz="1400" u="none" cap="none" strike="noStrike">
+      <a:defRPr sz="1400" b="0" i="0" u="none" strike="noStrike" cap="none">
         <a:solidFill>
           <a:srgbClr val="000000"/>
         </a:solidFill>
@@ -510,7 +525,7 @@
         <a:sym typeface="Arial"/>
       </a:defRPr>
     </a:lvl1pPr>
-    <a:lvl2pPr lvl="1" marR="0" rtl="0" algn="l">
+    <a:lvl2pPr marR="0" lvl="1" algn="l" rtl="0">
       <a:lnSpc>
         <a:spcPct val="100000"/>
       </a:lnSpc>
@@ -524,7 +539,7 @@
         <a:srgbClr val="000000"/>
       </a:buClr>
       <a:buFont typeface="Arial"/>
-      <a:defRPr b="0" i="0" sz="1400" u="none" cap="none" strike="noStrike">
+      <a:defRPr sz="1400" b="0" i="0" u="none" strike="noStrike" cap="none">
         <a:solidFill>
           <a:srgbClr val="000000"/>
         </a:solidFill>
@@ -534,7 +549,7 @@
         <a:sym typeface="Arial"/>
       </a:defRPr>
     </a:lvl2pPr>
-    <a:lvl3pPr lvl="2" marR="0" rtl="0" algn="l">
+    <a:lvl3pPr marR="0" lvl="2" algn="l" rtl="0">
       <a:lnSpc>
         <a:spcPct val="100000"/>
       </a:lnSpc>
@@ -548,7 +563,7 @@
         <a:srgbClr val="000000"/>
       </a:buClr>
       <a:buFont typeface="Arial"/>
-      <a:defRPr b="0" i="0" sz="1400" u="none" cap="none" strike="noStrike">
+      <a:defRPr sz="1400" b="0" i="0" u="none" strike="noStrike" cap="none">
         <a:solidFill>
           <a:srgbClr val="000000"/>
         </a:solidFill>
@@ -558,7 +573,7 @@
         <a:sym typeface="Arial"/>
       </a:defRPr>
     </a:lvl3pPr>
-    <a:lvl4pPr lvl="3" marR="0" rtl="0" algn="l">
+    <a:lvl4pPr marR="0" lvl="3" algn="l" rtl="0">
       <a:lnSpc>
         <a:spcPct val="100000"/>
       </a:lnSpc>
@@ -572,7 +587,7 @@
         <a:srgbClr val="000000"/>
       </a:buClr>
       <a:buFont typeface="Arial"/>
-      <a:defRPr b="0" i="0" sz="1400" u="none" cap="none" strike="noStrike">
+      <a:defRPr sz="1400" b="0" i="0" u="none" strike="noStrike" cap="none">
         <a:solidFill>
           <a:srgbClr val="000000"/>
         </a:solidFill>
@@ -582,7 +597,7 @@
         <a:sym typeface="Arial"/>
       </a:defRPr>
     </a:lvl4pPr>
-    <a:lvl5pPr lvl="4" marR="0" rtl="0" algn="l">
+    <a:lvl5pPr marR="0" lvl="4" algn="l" rtl="0">
       <a:lnSpc>
         <a:spcPct val="100000"/>
       </a:lnSpc>
@@ -596,7 +611,7 @@
         <a:srgbClr val="000000"/>
       </a:buClr>
       <a:buFont typeface="Arial"/>
-      <a:defRPr b="0" i="0" sz="1400" u="none" cap="none" strike="noStrike">
+      <a:defRPr sz="1400" b="0" i="0" u="none" strike="noStrike" cap="none">
         <a:solidFill>
           <a:srgbClr val="000000"/>
         </a:solidFill>
@@ -606,7 +621,7 @@
         <a:sym typeface="Arial"/>
       </a:defRPr>
     </a:lvl5pPr>
-    <a:lvl6pPr lvl="5" marR="0" rtl="0" algn="l">
+    <a:lvl6pPr marR="0" lvl="5" algn="l" rtl="0">
       <a:lnSpc>
         <a:spcPct val="100000"/>
       </a:lnSpc>
@@ -620,7 +635,7 @@
         <a:srgbClr val="000000"/>
       </a:buClr>
       <a:buFont typeface="Arial"/>
-      <a:defRPr b="0" i="0" sz="1400" u="none" cap="none" strike="noStrike">
+      <a:defRPr sz="1400" b="0" i="0" u="none" strike="noStrike" cap="none">
         <a:solidFill>
           <a:srgbClr val="000000"/>
         </a:solidFill>
@@ -630,7 +645,7 @@
         <a:sym typeface="Arial"/>
       </a:defRPr>
     </a:lvl6pPr>
-    <a:lvl7pPr lvl="6" marR="0" rtl="0" algn="l">
+    <a:lvl7pPr marR="0" lvl="6" algn="l" rtl="0">
       <a:lnSpc>
         <a:spcPct val="100000"/>
       </a:lnSpc>
@@ -644,7 +659,7 @@
         <a:srgbClr val="000000"/>
       </a:buClr>
       <a:buFont typeface="Arial"/>
-      <a:defRPr b="0" i="0" sz="1400" u="none" cap="none" strike="noStrike">
+      <a:defRPr sz="1400" b="0" i="0" u="none" strike="noStrike" cap="none">
         <a:solidFill>
           <a:srgbClr val="000000"/>
         </a:solidFill>
@@ -654,7 +669,7 @@
         <a:sym typeface="Arial"/>
       </a:defRPr>
     </a:lvl7pPr>
-    <a:lvl8pPr lvl="7" marR="0" rtl="0" algn="l">
+    <a:lvl8pPr marR="0" lvl="7" algn="l" rtl="0">
       <a:lnSpc>
         <a:spcPct val="100000"/>
       </a:lnSpc>
@@ -668,7 +683,7 @@
         <a:srgbClr val="000000"/>
       </a:buClr>
       <a:buFont typeface="Arial"/>
-      <a:defRPr b="0" i="0" sz="1400" u="none" cap="none" strike="noStrike">
+      <a:defRPr sz="1400" b="0" i="0" u="none" strike="noStrike" cap="none">
         <a:solidFill>
           <a:srgbClr val="000000"/>
         </a:solidFill>
@@ -678,7 +693,7 @@
         <a:sym typeface="Arial"/>
       </a:defRPr>
     </a:lvl8pPr>
-    <a:lvl9pPr lvl="8" marR="0" rtl="0" algn="l">
+    <a:lvl9pPr marR="0" lvl="8" algn="l" rtl="0">
       <a:lnSpc>
         <a:spcPct val="100000"/>
       </a:lnSpc>
@@ -692,7 +707,7 @@
         <a:srgbClr val="000000"/>
       </a:buClr>
       <a:buFont typeface="Arial"/>
-      <a:defRPr b="0" i="0" sz="1400" u="none" cap="none" strike="noStrike">
+      <a:defRPr sz="1400" b="0" i="0" u="none" strike="noStrike" cap="none">
         <a:solidFill>
           <a:srgbClr val="000000"/>
         </a:solidFill>
@@ -707,11 +722,11 @@
 </file>
 
 <file path=ppt/notesSlides/notesSlide1.xml><?xml version="1.0" encoding="utf-8"?>
-<p:notes xmlns:a="http://schemas.openxmlformats.org/drawingml/2006/main" xmlns:r="http://schemas.openxmlformats.org/officeDocument/2006/relationships" xmlns:mc="http://schemas.openxmlformats.org/markup-compatibility/2006" xmlns:mv="urn:schemas-microsoft-com:mac:vml" xmlns:p="http://schemas.openxmlformats.org/presentationml/2006/main" xmlns:c="http://schemas.openxmlformats.org/drawingml/2006/chart" xmlns:dgm="http://schemas.openxmlformats.org/drawingml/2006/diagram" xmlns:o="urn:schemas-microsoft-com:office:office" xmlns:v="urn:schemas-microsoft-com:vml" xmlns:pvml="urn:schemas-microsoft-com:office:powerpoint" xmlns:com="http://schemas.openxmlformats.org/drawingml/2006/compatibility" xmlns:p14="http://schemas.microsoft.com/office/powerpoint/2010/main" xmlns:p15="http://schemas.microsoft.com/office/powerpoint/2012/main" xmlns:ahyp="http://schemas.microsoft.com/office/drawing/2018/hyperlinkcolor" showMasterPhAnim="0" showMasterSp="0">
+<p:notes xmlns:a="http://schemas.openxmlformats.org/drawingml/2006/main" xmlns:r="http://schemas.openxmlformats.org/officeDocument/2006/relationships" xmlns:p="http://schemas.openxmlformats.org/presentationml/2006/main" showMasterSp="0" showMasterPhAnim="0">
   <p:cSld>
     <p:spTree>
       <p:nvGrpSpPr>
-        <p:cNvPr id="58" name="Shape 58"/>
+        <p:cNvPr id="1" name="Shape 58"/>
         <p:cNvGrpSpPr/>
         <p:nvPr/>
       </p:nvGrpSpPr>
@@ -726,9 +741,11 @@
       <p:sp>
         <p:nvSpPr>
           <p:cNvPr id="59" name="Google Shape;59;p:notes"/>
-          <p:cNvSpPr/>
+          <p:cNvSpPr>
+            <a:spLocks noGrp="1" noRot="1" noChangeAspect="1"/>
+          </p:cNvSpPr>
           <p:nvPr>
-            <p:ph idx="2" type="sldImg"/>
+            <p:ph type="sldImg" idx="2"/>
           </p:nvPr>
         </p:nvSpPr>
         <p:spPr>
@@ -737,9 +754,13 @@
             <a:ext cx="6096075" cy="3429000"/>
           </a:xfrm>
           <a:custGeom>
-            <a:rect b="b" l="l" r="r" t="t"/>
+            <a:avLst/>
+            <a:gdLst/>
+            <a:ahLst/>
+            <a:cxnLst/>
+            <a:rect l="l" t="t" r="r" b="b"/>
             <a:pathLst>
-              <a:path extrusionOk="0" h="120000" w="120000">
+              <a:path w="120000" h="120000" extrusionOk="0">
                 <a:moveTo>
                   <a:pt x="0" y="0"/>
                 </a:moveTo>
@@ -761,9 +782,11 @@
       <p:sp>
         <p:nvSpPr>
           <p:cNvPr id="60" name="Google Shape;60;p:notes"/>
-          <p:cNvSpPr txBox="1"/>
+          <p:cNvSpPr txBox="1">
+            <a:spLocks noGrp="1"/>
+          </p:cNvSpPr>
           <p:nvPr>
-            <p:ph idx="1" type="body"/>
+            <p:ph type="body" idx="1"/>
           </p:nvPr>
         </p:nvSpPr>
         <p:spPr>
@@ -776,12 +799,12 @@
           </a:prstGeom>
         </p:spPr>
         <p:txBody>
-          <a:bodyPr anchorCtr="0" anchor="t" bIns="91425" lIns="91425" spcFirstLastPara="1" rIns="91425" wrap="square" tIns="91425">
+          <a:bodyPr spcFirstLastPara="1" wrap="square" lIns="91425" tIns="91425" rIns="91425" bIns="91425" anchor="t" anchorCtr="0">
             <a:noAutofit/>
           </a:bodyPr>
           <a:lstStyle/>
           <a:p>
-            <a:pPr indent="0" lvl="0" marL="0" rtl="0" algn="l">
+            <a:pPr marL="0" lvl="0" indent="0" algn="l" rtl="0">
               <a:spcBef>
                 <a:spcPts val="0"/>
               </a:spcBef>
@@ -790,9 +813,6 @@
               </a:spcAft>
               <a:buNone/>
             </a:pPr>
-            <a:r>
-              <a:t/>
-            </a:r>
             <a:endParaRPr/>
           </a:p>
         </p:txBody>
@@ -806,11 +826,11 @@
 </file>
 
 <file path=ppt/notesSlides/notesSlide2.xml><?xml version="1.0" encoding="utf-8"?>
-<p:notes xmlns:a="http://schemas.openxmlformats.org/drawingml/2006/main" xmlns:r="http://schemas.openxmlformats.org/officeDocument/2006/relationships" xmlns:mc="http://schemas.openxmlformats.org/markup-compatibility/2006" xmlns:mv="urn:schemas-microsoft-com:mac:vml" xmlns:p="http://schemas.openxmlformats.org/presentationml/2006/main" xmlns:c="http://schemas.openxmlformats.org/drawingml/2006/chart" xmlns:dgm="http://schemas.openxmlformats.org/drawingml/2006/diagram" xmlns:o="urn:schemas-microsoft-com:office:office" xmlns:v="urn:schemas-microsoft-com:vml" xmlns:pvml="urn:schemas-microsoft-com:office:powerpoint" xmlns:com="http://schemas.openxmlformats.org/drawingml/2006/compatibility" xmlns:p14="http://schemas.microsoft.com/office/powerpoint/2010/main" xmlns:p15="http://schemas.microsoft.com/office/powerpoint/2012/main" xmlns:ahyp="http://schemas.microsoft.com/office/drawing/2018/hyperlinkcolor" showMasterPhAnim="0" showMasterSp="0">
+<p:notes xmlns:a="http://schemas.openxmlformats.org/drawingml/2006/main" xmlns:r="http://schemas.openxmlformats.org/officeDocument/2006/relationships" xmlns:p="http://schemas.openxmlformats.org/presentationml/2006/main" showMasterSp="0" showMasterPhAnim="0">
   <p:cSld>
     <p:spTree>
       <p:nvGrpSpPr>
-        <p:cNvPr id="64" name="Shape 64"/>
+        <p:cNvPr id="1" name="Shape 64"/>
         <p:cNvGrpSpPr/>
         <p:nvPr/>
       </p:nvGrpSpPr>
@@ -825,9 +845,11 @@
       <p:sp>
         <p:nvSpPr>
           <p:cNvPr id="65" name="Google Shape;65;g3d73d71bec6_0_324:notes"/>
-          <p:cNvSpPr/>
+          <p:cNvSpPr>
+            <a:spLocks noGrp="1" noRot="1" noChangeAspect="1"/>
+          </p:cNvSpPr>
           <p:nvPr>
-            <p:ph idx="2" type="sldImg"/>
+            <p:ph type="sldImg" idx="2"/>
           </p:nvPr>
         </p:nvSpPr>
         <p:spPr>
@@ -836,9 +858,13 @@
             <a:ext cx="6096000" cy="3429000"/>
           </a:xfrm>
           <a:custGeom>
-            <a:rect b="b" l="l" r="r" t="t"/>
+            <a:avLst/>
+            <a:gdLst/>
+            <a:ahLst/>
+            <a:cxnLst/>
+            <a:rect l="l" t="t" r="r" b="b"/>
             <a:pathLst>
-              <a:path extrusionOk="0" h="120000" w="120000">
+              <a:path w="120000" h="120000" extrusionOk="0">
                 <a:moveTo>
                   <a:pt x="0" y="0"/>
                 </a:moveTo>
@@ -860,9 +886,11 @@
       <p:sp>
         <p:nvSpPr>
           <p:cNvPr id="66" name="Google Shape;66;g3d73d71bec6_0_324:notes"/>
-          <p:cNvSpPr txBox="1"/>
+          <p:cNvSpPr txBox="1">
+            <a:spLocks noGrp="1"/>
+          </p:cNvSpPr>
           <p:nvPr>
-            <p:ph idx="1" type="body"/>
+            <p:ph type="body" idx="1"/>
           </p:nvPr>
         </p:nvSpPr>
         <p:spPr>
@@ -875,12 +903,12 @@
           </a:prstGeom>
         </p:spPr>
         <p:txBody>
-          <a:bodyPr anchorCtr="0" anchor="t" bIns="91425" lIns="91425" spcFirstLastPara="1" rIns="91425" wrap="square" tIns="91425">
+          <a:bodyPr spcFirstLastPara="1" wrap="square" lIns="91425" tIns="91425" rIns="91425" bIns="91425" anchor="t" anchorCtr="0">
             <a:noAutofit/>
           </a:bodyPr>
           <a:lstStyle/>
           <a:p>
-            <a:pPr indent="0" lvl="0" marL="0" rtl="0" algn="l">
+            <a:pPr marL="0" lvl="0" indent="0" algn="l" rtl="0">
               <a:spcBef>
                 <a:spcPts val="0"/>
               </a:spcBef>
@@ -889,9 +917,6 @@
               </a:spcAft>
               <a:buNone/>
             </a:pPr>
-            <a:r>
-              <a:t/>
-            </a:r>
             <a:endParaRPr/>
           </a:p>
         </p:txBody>
@@ -905,11 +930,11 @@
 </file>
 
 <file path=ppt/notesSlides/notesSlide3.xml><?xml version="1.0" encoding="utf-8"?>
-<p:notes xmlns:a="http://schemas.openxmlformats.org/drawingml/2006/main" xmlns:r="http://schemas.openxmlformats.org/officeDocument/2006/relationships" xmlns:mc="http://schemas.openxmlformats.org/markup-compatibility/2006" xmlns:mv="urn:schemas-microsoft-com:mac:vml" xmlns:p="http://schemas.openxmlformats.org/presentationml/2006/main" xmlns:c="http://schemas.openxmlformats.org/drawingml/2006/chart" xmlns:dgm="http://schemas.openxmlformats.org/drawingml/2006/diagram" xmlns:o="urn:schemas-microsoft-com:office:office" xmlns:v="urn:schemas-microsoft-com:vml" xmlns:pvml="urn:schemas-microsoft-com:office:powerpoint" xmlns:com="http://schemas.openxmlformats.org/drawingml/2006/compatibility" xmlns:p14="http://schemas.microsoft.com/office/powerpoint/2010/main" xmlns:p15="http://schemas.microsoft.com/office/powerpoint/2012/main" xmlns:ahyp="http://schemas.microsoft.com/office/drawing/2018/hyperlinkcolor" showMasterPhAnim="0" showMasterSp="0">
+<p:notes xmlns:a="http://schemas.openxmlformats.org/drawingml/2006/main" xmlns:r="http://schemas.openxmlformats.org/officeDocument/2006/relationships" xmlns:p="http://schemas.openxmlformats.org/presentationml/2006/main" showMasterSp="0" showMasterPhAnim="0">
   <p:cSld>
     <p:spTree>
       <p:nvGrpSpPr>
-        <p:cNvPr id="70" name="Shape 70"/>
+        <p:cNvPr id="1" name="Shape 70"/>
         <p:cNvGrpSpPr/>
         <p:nvPr/>
       </p:nvGrpSpPr>
@@ -924,9 +949,11 @@
       <p:sp>
         <p:nvSpPr>
           <p:cNvPr id="71" name="Google Shape;71;g3d73d71bec6_0_331:notes"/>
-          <p:cNvSpPr/>
+          <p:cNvSpPr>
+            <a:spLocks noGrp="1" noRot="1" noChangeAspect="1"/>
+          </p:cNvSpPr>
           <p:nvPr>
-            <p:ph idx="2" type="sldImg"/>
+            <p:ph type="sldImg" idx="2"/>
           </p:nvPr>
         </p:nvSpPr>
         <p:spPr>
@@ -935,9 +962,13 @@
             <a:ext cx="6096000" cy="3429000"/>
           </a:xfrm>
           <a:custGeom>
-            <a:rect b="b" l="l" r="r" t="t"/>
+            <a:avLst/>
+            <a:gdLst/>
+            <a:ahLst/>
+            <a:cxnLst/>
+            <a:rect l="l" t="t" r="r" b="b"/>
             <a:pathLst>
-              <a:path extrusionOk="0" h="120000" w="120000">
+              <a:path w="120000" h="120000" extrusionOk="0">
                 <a:moveTo>
                   <a:pt x="0" y="0"/>
                 </a:moveTo>
@@ -959,9 +990,11 @@
       <p:sp>
         <p:nvSpPr>
           <p:cNvPr id="72" name="Google Shape;72;g3d73d71bec6_0_331:notes"/>
-          <p:cNvSpPr txBox="1"/>
+          <p:cNvSpPr txBox="1">
+            <a:spLocks noGrp="1"/>
+          </p:cNvSpPr>
           <p:nvPr>
-            <p:ph idx="1" type="body"/>
+            <p:ph type="body" idx="1"/>
           </p:nvPr>
         </p:nvSpPr>
         <p:spPr>
@@ -974,12 +1007,12 @@
           </a:prstGeom>
         </p:spPr>
         <p:txBody>
-          <a:bodyPr anchorCtr="0" anchor="t" bIns="91425" lIns="91425" spcFirstLastPara="1" rIns="91425" wrap="square" tIns="91425">
+          <a:bodyPr spcFirstLastPara="1" wrap="square" lIns="91425" tIns="91425" rIns="91425" bIns="91425" anchor="t" anchorCtr="0">
             <a:noAutofit/>
           </a:bodyPr>
           <a:lstStyle/>
           <a:p>
-            <a:pPr indent="0" lvl="0" marL="0" rtl="0" algn="l">
+            <a:pPr marL="0" lvl="0" indent="0" algn="l" rtl="0">
               <a:spcBef>
                 <a:spcPts val="0"/>
               </a:spcBef>
@@ -988,9 +1021,6 @@
               </a:spcAft>
               <a:buNone/>
             </a:pPr>
-            <a:r>
-              <a:t/>
-            </a:r>
             <a:endParaRPr/>
           </a:p>
         </p:txBody>
@@ -1004,11 +1034,11 @@
 </file>
 
 <file path=ppt/notesSlides/notesSlide4.xml><?xml version="1.0" encoding="utf-8"?>
-<p:notes xmlns:a="http://schemas.openxmlformats.org/drawingml/2006/main" xmlns:r="http://schemas.openxmlformats.org/officeDocument/2006/relationships" xmlns:mc="http://schemas.openxmlformats.org/markup-compatibility/2006" xmlns:mv="urn:schemas-microsoft-com:mac:vml" xmlns:p="http://schemas.openxmlformats.org/presentationml/2006/main" xmlns:c="http://schemas.openxmlformats.org/drawingml/2006/chart" xmlns:dgm="http://schemas.openxmlformats.org/drawingml/2006/diagram" xmlns:o="urn:schemas-microsoft-com:office:office" xmlns:v="urn:schemas-microsoft-com:vml" xmlns:pvml="urn:schemas-microsoft-com:office:powerpoint" xmlns:com="http://schemas.openxmlformats.org/drawingml/2006/compatibility" xmlns:p14="http://schemas.microsoft.com/office/powerpoint/2010/main" xmlns:p15="http://schemas.microsoft.com/office/powerpoint/2012/main" xmlns:ahyp="http://schemas.microsoft.com/office/drawing/2018/hyperlinkcolor" showMasterPhAnim="0" showMasterSp="0">
+<p:notes xmlns:a="http://schemas.openxmlformats.org/drawingml/2006/main" xmlns:r="http://schemas.openxmlformats.org/officeDocument/2006/relationships" xmlns:p="http://schemas.openxmlformats.org/presentationml/2006/main" showMasterSp="0" showMasterPhAnim="0">
   <p:cSld>
     <p:spTree>
       <p:nvGrpSpPr>
-        <p:cNvPr id="77" name="Shape 77"/>
+        <p:cNvPr id="1" name="Shape 77"/>
         <p:cNvGrpSpPr/>
         <p:nvPr/>
       </p:nvGrpSpPr>
@@ -1023,20 +1053,26 @@
       <p:sp>
         <p:nvSpPr>
           <p:cNvPr id="78" name="Google Shape;78;g3d74bc0a55d_0_0:notes"/>
-          <p:cNvSpPr/>
+          <p:cNvSpPr>
+            <a:spLocks noGrp="1" noRot="1" noChangeAspect="1"/>
+          </p:cNvSpPr>
           <p:nvPr>
-            <p:ph idx="2" type="sldImg"/>
+            <p:ph type="sldImg" idx="2"/>
           </p:nvPr>
         </p:nvSpPr>
         <p:spPr>
           <a:xfrm>
-            <a:off x="381300" y="685800"/>
+            <a:off x="381000" y="685800"/>
             <a:ext cx="6096000" cy="3429000"/>
           </a:xfrm>
           <a:custGeom>
-            <a:rect b="b" l="l" r="r" t="t"/>
+            <a:avLst/>
+            <a:gdLst/>
+            <a:ahLst/>
+            <a:cxnLst/>
+            <a:rect l="l" t="t" r="r" b="b"/>
             <a:pathLst>
-              <a:path extrusionOk="0" h="120000" w="120000">
+              <a:path w="120000" h="120000" extrusionOk="0">
                 <a:moveTo>
                   <a:pt x="0" y="0"/>
                 </a:moveTo>
@@ -1058,9 +1094,11 @@
       <p:sp>
         <p:nvSpPr>
           <p:cNvPr id="79" name="Google Shape;79;g3d74bc0a55d_0_0:notes"/>
-          <p:cNvSpPr txBox="1"/>
+          <p:cNvSpPr txBox="1">
+            <a:spLocks noGrp="1"/>
+          </p:cNvSpPr>
           <p:nvPr>
-            <p:ph idx="1" type="body"/>
+            <p:ph type="body" idx="1"/>
           </p:nvPr>
         </p:nvSpPr>
         <p:spPr>
@@ -1073,12 +1111,12 @@
           </a:prstGeom>
         </p:spPr>
         <p:txBody>
-          <a:bodyPr anchorCtr="0" anchor="t" bIns="91425" lIns="91425" spcFirstLastPara="1" rIns="91425" wrap="square" tIns="91425">
+          <a:bodyPr spcFirstLastPara="1" wrap="square" lIns="91425" tIns="91425" rIns="91425" bIns="91425" anchor="t" anchorCtr="0">
             <a:noAutofit/>
           </a:bodyPr>
           <a:lstStyle/>
           <a:p>
-            <a:pPr indent="0" lvl="0" marL="0" rtl="0" algn="l">
+            <a:pPr marL="0" lvl="0" indent="0" algn="l" rtl="0">
               <a:spcBef>
                 <a:spcPts val="0"/>
               </a:spcBef>
@@ -1087,9 +1125,6 @@
               </a:spcAft>
               <a:buNone/>
             </a:pPr>
-            <a:r>
-              <a:t/>
-            </a:r>
             <a:endParaRPr/>
           </a:p>
         </p:txBody>
@@ -1103,11 +1138,11 @@
 </file>
 
 <file path=ppt/notesSlides/notesSlide5.xml><?xml version="1.0" encoding="utf-8"?>
-<p:notes xmlns:a="http://schemas.openxmlformats.org/drawingml/2006/main" xmlns:r="http://schemas.openxmlformats.org/officeDocument/2006/relationships" xmlns:mc="http://schemas.openxmlformats.org/markup-compatibility/2006" xmlns:mv="urn:schemas-microsoft-com:mac:vml" xmlns:p="http://schemas.openxmlformats.org/presentationml/2006/main" xmlns:c="http://schemas.openxmlformats.org/drawingml/2006/chart" xmlns:dgm="http://schemas.openxmlformats.org/drawingml/2006/diagram" xmlns:o="urn:schemas-microsoft-com:office:office" xmlns:v="urn:schemas-microsoft-com:vml" xmlns:pvml="urn:schemas-microsoft-com:office:powerpoint" xmlns:com="http://schemas.openxmlformats.org/drawingml/2006/compatibility" xmlns:p14="http://schemas.microsoft.com/office/powerpoint/2010/main" xmlns:p15="http://schemas.microsoft.com/office/powerpoint/2012/main" xmlns:ahyp="http://schemas.microsoft.com/office/drawing/2018/hyperlinkcolor" showMasterPhAnim="0" showMasterSp="0">
+<p:notes xmlns:a="http://schemas.openxmlformats.org/drawingml/2006/main" xmlns:r="http://schemas.openxmlformats.org/officeDocument/2006/relationships" xmlns:p="http://schemas.openxmlformats.org/presentationml/2006/main" showMasterSp="0" showMasterPhAnim="0">
   <p:cSld>
     <p:spTree>
       <p:nvGrpSpPr>
-        <p:cNvPr id="85" name="Shape 85"/>
+        <p:cNvPr id="1" name="Shape 85"/>
         <p:cNvGrpSpPr/>
         <p:nvPr/>
       </p:nvGrpSpPr>
@@ -1122,20 +1157,26 @@
       <p:sp>
         <p:nvSpPr>
           <p:cNvPr id="86" name="Google Shape;86;g3d74bc0a55d_0_8:notes"/>
-          <p:cNvSpPr/>
+          <p:cNvSpPr>
+            <a:spLocks noGrp="1" noRot="1" noChangeAspect="1"/>
+          </p:cNvSpPr>
           <p:nvPr>
-            <p:ph idx="2" type="sldImg"/>
+            <p:ph type="sldImg" idx="2"/>
           </p:nvPr>
         </p:nvSpPr>
         <p:spPr>
           <a:xfrm>
-            <a:off x="381300" y="685800"/>
+            <a:off x="381000" y="685800"/>
             <a:ext cx="6096000" cy="3429000"/>
           </a:xfrm>
           <a:custGeom>
-            <a:rect b="b" l="l" r="r" t="t"/>
+            <a:avLst/>
+            <a:gdLst/>
+            <a:ahLst/>
+            <a:cxnLst/>
+            <a:rect l="l" t="t" r="r" b="b"/>
             <a:pathLst>
-              <a:path extrusionOk="0" h="120000" w="120000">
+              <a:path w="120000" h="120000" extrusionOk="0">
                 <a:moveTo>
                   <a:pt x="0" y="0"/>
                 </a:moveTo>
@@ -1157,9 +1198,11 @@
       <p:sp>
         <p:nvSpPr>
           <p:cNvPr id="87" name="Google Shape;87;g3d74bc0a55d_0_8:notes"/>
-          <p:cNvSpPr txBox="1"/>
+          <p:cNvSpPr txBox="1">
+            <a:spLocks noGrp="1"/>
+          </p:cNvSpPr>
           <p:nvPr>
-            <p:ph idx="1" type="body"/>
+            <p:ph type="body" idx="1"/>
           </p:nvPr>
         </p:nvSpPr>
         <p:spPr>
@@ -1172,12 +1215,12 @@
           </a:prstGeom>
         </p:spPr>
         <p:txBody>
-          <a:bodyPr anchorCtr="0" anchor="t" bIns="91425" lIns="91425" spcFirstLastPara="1" rIns="91425" wrap="square" tIns="91425">
+          <a:bodyPr spcFirstLastPara="1" wrap="square" lIns="91425" tIns="91425" rIns="91425" bIns="91425" anchor="t" anchorCtr="0">
             <a:noAutofit/>
           </a:bodyPr>
           <a:lstStyle/>
           <a:p>
-            <a:pPr indent="0" lvl="0" marL="0" rtl="0" algn="l">
+            <a:pPr marL="0" lvl="0" indent="0" algn="l" rtl="0">
               <a:spcBef>
                 <a:spcPts val="0"/>
               </a:spcBef>
@@ -1186,9 +1229,6 @@
               </a:spcAft>
               <a:buNone/>
             </a:pPr>
-            <a:r>
-              <a:t/>
-            </a:r>
             <a:endParaRPr/>
           </a:p>
         </p:txBody>
@@ -1202,11 +1242,11 @@
 </file>
 
 <file path=ppt/slideLayouts/slideLayout1.xml><?xml version="1.0" encoding="utf-8"?>
-<p:sldLayout xmlns:a="http://schemas.openxmlformats.org/drawingml/2006/main" xmlns:r="http://schemas.openxmlformats.org/officeDocument/2006/relationships" xmlns:mc="http://schemas.openxmlformats.org/markup-compatibility/2006" xmlns:mv="urn:schemas-microsoft-com:mac:vml" xmlns:p="http://schemas.openxmlformats.org/presentationml/2006/main" xmlns:c="http://schemas.openxmlformats.org/drawingml/2006/chart" xmlns:dgm="http://schemas.openxmlformats.org/drawingml/2006/diagram" xmlns:o="urn:schemas-microsoft-com:office:office" xmlns:v="urn:schemas-microsoft-com:vml" xmlns:pvml="urn:schemas-microsoft-com:office:powerpoint" xmlns:com="http://schemas.openxmlformats.org/drawingml/2006/compatibility" xmlns:p14="http://schemas.microsoft.com/office/powerpoint/2010/main" xmlns:p15="http://schemas.microsoft.com/office/powerpoint/2012/main" xmlns:ahyp="http://schemas.microsoft.com/office/drawing/2018/hyperlinkcolor" matchingName="Title slide" type="title">
+<p:sldLayout xmlns:a="http://schemas.openxmlformats.org/drawingml/2006/main" xmlns:r="http://schemas.openxmlformats.org/officeDocument/2006/relationships" xmlns:p="http://schemas.openxmlformats.org/presentationml/2006/main" matchingName="Title slide" type="title">
   <p:cSld name="TITLE">
     <p:spTree>
       <p:nvGrpSpPr>
-        <p:cNvPr id="9" name="Shape 9"/>
+        <p:cNvPr id="1" name="Shape 9"/>
         <p:cNvGrpSpPr/>
         <p:nvPr/>
       </p:nvGrpSpPr>
@@ -1230,9 +1270,13 @@
             <a:ext cx="1081625" cy="1124950"/>
           </a:xfrm>
           <a:custGeom>
-            <a:rect b="b" l="l" r="r" t="t"/>
+            <a:avLst/>
+            <a:gdLst/>
+            <a:ahLst/>
+            <a:cxnLst/>
+            <a:rect l="l" t="t" r="r" b="b"/>
             <a:pathLst>
-              <a:path extrusionOk="0" h="44998" w="43265">
+              <a:path w="43265" h="44998" extrusionOk="0">
                 <a:moveTo>
                   <a:pt x="0" y="44998"/>
                 </a:moveTo>
@@ -1246,14 +1290,14 @@
             </a:pathLst>
           </a:custGeom>
           <a:noFill/>
-          <a:ln cap="flat" cmpd="sng" w="28575">
+          <a:ln w="28575" cap="flat" cmpd="sng">
             <a:solidFill>
               <a:schemeClr val="lt2"/>
             </a:solidFill>
             <a:prstDash val="solid"/>
             <a:miter lim="8000"/>
-            <a:headEnd len="sm" w="sm" type="none"/>
-            <a:tailEnd len="sm" w="sm" type="none"/>
+            <a:headEnd type="none" w="sm" len="sm"/>
+            <a:tailEnd type="none" w="sm" len="sm"/>
           </a:ln>
         </p:spPr>
       </p:sp>
@@ -1269,9 +1313,13 @@
             <a:ext cx="1081625" cy="1124950"/>
           </a:xfrm>
           <a:custGeom>
-            <a:rect b="b" l="l" r="r" t="t"/>
+            <a:avLst/>
+            <a:gdLst/>
+            <a:ahLst/>
+            <a:cxnLst/>
+            <a:rect l="l" t="t" r="r" b="b"/>
             <a:pathLst>
-              <a:path extrusionOk="0" h="44998" w="43265">
+              <a:path w="43265" h="44998" extrusionOk="0">
                 <a:moveTo>
                   <a:pt x="0" y="44998"/>
                 </a:moveTo>
@@ -1285,21 +1333,23 @@
             </a:pathLst>
           </a:custGeom>
           <a:noFill/>
-          <a:ln cap="flat" cmpd="sng" w="28575">
+          <a:ln w="28575" cap="flat" cmpd="sng">
             <a:solidFill>
               <a:schemeClr val="lt2"/>
             </a:solidFill>
             <a:prstDash val="solid"/>
             <a:miter lim="8000"/>
-            <a:headEnd len="sm" w="sm" type="none"/>
-            <a:tailEnd len="sm" w="sm" type="none"/>
+            <a:headEnd type="none" w="sm" len="sm"/>
+            <a:tailEnd type="none" w="sm" len="sm"/>
           </a:ln>
         </p:spPr>
       </p:sp>
       <p:sp>
         <p:nvSpPr>
           <p:cNvPr id="12" name="Google Shape;12;p2"/>
-          <p:cNvSpPr txBox="1"/>
+          <p:cNvSpPr txBox="1">
+            <a:spLocks noGrp="1"/>
+          </p:cNvSpPr>
           <p:nvPr>
             <p:ph type="ctrTitle"/>
           </p:nvPr>
@@ -1314,7 +1364,7 @@
           </a:prstGeom>
         </p:spPr>
         <p:txBody>
-          <a:bodyPr anchorCtr="0" anchor="b" bIns="91425" lIns="91425" spcFirstLastPara="1" rIns="91425" wrap="square" tIns="91425">
+          <a:bodyPr spcFirstLastPara="1" wrap="square" lIns="91425" tIns="91425" rIns="91425" bIns="91425" anchor="b" anchorCtr="0">
             <a:normAutofit/>
           </a:bodyPr>
           <a:lstStyle>
@@ -1418,15 +1468,19 @@
               <a:defRPr/>
             </a:lvl9pPr>
           </a:lstStyle>
-          <a:p/>
+          <a:p>
+            <a:endParaRPr/>
+          </a:p>
         </p:txBody>
       </p:sp>
       <p:sp>
         <p:nvSpPr>
           <p:cNvPr id="13" name="Google Shape;13;p2"/>
-          <p:cNvSpPr txBox="1"/>
+          <p:cNvSpPr txBox="1">
+            <a:spLocks noGrp="1"/>
+          </p:cNvSpPr>
           <p:nvPr>
-            <p:ph idx="1" type="subTitle"/>
+            <p:ph type="subTitle" idx="1"/>
           </p:nvPr>
         </p:nvSpPr>
         <p:spPr>
@@ -1439,7 +1493,7 @@
           </a:prstGeom>
         </p:spPr>
         <p:txBody>
-          <a:bodyPr anchorCtr="0" anchor="t" bIns="91425" lIns="91425" spcFirstLastPara="1" rIns="91425" wrap="square" tIns="91425">
+          <a:bodyPr spcFirstLastPara="1" wrap="square" lIns="91425" tIns="91425" rIns="91425" bIns="91425" anchor="t" anchorCtr="0">
             <a:normAutofit/>
           </a:bodyPr>
           <a:lstStyle>
@@ -1624,15 +1678,19 @@
               </a:defRPr>
             </a:lvl9pPr>
           </a:lstStyle>
-          <a:p/>
+          <a:p>
+            <a:endParaRPr/>
+          </a:p>
         </p:txBody>
       </p:sp>
       <p:sp>
         <p:nvSpPr>
           <p:cNvPr id="14" name="Google Shape;14;p2"/>
-          <p:cNvSpPr txBox="1"/>
+          <p:cNvSpPr txBox="1">
+            <a:spLocks noGrp="1"/>
+          </p:cNvSpPr>
           <p:nvPr>
-            <p:ph idx="12" type="sldNum"/>
+            <p:ph type="sldNum" idx="12"/>
           </p:nvPr>
         </p:nvSpPr>
         <p:spPr>
@@ -1645,7 +1703,7 @@
           </a:prstGeom>
         </p:spPr>
         <p:txBody>
-          <a:bodyPr anchorCtr="0" anchor="ctr" bIns="91425" lIns="91425" spcFirstLastPara="1" rIns="91425" wrap="square" tIns="91425">
+          <a:bodyPr spcFirstLastPara="1" wrap="square" lIns="91425" tIns="91425" rIns="91425" bIns="91425" anchor="ctr" anchorCtr="0">
             <a:normAutofit/>
           </a:bodyPr>
           <a:lstStyle>
@@ -1687,7 +1745,7 @@
             </a:lvl9pPr>
           </a:lstStyle>
           <a:p>
-            <a:pPr indent="0" lvl="0" marL="0" rtl="0" algn="r">
+            <a:pPr marL="0" lvl="0" indent="0" algn="r" rtl="0">
               <a:spcBef>
                 <a:spcPts val="0"/>
               </a:spcBef>
@@ -1713,11 +1771,11 @@
 </file>
 
 <file path=ppt/slideLayouts/slideLayout10.xml><?xml version="1.0" encoding="utf-8"?>
-<p:sldLayout xmlns:a="http://schemas.openxmlformats.org/drawingml/2006/main" xmlns:r="http://schemas.openxmlformats.org/officeDocument/2006/relationships" xmlns:mc="http://schemas.openxmlformats.org/markup-compatibility/2006" xmlns:mv="urn:schemas-microsoft-com:mac:vml" xmlns:p="http://schemas.openxmlformats.org/presentationml/2006/main" xmlns:c="http://schemas.openxmlformats.org/drawingml/2006/chart" xmlns:dgm="http://schemas.openxmlformats.org/drawingml/2006/diagram" xmlns:o="urn:schemas-microsoft-com:office:office" xmlns:v="urn:schemas-microsoft-com:vml" xmlns:pvml="urn:schemas-microsoft-com:office:powerpoint" xmlns:com="http://schemas.openxmlformats.org/drawingml/2006/compatibility" xmlns:p14="http://schemas.microsoft.com/office/powerpoint/2010/main" xmlns:p15="http://schemas.microsoft.com/office/powerpoint/2012/main" xmlns:ahyp="http://schemas.microsoft.com/office/drawing/2018/hyperlinkcolor" matchingName="Big number">
+<p:sldLayout xmlns:a="http://schemas.openxmlformats.org/drawingml/2006/main" xmlns:r="http://schemas.openxmlformats.org/officeDocument/2006/relationships" xmlns:p="http://schemas.openxmlformats.org/presentationml/2006/main" matchingName="Big number">
   <p:cSld name="BIG_NUMBER">
     <p:spTree>
       <p:nvGrpSpPr>
-        <p:cNvPr id="51" name="Shape 51"/>
+        <p:cNvPr id="1" name="Shape 51"/>
         <p:cNvGrpSpPr/>
         <p:nvPr/>
       </p:nvGrpSpPr>
@@ -1751,12 +1809,12 @@
           </a:ln>
         </p:spPr>
         <p:txBody>
-          <a:bodyPr anchorCtr="0" anchor="ctr" bIns="91425" lIns="91425" spcFirstLastPara="1" rIns="91425" wrap="square" tIns="91425">
+          <a:bodyPr spcFirstLastPara="1" wrap="square" lIns="91425" tIns="91425" rIns="91425" bIns="91425" anchor="ctr" anchorCtr="0">
             <a:noAutofit/>
           </a:bodyPr>
           <a:lstStyle/>
           <a:p>
-            <a:pPr indent="0" lvl="0" marL="0" rtl="0" algn="l">
+            <a:pPr marL="0" lvl="0" indent="0" algn="l" rtl="0">
               <a:spcBef>
                 <a:spcPts val="0"/>
               </a:spcBef>
@@ -1765,9 +1823,6 @@
               </a:spcAft>
               <a:buNone/>
             </a:pPr>
-            <a:r>
-              <a:t/>
-            </a:r>
             <a:endParaRPr/>
           </a:p>
         </p:txBody>
@@ -1775,9 +1830,11 @@
       <p:sp>
         <p:nvSpPr>
           <p:cNvPr id="53" name="Google Shape;53;p11"/>
-          <p:cNvSpPr txBox="1"/>
+          <p:cNvSpPr txBox="1">
+            <a:spLocks noGrp="1"/>
+          </p:cNvSpPr>
           <p:nvPr>
-            <p:ph hasCustomPrompt="1" type="title"/>
+            <p:ph type="title" hasCustomPrompt="1"/>
           </p:nvPr>
         </p:nvSpPr>
         <p:spPr>
@@ -1790,7 +1847,7 @@
           </a:prstGeom>
         </p:spPr>
         <p:txBody>
-          <a:bodyPr anchorCtr="0" anchor="ctr" bIns="91425" lIns="91425" spcFirstLastPara="1" rIns="91425" wrap="square" tIns="91425">
+          <a:bodyPr spcFirstLastPara="1" wrap="square" lIns="91425" tIns="91425" rIns="91425" bIns="91425" anchor="ctr" anchorCtr="0">
             <a:normAutofit/>
           </a:bodyPr>
           <a:lstStyle>
@@ -1967,9 +2024,11 @@
       <p:sp>
         <p:nvSpPr>
           <p:cNvPr id="54" name="Google Shape;54;p11"/>
-          <p:cNvSpPr txBox="1"/>
+          <p:cNvSpPr txBox="1">
+            <a:spLocks noGrp="1"/>
+          </p:cNvSpPr>
           <p:nvPr>
-            <p:ph idx="1" type="body"/>
+            <p:ph type="body" idx="1"/>
           </p:nvPr>
         </p:nvSpPr>
         <p:spPr>
@@ -1982,11 +2041,11 @@
           </a:prstGeom>
         </p:spPr>
         <p:txBody>
-          <a:bodyPr anchorCtr="0" anchor="t" bIns="91425" lIns="91425" spcFirstLastPara="1" rIns="91425" wrap="square" tIns="91425">
+          <a:bodyPr spcFirstLastPara="1" wrap="square" lIns="91425" tIns="91425" rIns="91425" bIns="91425" anchor="t" anchorCtr="0">
             <a:normAutofit/>
           </a:bodyPr>
           <a:lstStyle>
-            <a:lvl1pPr indent="-342900" lvl="0" marL="457200" algn="ctr">
+            <a:lvl1pPr marL="457200" lvl="0" indent="-342900" algn="ctr">
               <a:spcBef>
                 <a:spcPts val="0"/>
               </a:spcBef>
@@ -1997,7 +2056,7 @@
               <a:buChar char="●"/>
               <a:defRPr/>
             </a:lvl1pPr>
-            <a:lvl2pPr indent="-317500" lvl="1" marL="914400" algn="ctr">
+            <a:lvl2pPr marL="914400" lvl="1" indent="-317500" algn="ctr">
               <a:spcBef>
                 <a:spcPts val="0"/>
               </a:spcBef>
@@ -2008,7 +2067,7 @@
               <a:buChar char="○"/>
               <a:defRPr/>
             </a:lvl2pPr>
-            <a:lvl3pPr indent="-317500" lvl="2" marL="1371600" algn="ctr">
+            <a:lvl3pPr marL="1371600" lvl="2" indent="-317500" algn="ctr">
               <a:spcBef>
                 <a:spcPts val="0"/>
               </a:spcBef>
@@ -2019,7 +2078,7 @@
               <a:buChar char="■"/>
               <a:defRPr/>
             </a:lvl3pPr>
-            <a:lvl4pPr indent="-317500" lvl="3" marL="1828800" algn="ctr">
+            <a:lvl4pPr marL="1828800" lvl="3" indent="-317500" algn="ctr">
               <a:spcBef>
                 <a:spcPts val="0"/>
               </a:spcBef>
@@ -2030,7 +2089,7 @@
               <a:buChar char="●"/>
               <a:defRPr/>
             </a:lvl4pPr>
-            <a:lvl5pPr indent="-317500" lvl="4" marL="2286000" algn="ctr">
+            <a:lvl5pPr marL="2286000" lvl="4" indent="-317500" algn="ctr">
               <a:spcBef>
                 <a:spcPts val="0"/>
               </a:spcBef>
@@ -2041,7 +2100,7 @@
               <a:buChar char="○"/>
               <a:defRPr/>
             </a:lvl5pPr>
-            <a:lvl6pPr indent="-317500" lvl="5" marL="2743200" algn="ctr">
+            <a:lvl6pPr marL="2743200" lvl="5" indent="-317500" algn="ctr">
               <a:spcBef>
                 <a:spcPts val="0"/>
               </a:spcBef>
@@ -2052,7 +2111,7 @@
               <a:buChar char="■"/>
               <a:defRPr/>
             </a:lvl6pPr>
-            <a:lvl7pPr indent="-317500" lvl="6" marL="3200400" algn="ctr">
+            <a:lvl7pPr marL="3200400" lvl="6" indent="-317500" algn="ctr">
               <a:spcBef>
                 <a:spcPts val="0"/>
               </a:spcBef>
@@ -2063,7 +2122,7 @@
               <a:buChar char="●"/>
               <a:defRPr/>
             </a:lvl7pPr>
-            <a:lvl8pPr indent="-317500" lvl="7" marL="3657600" algn="ctr">
+            <a:lvl8pPr marL="3657600" lvl="7" indent="-317500" algn="ctr">
               <a:spcBef>
                 <a:spcPts val="0"/>
               </a:spcBef>
@@ -2074,7 +2133,7 @@
               <a:buChar char="○"/>
               <a:defRPr/>
             </a:lvl8pPr>
-            <a:lvl9pPr indent="-317500" lvl="8" marL="4114800" algn="ctr">
+            <a:lvl9pPr marL="4114800" lvl="8" indent="-317500" algn="ctr">
               <a:spcBef>
                 <a:spcPts val="0"/>
               </a:spcBef>
@@ -2086,15 +2145,19 @@
               <a:defRPr/>
             </a:lvl9pPr>
           </a:lstStyle>
-          <a:p/>
+          <a:p>
+            <a:endParaRPr/>
+          </a:p>
         </p:txBody>
       </p:sp>
       <p:sp>
         <p:nvSpPr>
           <p:cNvPr id="55" name="Google Shape;55;p11"/>
-          <p:cNvSpPr txBox="1"/>
+          <p:cNvSpPr txBox="1">
+            <a:spLocks noGrp="1"/>
+          </p:cNvSpPr>
           <p:nvPr>
-            <p:ph idx="12" type="sldNum"/>
+            <p:ph type="sldNum" idx="12"/>
           </p:nvPr>
         </p:nvSpPr>
         <p:spPr>
@@ -2107,7 +2170,7 @@
           </a:prstGeom>
         </p:spPr>
         <p:txBody>
-          <a:bodyPr anchorCtr="0" anchor="ctr" bIns="91425" lIns="91425" spcFirstLastPara="1" rIns="91425" wrap="square" tIns="91425">
+          <a:bodyPr spcFirstLastPara="1" wrap="square" lIns="91425" tIns="91425" rIns="91425" bIns="91425" anchor="ctr" anchorCtr="0">
             <a:normAutofit/>
           </a:bodyPr>
           <a:lstStyle>
@@ -2149,7 +2212,7 @@
             </a:lvl9pPr>
           </a:lstStyle>
           <a:p>
-            <a:pPr indent="0" lvl="0" marL="0" rtl="0" algn="r">
+            <a:pPr marL="0" lvl="0" indent="0" algn="r" rtl="0">
               <a:spcBef>
                 <a:spcPts val="0"/>
               </a:spcBef>
@@ -2175,11 +2238,11 @@
 </file>
 
 <file path=ppt/slideLayouts/slideLayout11.xml><?xml version="1.0" encoding="utf-8"?>
-<p:sldLayout xmlns:a="http://schemas.openxmlformats.org/drawingml/2006/main" xmlns:r="http://schemas.openxmlformats.org/officeDocument/2006/relationships" xmlns:mc="http://schemas.openxmlformats.org/markup-compatibility/2006" xmlns:mv="urn:schemas-microsoft-com:mac:vml" xmlns:p="http://schemas.openxmlformats.org/presentationml/2006/main" xmlns:c="http://schemas.openxmlformats.org/drawingml/2006/chart" xmlns:dgm="http://schemas.openxmlformats.org/drawingml/2006/diagram" xmlns:o="urn:schemas-microsoft-com:office:office" xmlns:v="urn:schemas-microsoft-com:vml" xmlns:pvml="urn:schemas-microsoft-com:office:powerpoint" xmlns:com="http://schemas.openxmlformats.org/drawingml/2006/compatibility" xmlns:p14="http://schemas.microsoft.com/office/powerpoint/2010/main" xmlns:p15="http://schemas.microsoft.com/office/powerpoint/2012/main" xmlns:ahyp="http://schemas.microsoft.com/office/drawing/2018/hyperlinkcolor" matchingName="Blank" type="blank">
+<p:sldLayout xmlns:a="http://schemas.openxmlformats.org/drawingml/2006/main" xmlns:r="http://schemas.openxmlformats.org/officeDocument/2006/relationships" xmlns:p="http://schemas.openxmlformats.org/presentationml/2006/main" matchingName="Blank" type="blank">
   <p:cSld name="BLANK">
     <p:spTree>
       <p:nvGrpSpPr>
-        <p:cNvPr id="56" name="Shape 56"/>
+        <p:cNvPr id="1" name="Shape 56"/>
         <p:cNvGrpSpPr/>
         <p:nvPr/>
       </p:nvGrpSpPr>
@@ -2194,9 +2257,11 @@
       <p:sp>
         <p:nvSpPr>
           <p:cNvPr id="57" name="Google Shape;57;p12"/>
-          <p:cNvSpPr txBox="1"/>
+          <p:cNvSpPr txBox="1">
+            <a:spLocks noGrp="1"/>
+          </p:cNvSpPr>
           <p:nvPr>
-            <p:ph idx="12" type="sldNum"/>
+            <p:ph type="sldNum" idx="12"/>
           </p:nvPr>
         </p:nvSpPr>
         <p:spPr>
@@ -2209,7 +2274,7 @@
           </a:prstGeom>
         </p:spPr>
         <p:txBody>
-          <a:bodyPr anchorCtr="0" anchor="ctr" bIns="91425" lIns="91425" spcFirstLastPara="1" rIns="91425" wrap="square" tIns="91425">
+          <a:bodyPr spcFirstLastPara="1" wrap="square" lIns="91425" tIns="91425" rIns="91425" bIns="91425" anchor="ctr" anchorCtr="0">
             <a:normAutofit/>
           </a:bodyPr>
           <a:lstStyle>
@@ -2251,7 +2316,7 @@
             </a:lvl9pPr>
           </a:lstStyle>
           <a:p>
-            <a:pPr indent="0" lvl="0" marL="0" rtl="0" algn="r">
+            <a:pPr marL="0" lvl="0" indent="0" algn="r" rtl="0">
               <a:spcBef>
                 <a:spcPts val="0"/>
               </a:spcBef>
@@ -2277,11 +2342,11 @@
 </file>
 
 <file path=ppt/slideLayouts/slideLayout2.xml><?xml version="1.0" encoding="utf-8"?>
-<p:sldLayout xmlns:a="http://schemas.openxmlformats.org/drawingml/2006/main" xmlns:r="http://schemas.openxmlformats.org/officeDocument/2006/relationships" xmlns:mc="http://schemas.openxmlformats.org/markup-compatibility/2006" xmlns:mv="urn:schemas-microsoft-com:mac:vml" xmlns:p="http://schemas.openxmlformats.org/presentationml/2006/main" xmlns:c="http://schemas.openxmlformats.org/drawingml/2006/chart" xmlns:dgm="http://schemas.openxmlformats.org/drawingml/2006/diagram" xmlns:o="urn:schemas-microsoft-com:office:office" xmlns:v="urn:schemas-microsoft-com:vml" xmlns:pvml="urn:schemas-microsoft-com:office:powerpoint" xmlns:com="http://schemas.openxmlformats.org/drawingml/2006/compatibility" xmlns:p14="http://schemas.microsoft.com/office/powerpoint/2010/main" xmlns:p15="http://schemas.microsoft.com/office/powerpoint/2012/main" xmlns:ahyp="http://schemas.microsoft.com/office/drawing/2018/hyperlinkcolor" matchingName="Section header" type="secHead">
+<p:sldLayout xmlns:a="http://schemas.openxmlformats.org/drawingml/2006/main" xmlns:r="http://schemas.openxmlformats.org/officeDocument/2006/relationships" xmlns:p="http://schemas.openxmlformats.org/presentationml/2006/main" matchingName="Section header" type="secHead">
   <p:cSld name="SECTION_HEADER">
     <p:spTree>
       <p:nvGrpSpPr>
-        <p:cNvPr id="15" name="Shape 15"/>
+        <p:cNvPr id="1" name="Shape 15"/>
         <p:cNvGrpSpPr/>
         <p:nvPr/>
       </p:nvGrpSpPr>
@@ -2305,9 +2370,13 @@
             <a:ext cx="1081625" cy="1124950"/>
           </a:xfrm>
           <a:custGeom>
-            <a:rect b="b" l="l" r="r" t="t"/>
+            <a:avLst/>
+            <a:gdLst/>
+            <a:ahLst/>
+            <a:cxnLst/>
+            <a:rect l="l" t="t" r="r" b="b"/>
             <a:pathLst>
-              <a:path extrusionOk="0" h="44998" w="43265">
+              <a:path w="43265" h="44998" extrusionOk="0">
                 <a:moveTo>
                   <a:pt x="0" y="44998"/>
                 </a:moveTo>
@@ -2321,14 +2390,14 @@
             </a:pathLst>
           </a:custGeom>
           <a:noFill/>
-          <a:ln cap="flat" cmpd="sng" w="28575">
+          <a:ln w="28575" cap="flat" cmpd="sng">
             <a:solidFill>
               <a:schemeClr val="lt2"/>
             </a:solidFill>
             <a:prstDash val="solid"/>
             <a:miter lim="8000"/>
-            <a:headEnd len="sm" w="sm" type="none"/>
-            <a:tailEnd len="sm" w="sm" type="none"/>
+            <a:headEnd type="none" w="sm" len="sm"/>
+            <a:tailEnd type="none" w="sm" len="sm"/>
           </a:ln>
         </p:spPr>
       </p:sp>
@@ -2339,14 +2408,18 @@
           <p:nvPr/>
         </p:nvSpPr>
         <p:spPr>
-          <a:xfrm flipH="1" rot="10800000">
+          <a:xfrm rot="10800000" flipH="1">
             <a:off x="466425" y="3558325"/>
             <a:ext cx="1081625" cy="1124950"/>
           </a:xfrm>
           <a:custGeom>
-            <a:rect b="b" l="l" r="r" t="t"/>
+            <a:avLst/>
+            <a:gdLst/>
+            <a:ahLst/>
+            <a:cxnLst/>
+            <a:rect l="l" t="t" r="r" b="b"/>
             <a:pathLst>
-              <a:path extrusionOk="0" h="44998" w="43265">
+              <a:path w="43265" h="44998" extrusionOk="0">
                 <a:moveTo>
                   <a:pt x="0" y="44998"/>
                 </a:moveTo>
@@ -2360,21 +2433,23 @@
             </a:pathLst>
           </a:custGeom>
           <a:noFill/>
-          <a:ln cap="flat" cmpd="sng" w="28575">
+          <a:ln w="28575" cap="flat" cmpd="sng">
             <a:solidFill>
               <a:schemeClr val="lt2"/>
             </a:solidFill>
             <a:prstDash val="solid"/>
             <a:miter lim="8000"/>
-            <a:headEnd len="sm" w="sm" type="none"/>
-            <a:tailEnd len="sm" w="sm" type="none"/>
+            <a:headEnd type="none" w="sm" len="sm"/>
+            <a:tailEnd type="none" w="sm" len="sm"/>
           </a:ln>
         </p:spPr>
       </p:sp>
       <p:sp>
         <p:nvSpPr>
           <p:cNvPr id="18" name="Google Shape;18;p3"/>
-          <p:cNvSpPr txBox="1"/>
+          <p:cNvSpPr txBox="1">
+            <a:spLocks noGrp="1"/>
+          </p:cNvSpPr>
           <p:nvPr>
             <p:ph type="title"/>
           </p:nvPr>
@@ -2389,7 +2464,7 @@
           </a:prstGeom>
         </p:spPr>
         <p:txBody>
-          <a:bodyPr anchorCtr="0" anchor="ctr" bIns="91425" lIns="91425" spcFirstLastPara="1" rIns="91425" wrap="square" tIns="91425">
+          <a:bodyPr spcFirstLastPara="1" wrap="square" lIns="91425" tIns="91425" rIns="91425" bIns="91425" anchor="ctr" anchorCtr="0">
             <a:normAutofit/>
           </a:bodyPr>
           <a:lstStyle>
@@ -2493,15 +2568,19 @@
               <a:defRPr/>
             </a:lvl9pPr>
           </a:lstStyle>
-          <a:p/>
+          <a:p>
+            <a:endParaRPr/>
+          </a:p>
         </p:txBody>
       </p:sp>
       <p:sp>
         <p:nvSpPr>
           <p:cNvPr id="19" name="Google Shape;19;p3"/>
-          <p:cNvSpPr txBox="1"/>
+          <p:cNvSpPr txBox="1">
+            <a:spLocks noGrp="1"/>
+          </p:cNvSpPr>
           <p:nvPr>
-            <p:ph idx="12" type="sldNum"/>
+            <p:ph type="sldNum" idx="12"/>
           </p:nvPr>
         </p:nvSpPr>
         <p:spPr>
@@ -2514,7 +2593,7 @@
           </a:prstGeom>
         </p:spPr>
         <p:txBody>
-          <a:bodyPr anchorCtr="0" anchor="ctr" bIns="91425" lIns="91425" spcFirstLastPara="1" rIns="91425" wrap="square" tIns="91425">
+          <a:bodyPr spcFirstLastPara="1" wrap="square" lIns="91425" tIns="91425" rIns="91425" bIns="91425" anchor="ctr" anchorCtr="0">
             <a:normAutofit/>
           </a:bodyPr>
           <a:lstStyle>
@@ -2556,7 +2635,7 @@
             </a:lvl9pPr>
           </a:lstStyle>
           <a:p>
-            <a:pPr indent="0" lvl="0" marL="0" rtl="0" algn="r">
+            <a:pPr marL="0" lvl="0" indent="0" algn="r" rtl="0">
               <a:spcBef>
                 <a:spcPts val="0"/>
               </a:spcBef>
@@ -2582,11 +2661,11 @@
 </file>
 
 <file path=ppt/slideLayouts/slideLayout3.xml><?xml version="1.0" encoding="utf-8"?>
-<p:sldLayout xmlns:a="http://schemas.openxmlformats.org/drawingml/2006/main" xmlns:r="http://schemas.openxmlformats.org/officeDocument/2006/relationships" xmlns:mc="http://schemas.openxmlformats.org/markup-compatibility/2006" xmlns:mv="urn:schemas-microsoft-com:mac:vml" xmlns:p="http://schemas.openxmlformats.org/presentationml/2006/main" xmlns:c="http://schemas.openxmlformats.org/drawingml/2006/chart" xmlns:dgm="http://schemas.openxmlformats.org/drawingml/2006/diagram" xmlns:o="urn:schemas-microsoft-com:office:office" xmlns:v="urn:schemas-microsoft-com:vml" xmlns:pvml="urn:schemas-microsoft-com:office:powerpoint" xmlns:com="http://schemas.openxmlformats.org/drawingml/2006/compatibility" xmlns:p14="http://schemas.microsoft.com/office/powerpoint/2010/main" xmlns:p15="http://schemas.microsoft.com/office/powerpoint/2012/main" xmlns:ahyp="http://schemas.microsoft.com/office/drawing/2018/hyperlinkcolor" matchingName="Title and body" type="tx">
+<p:sldLayout xmlns:a="http://schemas.openxmlformats.org/drawingml/2006/main" xmlns:r="http://schemas.openxmlformats.org/officeDocument/2006/relationships" xmlns:p="http://schemas.openxmlformats.org/presentationml/2006/main" matchingName="Title and body" type="tx">
   <p:cSld name="TITLE_AND_BODY">
     <p:spTree>
       <p:nvGrpSpPr>
-        <p:cNvPr id="20" name="Shape 20"/>
+        <p:cNvPr id="1" name="Shape 20"/>
         <p:cNvGrpSpPr/>
         <p:nvPr/>
       </p:nvGrpSpPr>
@@ -2620,12 +2699,12 @@
           </a:ln>
         </p:spPr>
         <p:txBody>
-          <a:bodyPr anchorCtr="0" anchor="ctr" bIns="91425" lIns="91425" spcFirstLastPara="1" rIns="91425" wrap="square" tIns="91425">
+          <a:bodyPr spcFirstLastPara="1" wrap="square" lIns="91425" tIns="91425" rIns="91425" bIns="91425" anchor="ctr" anchorCtr="0">
             <a:noAutofit/>
           </a:bodyPr>
           <a:lstStyle/>
           <a:p>
-            <a:pPr indent="0" lvl="0" marL="0" rtl="0" algn="l">
+            <a:pPr marL="0" lvl="0" indent="0" algn="l" rtl="0">
               <a:spcBef>
                 <a:spcPts val="0"/>
               </a:spcBef>
@@ -2634,9 +2713,6 @@
               </a:spcAft>
               <a:buNone/>
             </a:pPr>
-            <a:r>
-              <a:t/>
-            </a:r>
             <a:endParaRPr/>
           </a:p>
         </p:txBody>
@@ -2644,7 +2720,9 @@
       <p:sp>
         <p:nvSpPr>
           <p:cNvPr id="22" name="Google Shape;22;p4"/>
-          <p:cNvSpPr txBox="1"/>
+          <p:cNvSpPr txBox="1">
+            <a:spLocks noGrp="1"/>
+          </p:cNvSpPr>
           <p:nvPr>
             <p:ph type="title"/>
           </p:nvPr>
@@ -2659,7 +2737,7 @@
           </a:prstGeom>
         </p:spPr>
         <p:txBody>
-          <a:bodyPr anchorCtr="0" anchor="b" bIns="91425" lIns="91425" spcFirstLastPara="1" rIns="91425" wrap="square" tIns="91425">
+          <a:bodyPr spcFirstLastPara="1" wrap="square" lIns="91425" tIns="91425" rIns="91425" bIns="91425" anchor="b" anchorCtr="0">
             <a:normAutofit/>
           </a:bodyPr>
           <a:lstStyle>
@@ -2763,15 +2841,19 @@
               <a:defRPr/>
             </a:lvl9pPr>
           </a:lstStyle>
-          <a:p/>
+          <a:p>
+            <a:endParaRPr/>
+          </a:p>
         </p:txBody>
       </p:sp>
       <p:sp>
         <p:nvSpPr>
           <p:cNvPr id="23" name="Google Shape;23;p4"/>
-          <p:cNvSpPr txBox="1"/>
+          <p:cNvSpPr txBox="1">
+            <a:spLocks noGrp="1"/>
+          </p:cNvSpPr>
           <p:nvPr>
-            <p:ph idx="1" type="body"/>
+            <p:ph type="body" idx="1"/>
           </p:nvPr>
         </p:nvSpPr>
         <p:spPr>
@@ -2784,11 +2866,11 @@
           </a:prstGeom>
         </p:spPr>
         <p:txBody>
-          <a:bodyPr anchorCtr="0" anchor="t" bIns="91425" lIns="91425" spcFirstLastPara="1" rIns="91425" wrap="square" tIns="91425">
+          <a:bodyPr spcFirstLastPara="1" wrap="square" lIns="91425" tIns="91425" rIns="91425" bIns="91425" anchor="t" anchorCtr="0">
             <a:normAutofit/>
           </a:bodyPr>
           <a:lstStyle>
-            <a:lvl1pPr indent="-342900" lvl="0" marL="457200">
+            <a:lvl1pPr marL="457200" lvl="0" indent="-342900">
               <a:spcBef>
                 <a:spcPts val="0"/>
               </a:spcBef>
@@ -2799,7 +2881,7 @@
               <a:buChar char="●"/>
               <a:defRPr/>
             </a:lvl1pPr>
-            <a:lvl2pPr indent="-317500" lvl="1" marL="914400">
+            <a:lvl2pPr marL="914400" lvl="1" indent="-317500">
               <a:spcBef>
                 <a:spcPts val="0"/>
               </a:spcBef>
@@ -2810,7 +2892,7 @@
               <a:buChar char="○"/>
               <a:defRPr/>
             </a:lvl2pPr>
-            <a:lvl3pPr indent="-317500" lvl="2" marL="1371600">
+            <a:lvl3pPr marL="1371600" lvl="2" indent="-317500">
               <a:spcBef>
                 <a:spcPts val="0"/>
               </a:spcBef>
@@ -2821,7 +2903,7 @@
               <a:buChar char="■"/>
               <a:defRPr/>
             </a:lvl3pPr>
-            <a:lvl4pPr indent="-317500" lvl="3" marL="1828800">
+            <a:lvl4pPr marL="1828800" lvl="3" indent="-317500">
               <a:spcBef>
                 <a:spcPts val="0"/>
               </a:spcBef>
@@ -2832,7 +2914,7 @@
               <a:buChar char="●"/>
               <a:defRPr/>
             </a:lvl4pPr>
-            <a:lvl5pPr indent="-317500" lvl="4" marL="2286000">
+            <a:lvl5pPr marL="2286000" lvl="4" indent="-317500">
               <a:spcBef>
                 <a:spcPts val="0"/>
               </a:spcBef>
@@ -2843,7 +2925,7 @@
               <a:buChar char="○"/>
               <a:defRPr/>
             </a:lvl5pPr>
-            <a:lvl6pPr indent="-317500" lvl="5" marL="2743200">
+            <a:lvl6pPr marL="2743200" lvl="5" indent="-317500">
               <a:spcBef>
                 <a:spcPts val="0"/>
               </a:spcBef>
@@ -2854,7 +2936,7 @@
               <a:buChar char="■"/>
               <a:defRPr/>
             </a:lvl6pPr>
-            <a:lvl7pPr indent="-317500" lvl="6" marL="3200400">
+            <a:lvl7pPr marL="3200400" lvl="6" indent="-317500">
               <a:spcBef>
                 <a:spcPts val="0"/>
               </a:spcBef>
@@ -2865,7 +2947,7 @@
               <a:buChar char="●"/>
               <a:defRPr/>
             </a:lvl7pPr>
-            <a:lvl8pPr indent="-317500" lvl="7" marL="3657600">
+            <a:lvl8pPr marL="3657600" lvl="7" indent="-317500">
               <a:spcBef>
                 <a:spcPts val="0"/>
               </a:spcBef>
@@ -2876,7 +2958,7 @@
               <a:buChar char="○"/>
               <a:defRPr/>
             </a:lvl8pPr>
-            <a:lvl9pPr indent="-317500" lvl="8" marL="4114800">
+            <a:lvl9pPr marL="4114800" lvl="8" indent="-317500">
               <a:spcBef>
                 <a:spcPts val="0"/>
               </a:spcBef>
@@ -2888,15 +2970,19 @@
               <a:defRPr/>
             </a:lvl9pPr>
           </a:lstStyle>
-          <a:p/>
+          <a:p>
+            <a:endParaRPr/>
+          </a:p>
         </p:txBody>
       </p:sp>
       <p:sp>
         <p:nvSpPr>
           <p:cNvPr id="24" name="Google Shape;24;p4"/>
-          <p:cNvSpPr txBox="1"/>
+          <p:cNvSpPr txBox="1">
+            <a:spLocks noGrp="1"/>
+          </p:cNvSpPr>
           <p:nvPr>
-            <p:ph idx="12" type="sldNum"/>
+            <p:ph type="sldNum" idx="12"/>
           </p:nvPr>
         </p:nvSpPr>
         <p:spPr>
@@ -2909,7 +2995,7 @@
           </a:prstGeom>
         </p:spPr>
         <p:txBody>
-          <a:bodyPr anchorCtr="0" anchor="ctr" bIns="91425" lIns="91425" spcFirstLastPara="1" rIns="91425" wrap="square" tIns="91425">
+          <a:bodyPr spcFirstLastPara="1" wrap="square" lIns="91425" tIns="91425" rIns="91425" bIns="91425" anchor="ctr" anchorCtr="0">
             <a:normAutofit/>
           </a:bodyPr>
           <a:lstStyle>
@@ -2951,7 +3037,7 @@
             </a:lvl9pPr>
           </a:lstStyle>
           <a:p>
-            <a:pPr indent="0" lvl="0" marL="0" rtl="0" algn="r">
+            <a:pPr marL="0" lvl="0" indent="0" algn="r" rtl="0">
               <a:spcBef>
                 <a:spcPts val="0"/>
               </a:spcBef>
@@ -2977,11 +3063,11 @@
 </file>
 
 <file path=ppt/slideLayouts/slideLayout4.xml><?xml version="1.0" encoding="utf-8"?>
-<p:sldLayout xmlns:a="http://schemas.openxmlformats.org/drawingml/2006/main" xmlns:r="http://schemas.openxmlformats.org/officeDocument/2006/relationships" xmlns:mc="http://schemas.openxmlformats.org/markup-compatibility/2006" xmlns:mv="urn:schemas-microsoft-com:mac:vml" xmlns:p="http://schemas.openxmlformats.org/presentationml/2006/main" xmlns:c="http://schemas.openxmlformats.org/drawingml/2006/chart" xmlns:dgm="http://schemas.openxmlformats.org/drawingml/2006/diagram" xmlns:o="urn:schemas-microsoft-com:office:office" xmlns:v="urn:schemas-microsoft-com:vml" xmlns:pvml="urn:schemas-microsoft-com:office:powerpoint" xmlns:com="http://schemas.openxmlformats.org/drawingml/2006/compatibility" xmlns:p14="http://schemas.microsoft.com/office/powerpoint/2010/main" xmlns:p15="http://schemas.microsoft.com/office/powerpoint/2012/main" xmlns:ahyp="http://schemas.microsoft.com/office/drawing/2018/hyperlinkcolor" matchingName="Title and two columns" type="twoColTx">
+<p:sldLayout xmlns:a="http://schemas.openxmlformats.org/drawingml/2006/main" xmlns:r="http://schemas.openxmlformats.org/officeDocument/2006/relationships" xmlns:p="http://schemas.openxmlformats.org/presentationml/2006/main" matchingName="Title and two columns" type="twoColTx">
   <p:cSld name="TITLE_AND_TWO_COLUMNS">
     <p:spTree>
       <p:nvGrpSpPr>
-        <p:cNvPr id="25" name="Shape 25"/>
+        <p:cNvPr id="1" name="Shape 25"/>
         <p:cNvGrpSpPr/>
         <p:nvPr/>
       </p:nvGrpSpPr>
@@ -2996,7 +3082,9 @@
       <p:sp>
         <p:nvSpPr>
           <p:cNvPr id="26" name="Google Shape;26;p5"/>
-          <p:cNvSpPr txBox="1"/>
+          <p:cNvSpPr txBox="1">
+            <a:spLocks noGrp="1"/>
+          </p:cNvSpPr>
           <p:nvPr>
             <p:ph type="title"/>
           </p:nvPr>
@@ -3011,7 +3099,7 @@
           </a:prstGeom>
         </p:spPr>
         <p:txBody>
-          <a:bodyPr anchorCtr="0" anchor="b" bIns="91425" lIns="91425" spcFirstLastPara="1" rIns="91425" wrap="square" tIns="91425">
+          <a:bodyPr spcFirstLastPara="1" wrap="square" lIns="91425" tIns="91425" rIns="91425" bIns="91425" anchor="b" anchorCtr="0">
             <a:normAutofit/>
           </a:bodyPr>
           <a:lstStyle>
@@ -3115,15 +3203,19 @@
               <a:defRPr/>
             </a:lvl9pPr>
           </a:lstStyle>
-          <a:p/>
+          <a:p>
+            <a:endParaRPr/>
+          </a:p>
         </p:txBody>
       </p:sp>
       <p:sp>
         <p:nvSpPr>
           <p:cNvPr id="27" name="Google Shape;27;p5"/>
-          <p:cNvSpPr txBox="1"/>
+          <p:cNvSpPr txBox="1">
+            <a:spLocks noGrp="1"/>
+          </p:cNvSpPr>
           <p:nvPr>
-            <p:ph idx="1" type="body"/>
+            <p:ph type="body" idx="1"/>
           </p:nvPr>
         </p:nvSpPr>
         <p:spPr>
@@ -3136,11 +3228,11 @@
           </a:prstGeom>
         </p:spPr>
         <p:txBody>
-          <a:bodyPr anchorCtr="0" anchor="t" bIns="91425" lIns="91425" spcFirstLastPara="1" rIns="91425" wrap="square" tIns="91425">
+          <a:bodyPr spcFirstLastPara="1" wrap="square" lIns="91425" tIns="91425" rIns="91425" bIns="91425" anchor="t" anchorCtr="0">
             <a:normAutofit/>
           </a:bodyPr>
           <a:lstStyle>
-            <a:lvl1pPr indent="-317500" lvl="0" marL="457200">
+            <a:lvl1pPr marL="457200" lvl="0" indent="-317500">
               <a:spcBef>
                 <a:spcPts val="0"/>
               </a:spcBef>
@@ -3151,7 +3243,7 @@
               <a:buChar char="●"/>
               <a:defRPr sz="1400"/>
             </a:lvl1pPr>
-            <a:lvl2pPr indent="-304800" lvl="1" marL="914400">
+            <a:lvl2pPr marL="914400" lvl="1" indent="-304800">
               <a:spcBef>
                 <a:spcPts val="0"/>
               </a:spcBef>
@@ -3162,7 +3254,7 @@
               <a:buChar char="○"/>
               <a:defRPr sz="1200"/>
             </a:lvl2pPr>
-            <a:lvl3pPr indent="-304800" lvl="2" marL="1371600">
+            <a:lvl3pPr marL="1371600" lvl="2" indent="-304800">
               <a:spcBef>
                 <a:spcPts val="0"/>
               </a:spcBef>
@@ -3173,7 +3265,7 @@
               <a:buChar char="■"/>
               <a:defRPr sz="1200"/>
             </a:lvl3pPr>
-            <a:lvl4pPr indent="-304800" lvl="3" marL="1828800">
+            <a:lvl4pPr marL="1828800" lvl="3" indent="-304800">
               <a:spcBef>
                 <a:spcPts val="0"/>
               </a:spcBef>
@@ -3184,7 +3276,7 @@
               <a:buChar char="●"/>
               <a:defRPr sz="1200"/>
             </a:lvl4pPr>
-            <a:lvl5pPr indent="-304800" lvl="4" marL="2286000">
+            <a:lvl5pPr marL="2286000" lvl="4" indent="-304800">
               <a:spcBef>
                 <a:spcPts val="0"/>
               </a:spcBef>
@@ -3195,7 +3287,7 @@
               <a:buChar char="○"/>
               <a:defRPr sz="1200"/>
             </a:lvl5pPr>
-            <a:lvl6pPr indent="-304800" lvl="5" marL="2743200">
+            <a:lvl6pPr marL="2743200" lvl="5" indent="-304800">
               <a:spcBef>
                 <a:spcPts val="0"/>
               </a:spcBef>
@@ -3206,7 +3298,7 @@
               <a:buChar char="■"/>
               <a:defRPr sz="1200"/>
             </a:lvl6pPr>
-            <a:lvl7pPr indent="-304800" lvl="6" marL="3200400">
+            <a:lvl7pPr marL="3200400" lvl="6" indent="-304800">
               <a:spcBef>
                 <a:spcPts val="0"/>
               </a:spcBef>
@@ -3217,7 +3309,7 @@
               <a:buChar char="●"/>
               <a:defRPr sz="1200"/>
             </a:lvl7pPr>
-            <a:lvl8pPr indent="-304800" lvl="7" marL="3657600">
+            <a:lvl8pPr marL="3657600" lvl="7" indent="-304800">
               <a:spcBef>
                 <a:spcPts val="0"/>
               </a:spcBef>
@@ -3228,7 +3320,7 @@
               <a:buChar char="○"/>
               <a:defRPr sz="1200"/>
             </a:lvl8pPr>
-            <a:lvl9pPr indent="-304800" lvl="8" marL="4114800">
+            <a:lvl9pPr marL="4114800" lvl="8" indent="-304800">
               <a:spcBef>
                 <a:spcPts val="0"/>
               </a:spcBef>
@@ -3240,15 +3332,19 @@
               <a:defRPr sz="1200"/>
             </a:lvl9pPr>
           </a:lstStyle>
-          <a:p/>
+          <a:p>
+            <a:endParaRPr/>
+          </a:p>
         </p:txBody>
       </p:sp>
       <p:sp>
         <p:nvSpPr>
           <p:cNvPr id="28" name="Google Shape;28;p5"/>
-          <p:cNvSpPr txBox="1"/>
+          <p:cNvSpPr txBox="1">
+            <a:spLocks noGrp="1"/>
+          </p:cNvSpPr>
           <p:nvPr>
-            <p:ph idx="2" type="body"/>
+            <p:ph type="body" idx="2"/>
           </p:nvPr>
         </p:nvSpPr>
         <p:spPr>
@@ -3261,11 +3357,11 @@
           </a:prstGeom>
         </p:spPr>
         <p:txBody>
-          <a:bodyPr anchorCtr="0" anchor="t" bIns="91425" lIns="91425" spcFirstLastPara="1" rIns="91425" wrap="square" tIns="91425">
+          <a:bodyPr spcFirstLastPara="1" wrap="square" lIns="91425" tIns="91425" rIns="91425" bIns="91425" anchor="t" anchorCtr="0">
             <a:normAutofit/>
           </a:bodyPr>
           <a:lstStyle>
-            <a:lvl1pPr indent="-317500" lvl="0" marL="457200">
+            <a:lvl1pPr marL="457200" lvl="0" indent="-317500">
               <a:spcBef>
                 <a:spcPts val="0"/>
               </a:spcBef>
@@ -3276,7 +3372,7 @@
               <a:buChar char="●"/>
               <a:defRPr sz="1400"/>
             </a:lvl1pPr>
-            <a:lvl2pPr indent="-304800" lvl="1" marL="914400">
+            <a:lvl2pPr marL="914400" lvl="1" indent="-304800">
               <a:spcBef>
                 <a:spcPts val="0"/>
               </a:spcBef>
@@ -3287,7 +3383,7 @@
               <a:buChar char="○"/>
               <a:defRPr sz="1200"/>
             </a:lvl2pPr>
-            <a:lvl3pPr indent="-304800" lvl="2" marL="1371600">
+            <a:lvl3pPr marL="1371600" lvl="2" indent="-304800">
               <a:spcBef>
                 <a:spcPts val="0"/>
               </a:spcBef>
@@ -3298,7 +3394,7 @@
               <a:buChar char="■"/>
               <a:defRPr sz="1200"/>
             </a:lvl3pPr>
-            <a:lvl4pPr indent="-304800" lvl="3" marL="1828800">
+            <a:lvl4pPr marL="1828800" lvl="3" indent="-304800">
               <a:spcBef>
                 <a:spcPts val="0"/>
               </a:spcBef>
@@ -3309,7 +3405,7 @@
               <a:buChar char="●"/>
               <a:defRPr sz="1200"/>
             </a:lvl4pPr>
-            <a:lvl5pPr indent="-304800" lvl="4" marL="2286000">
+            <a:lvl5pPr marL="2286000" lvl="4" indent="-304800">
               <a:spcBef>
                 <a:spcPts val="0"/>
               </a:spcBef>
@@ -3320,7 +3416,7 @@
               <a:buChar char="○"/>
               <a:defRPr sz="1200"/>
             </a:lvl5pPr>
-            <a:lvl6pPr indent="-304800" lvl="5" marL="2743200">
+            <a:lvl6pPr marL="2743200" lvl="5" indent="-304800">
               <a:spcBef>
                 <a:spcPts val="0"/>
               </a:spcBef>
@@ -3331,7 +3427,7 @@
               <a:buChar char="■"/>
               <a:defRPr sz="1200"/>
             </a:lvl6pPr>
-            <a:lvl7pPr indent="-304800" lvl="6" marL="3200400">
+            <a:lvl7pPr marL="3200400" lvl="6" indent="-304800">
               <a:spcBef>
                 <a:spcPts val="0"/>
               </a:spcBef>
@@ -3342,7 +3438,7 @@
               <a:buChar char="●"/>
               <a:defRPr sz="1200"/>
             </a:lvl7pPr>
-            <a:lvl8pPr indent="-304800" lvl="7" marL="3657600">
+            <a:lvl8pPr marL="3657600" lvl="7" indent="-304800">
               <a:spcBef>
                 <a:spcPts val="0"/>
               </a:spcBef>
@@ -3353,7 +3449,7 @@
               <a:buChar char="○"/>
               <a:defRPr sz="1200"/>
             </a:lvl8pPr>
-            <a:lvl9pPr indent="-304800" lvl="8" marL="4114800">
+            <a:lvl9pPr marL="4114800" lvl="8" indent="-304800">
               <a:spcBef>
                 <a:spcPts val="0"/>
               </a:spcBef>
@@ -3365,15 +3461,19 @@
               <a:defRPr sz="1200"/>
             </a:lvl9pPr>
           </a:lstStyle>
-          <a:p/>
+          <a:p>
+            <a:endParaRPr/>
+          </a:p>
         </p:txBody>
       </p:sp>
       <p:sp>
         <p:nvSpPr>
           <p:cNvPr id="29" name="Google Shape;29;p5"/>
-          <p:cNvSpPr txBox="1"/>
+          <p:cNvSpPr txBox="1">
+            <a:spLocks noGrp="1"/>
+          </p:cNvSpPr>
           <p:nvPr>
-            <p:ph idx="12" type="sldNum"/>
+            <p:ph type="sldNum" idx="12"/>
           </p:nvPr>
         </p:nvSpPr>
         <p:spPr>
@@ -3386,7 +3486,7 @@
           </a:prstGeom>
         </p:spPr>
         <p:txBody>
-          <a:bodyPr anchorCtr="0" anchor="ctr" bIns="91425" lIns="91425" spcFirstLastPara="1" rIns="91425" wrap="square" tIns="91425">
+          <a:bodyPr spcFirstLastPara="1" wrap="square" lIns="91425" tIns="91425" rIns="91425" bIns="91425" anchor="ctr" anchorCtr="0">
             <a:normAutofit/>
           </a:bodyPr>
           <a:lstStyle>
@@ -3428,7 +3528,7 @@
             </a:lvl9pPr>
           </a:lstStyle>
           <a:p>
-            <a:pPr indent="0" lvl="0" marL="0" rtl="0" algn="r">
+            <a:pPr marL="0" lvl="0" indent="0" algn="r" rtl="0">
               <a:spcBef>
                 <a:spcPts val="0"/>
               </a:spcBef>
@@ -3454,11 +3554,11 @@
 </file>
 
 <file path=ppt/slideLayouts/slideLayout5.xml><?xml version="1.0" encoding="utf-8"?>
-<p:sldLayout xmlns:a="http://schemas.openxmlformats.org/drawingml/2006/main" xmlns:r="http://schemas.openxmlformats.org/officeDocument/2006/relationships" xmlns:mc="http://schemas.openxmlformats.org/markup-compatibility/2006" xmlns:mv="urn:schemas-microsoft-com:mac:vml" xmlns:p="http://schemas.openxmlformats.org/presentationml/2006/main" xmlns:c="http://schemas.openxmlformats.org/drawingml/2006/chart" xmlns:dgm="http://schemas.openxmlformats.org/drawingml/2006/diagram" xmlns:o="urn:schemas-microsoft-com:office:office" xmlns:v="urn:schemas-microsoft-com:vml" xmlns:pvml="urn:schemas-microsoft-com:office:powerpoint" xmlns:com="http://schemas.openxmlformats.org/drawingml/2006/compatibility" xmlns:p14="http://schemas.microsoft.com/office/powerpoint/2010/main" xmlns:p15="http://schemas.microsoft.com/office/powerpoint/2012/main" xmlns:ahyp="http://schemas.microsoft.com/office/drawing/2018/hyperlinkcolor" matchingName="Title only" type="titleOnly">
+<p:sldLayout xmlns:a="http://schemas.openxmlformats.org/drawingml/2006/main" xmlns:r="http://schemas.openxmlformats.org/officeDocument/2006/relationships" xmlns:p="http://schemas.openxmlformats.org/presentationml/2006/main" matchingName="Title only" type="titleOnly">
   <p:cSld name="TITLE_ONLY">
     <p:spTree>
       <p:nvGrpSpPr>
-        <p:cNvPr id="30" name="Shape 30"/>
+        <p:cNvPr id="1" name="Shape 30"/>
         <p:cNvGrpSpPr/>
         <p:nvPr/>
       </p:nvGrpSpPr>
@@ -3473,7 +3573,9 @@
       <p:sp>
         <p:nvSpPr>
           <p:cNvPr id="31" name="Google Shape;31;p6"/>
-          <p:cNvSpPr txBox="1"/>
+          <p:cNvSpPr txBox="1">
+            <a:spLocks noGrp="1"/>
+          </p:cNvSpPr>
           <p:nvPr>
             <p:ph type="title"/>
           </p:nvPr>
@@ -3488,7 +3590,7 @@
           </a:prstGeom>
         </p:spPr>
         <p:txBody>
-          <a:bodyPr anchorCtr="0" anchor="b" bIns="91425" lIns="91425" spcFirstLastPara="1" rIns="91425" wrap="square" tIns="91425">
+          <a:bodyPr spcFirstLastPara="1" wrap="square" lIns="91425" tIns="91425" rIns="91425" bIns="91425" anchor="b" anchorCtr="0">
             <a:normAutofit/>
           </a:bodyPr>
           <a:lstStyle>
@@ -3592,15 +3694,19 @@
               <a:defRPr/>
             </a:lvl9pPr>
           </a:lstStyle>
-          <a:p/>
+          <a:p>
+            <a:endParaRPr/>
+          </a:p>
         </p:txBody>
       </p:sp>
       <p:sp>
         <p:nvSpPr>
           <p:cNvPr id="32" name="Google Shape;32;p6"/>
-          <p:cNvSpPr txBox="1"/>
+          <p:cNvSpPr txBox="1">
+            <a:spLocks noGrp="1"/>
+          </p:cNvSpPr>
           <p:nvPr>
-            <p:ph idx="12" type="sldNum"/>
+            <p:ph type="sldNum" idx="12"/>
           </p:nvPr>
         </p:nvSpPr>
         <p:spPr>
@@ -3613,7 +3719,7 @@
           </a:prstGeom>
         </p:spPr>
         <p:txBody>
-          <a:bodyPr anchorCtr="0" anchor="ctr" bIns="91425" lIns="91425" spcFirstLastPara="1" rIns="91425" wrap="square" tIns="91425">
+          <a:bodyPr spcFirstLastPara="1" wrap="square" lIns="91425" tIns="91425" rIns="91425" bIns="91425" anchor="ctr" anchorCtr="0">
             <a:normAutofit/>
           </a:bodyPr>
           <a:lstStyle>
@@ -3655,7 +3761,7 @@
             </a:lvl9pPr>
           </a:lstStyle>
           <a:p>
-            <a:pPr indent="0" lvl="0" marL="0" rtl="0" algn="r">
+            <a:pPr marL="0" lvl="0" indent="0" algn="r" rtl="0">
               <a:spcBef>
                 <a:spcPts val="0"/>
               </a:spcBef>
@@ -3681,11 +3787,11 @@
 </file>
 
 <file path=ppt/slideLayouts/slideLayout6.xml><?xml version="1.0" encoding="utf-8"?>
-<p:sldLayout xmlns:a="http://schemas.openxmlformats.org/drawingml/2006/main" xmlns:r="http://schemas.openxmlformats.org/officeDocument/2006/relationships" xmlns:mc="http://schemas.openxmlformats.org/markup-compatibility/2006" xmlns:mv="urn:schemas-microsoft-com:mac:vml" xmlns:p="http://schemas.openxmlformats.org/presentationml/2006/main" xmlns:c="http://schemas.openxmlformats.org/drawingml/2006/chart" xmlns:dgm="http://schemas.openxmlformats.org/drawingml/2006/diagram" xmlns:o="urn:schemas-microsoft-com:office:office" xmlns:v="urn:schemas-microsoft-com:vml" xmlns:pvml="urn:schemas-microsoft-com:office:powerpoint" xmlns:com="http://schemas.openxmlformats.org/drawingml/2006/compatibility" xmlns:p14="http://schemas.microsoft.com/office/powerpoint/2010/main" xmlns:p15="http://schemas.microsoft.com/office/powerpoint/2012/main" xmlns:ahyp="http://schemas.microsoft.com/office/drawing/2018/hyperlinkcolor" matchingName="One column text">
+<p:sldLayout xmlns:a="http://schemas.openxmlformats.org/drawingml/2006/main" xmlns:r="http://schemas.openxmlformats.org/officeDocument/2006/relationships" xmlns:p="http://schemas.openxmlformats.org/presentationml/2006/main" matchingName="One column text">
   <p:cSld name="ONE_COLUMN_TEXT">
     <p:spTree>
       <p:nvGrpSpPr>
-        <p:cNvPr id="33" name="Shape 33"/>
+        <p:cNvPr id="1" name="Shape 33"/>
         <p:cNvGrpSpPr/>
         <p:nvPr/>
       </p:nvGrpSpPr>
@@ -3700,7 +3806,9 @@
       <p:sp>
         <p:nvSpPr>
           <p:cNvPr id="34" name="Google Shape;34;p7"/>
-          <p:cNvSpPr txBox="1"/>
+          <p:cNvSpPr txBox="1">
+            <a:spLocks noGrp="1"/>
+          </p:cNvSpPr>
           <p:nvPr>
             <p:ph type="title"/>
           </p:nvPr>
@@ -3715,7 +3823,7 @@
           </a:prstGeom>
         </p:spPr>
         <p:txBody>
-          <a:bodyPr anchorCtr="0" anchor="b" bIns="91425" lIns="91425" spcFirstLastPara="1" rIns="91425" wrap="square" tIns="91425">
+          <a:bodyPr spcFirstLastPara="1" wrap="square" lIns="91425" tIns="91425" rIns="91425" bIns="91425" anchor="b" anchorCtr="0">
             <a:normAutofit/>
           </a:bodyPr>
           <a:lstStyle>
@@ -3819,15 +3927,19 @@
               <a:defRPr sz="3000"/>
             </a:lvl9pPr>
           </a:lstStyle>
-          <a:p/>
+          <a:p>
+            <a:endParaRPr/>
+          </a:p>
         </p:txBody>
       </p:sp>
       <p:sp>
         <p:nvSpPr>
           <p:cNvPr id="35" name="Google Shape;35;p7"/>
-          <p:cNvSpPr txBox="1"/>
+          <p:cNvSpPr txBox="1">
+            <a:spLocks noGrp="1"/>
+          </p:cNvSpPr>
           <p:nvPr>
-            <p:ph idx="1" type="body"/>
+            <p:ph type="body" idx="1"/>
           </p:nvPr>
         </p:nvSpPr>
         <p:spPr>
@@ -3840,11 +3952,11 @@
           </a:prstGeom>
         </p:spPr>
         <p:txBody>
-          <a:bodyPr anchorCtr="0" anchor="t" bIns="91425" lIns="91425" spcFirstLastPara="1" rIns="91425" wrap="square" tIns="91425">
+          <a:bodyPr spcFirstLastPara="1" wrap="square" lIns="91425" tIns="91425" rIns="91425" bIns="91425" anchor="t" anchorCtr="0">
             <a:normAutofit/>
           </a:bodyPr>
           <a:lstStyle>
-            <a:lvl1pPr indent="-304800" lvl="0" marL="457200">
+            <a:lvl1pPr marL="457200" lvl="0" indent="-304800">
               <a:spcBef>
                 <a:spcPts val="0"/>
               </a:spcBef>
@@ -3855,7 +3967,7 @@
               <a:buChar char="●"/>
               <a:defRPr sz="1200"/>
             </a:lvl1pPr>
-            <a:lvl2pPr indent="-304800" lvl="1" marL="914400">
+            <a:lvl2pPr marL="914400" lvl="1" indent="-304800">
               <a:spcBef>
                 <a:spcPts val="0"/>
               </a:spcBef>
@@ -3866,7 +3978,7 @@
               <a:buChar char="○"/>
               <a:defRPr sz="1200"/>
             </a:lvl2pPr>
-            <a:lvl3pPr indent="-304800" lvl="2" marL="1371600">
+            <a:lvl3pPr marL="1371600" lvl="2" indent="-304800">
               <a:spcBef>
                 <a:spcPts val="0"/>
               </a:spcBef>
@@ -3877,7 +3989,7 @@
               <a:buChar char="■"/>
               <a:defRPr sz="1200"/>
             </a:lvl3pPr>
-            <a:lvl4pPr indent="-304800" lvl="3" marL="1828800">
+            <a:lvl4pPr marL="1828800" lvl="3" indent="-304800">
               <a:spcBef>
                 <a:spcPts val="0"/>
               </a:spcBef>
@@ -3888,7 +4000,7 @@
               <a:buChar char="●"/>
               <a:defRPr sz="1200"/>
             </a:lvl4pPr>
-            <a:lvl5pPr indent="-304800" lvl="4" marL="2286000">
+            <a:lvl5pPr marL="2286000" lvl="4" indent="-304800">
               <a:spcBef>
                 <a:spcPts val="0"/>
               </a:spcBef>
@@ -3899,7 +4011,7 @@
               <a:buChar char="○"/>
               <a:defRPr sz="1200"/>
             </a:lvl5pPr>
-            <a:lvl6pPr indent="-304800" lvl="5" marL="2743200">
+            <a:lvl6pPr marL="2743200" lvl="5" indent="-304800">
               <a:spcBef>
                 <a:spcPts val="0"/>
               </a:spcBef>
@@ -3910,7 +4022,7 @@
               <a:buChar char="■"/>
               <a:defRPr sz="1200"/>
             </a:lvl6pPr>
-            <a:lvl7pPr indent="-304800" lvl="6" marL="3200400">
+            <a:lvl7pPr marL="3200400" lvl="6" indent="-304800">
               <a:spcBef>
                 <a:spcPts val="0"/>
               </a:spcBef>
@@ -3921,7 +4033,7 @@
               <a:buChar char="●"/>
               <a:defRPr sz="1200"/>
             </a:lvl7pPr>
-            <a:lvl8pPr indent="-304800" lvl="7" marL="3657600">
+            <a:lvl8pPr marL="3657600" lvl="7" indent="-304800">
               <a:spcBef>
                 <a:spcPts val="0"/>
               </a:spcBef>
@@ -3932,7 +4044,7 @@
               <a:buChar char="○"/>
               <a:defRPr sz="1200"/>
             </a:lvl8pPr>
-            <a:lvl9pPr indent="-304800" lvl="8" marL="4114800">
+            <a:lvl9pPr marL="4114800" lvl="8" indent="-304800">
               <a:spcBef>
                 <a:spcPts val="0"/>
               </a:spcBef>
@@ -3944,15 +4056,19 @@
               <a:defRPr sz="1200"/>
             </a:lvl9pPr>
           </a:lstStyle>
-          <a:p/>
+          <a:p>
+            <a:endParaRPr/>
+          </a:p>
         </p:txBody>
       </p:sp>
       <p:sp>
         <p:nvSpPr>
           <p:cNvPr id="36" name="Google Shape;36;p7"/>
-          <p:cNvSpPr txBox="1"/>
+          <p:cNvSpPr txBox="1">
+            <a:spLocks noGrp="1"/>
+          </p:cNvSpPr>
           <p:nvPr>
-            <p:ph idx="12" type="sldNum"/>
+            <p:ph type="sldNum" idx="12"/>
           </p:nvPr>
         </p:nvSpPr>
         <p:spPr>
@@ -3965,7 +4081,7 @@
           </a:prstGeom>
         </p:spPr>
         <p:txBody>
-          <a:bodyPr anchorCtr="0" anchor="ctr" bIns="91425" lIns="91425" spcFirstLastPara="1" rIns="91425" wrap="square" tIns="91425">
+          <a:bodyPr spcFirstLastPara="1" wrap="square" lIns="91425" tIns="91425" rIns="91425" bIns="91425" anchor="ctr" anchorCtr="0">
             <a:normAutofit/>
           </a:bodyPr>
           <a:lstStyle>
@@ -4007,7 +4123,7 @@
             </a:lvl9pPr>
           </a:lstStyle>
           <a:p>
-            <a:pPr indent="0" lvl="0" marL="0" rtl="0" algn="r">
+            <a:pPr marL="0" lvl="0" indent="0" algn="r" rtl="0">
               <a:spcBef>
                 <a:spcPts val="0"/>
               </a:spcBef>
@@ -4033,11 +4149,11 @@
 </file>
 
 <file path=ppt/slideLayouts/slideLayout7.xml><?xml version="1.0" encoding="utf-8"?>
-<p:sldLayout xmlns:a="http://schemas.openxmlformats.org/drawingml/2006/main" xmlns:r="http://schemas.openxmlformats.org/officeDocument/2006/relationships" xmlns:mc="http://schemas.openxmlformats.org/markup-compatibility/2006" xmlns:mv="urn:schemas-microsoft-com:mac:vml" xmlns:p="http://schemas.openxmlformats.org/presentationml/2006/main" xmlns:c="http://schemas.openxmlformats.org/drawingml/2006/chart" xmlns:dgm="http://schemas.openxmlformats.org/drawingml/2006/diagram" xmlns:o="urn:schemas-microsoft-com:office:office" xmlns:v="urn:schemas-microsoft-com:vml" xmlns:pvml="urn:schemas-microsoft-com:office:powerpoint" xmlns:com="http://schemas.openxmlformats.org/drawingml/2006/compatibility" xmlns:p14="http://schemas.microsoft.com/office/powerpoint/2010/main" xmlns:p15="http://schemas.microsoft.com/office/powerpoint/2012/main" xmlns:ahyp="http://schemas.microsoft.com/office/drawing/2018/hyperlinkcolor" matchingName="Main point">
+<p:sldLayout xmlns:a="http://schemas.openxmlformats.org/drawingml/2006/main" xmlns:r="http://schemas.openxmlformats.org/officeDocument/2006/relationships" xmlns:p="http://schemas.openxmlformats.org/presentationml/2006/main" matchingName="Main point">
   <p:cSld name="MAIN_POINT">
     <p:spTree>
       <p:nvGrpSpPr>
-        <p:cNvPr id="37" name="Shape 37"/>
+        <p:cNvPr id="1" name="Shape 37"/>
         <p:cNvGrpSpPr/>
         <p:nvPr/>
       </p:nvGrpSpPr>
@@ -4071,12 +4187,12 @@
           </a:ln>
         </p:spPr>
         <p:txBody>
-          <a:bodyPr anchorCtr="0" anchor="ctr" bIns="91425" lIns="91425" spcFirstLastPara="1" rIns="91425" wrap="square" tIns="91425">
+          <a:bodyPr spcFirstLastPara="1" wrap="square" lIns="91425" tIns="91425" rIns="91425" bIns="91425" anchor="ctr" anchorCtr="0">
             <a:noAutofit/>
           </a:bodyPr>
           <a:lstStyle/>
           <a:p>
-            <a:pPr indent="0" lvl="0" marL="0" rtl="0" algn="l">
+            <a:pPr marL="0" lvl="0" indent="0" algn="l" rtl="0">
               <a:spcBef>
                 <a:spcPts val="0"/>
               </a:spcBef>
@@ -4085,9 +4201,6 @@
               </a:spcAft>
               <a:buNone/>
             </a:pPr>
-            <a:r>
-              <a:t/>
-            </a:r>
             <a:endParaRPr/>
           </a:p>
         </p:txBody>
@@ -4095,7 +4208,9 @@
       <p:sp>
         <p:nvSpPr>
           <p:cNvPr id="39" name="Google Shape;39;p8"/>
-          <p:cNvSpPr txBox="1"/>
+          <p:cNvSpPr txBox="1">
+            <a:spLocks noGrp="1"/>
+          </p:cNvSpPr>
           <p:nvPr>
             <p:ph type="title"/>
           </p:nvPr>
@@ -4110,7 +4225,7 @@
           </a:prstGeom>
         </p:spPr>
         <p:txBody>
-          <a:bodyPr anchorCtr="0" anchor="ctr" bIns="91425" lIns="91425" spcFirstLastPara="1" rIns="91425" wrap="square" tIns="91425">
+          <a:bodyPr spcFirstLastPara="1" wrap="square" lIns="91425" tIns="91425" rIns="91425" bIns="91425" anchor="ctr" anchorCtr="0">
             <a:normAutofit/>
           </a:bodyPr>
           <a:lstStyle>
@@ -4214,15 +4329,19 @@
               <a:defRPr sz="4800"/>
             </a:lvl9pPr>
           </a:lstStyle>
-          <a:p/>
+          <a:p>
+            <a:endParaRPr/>
+          </a:p>
         </p:txBody>
       </p:sp>
       <p:sp>
         <p:nvSpPr>
           <p:cNvPr id="40" name="Google Shape;40;p8"/>
-          <p:cNvSpPr txBox="1"/>
+          <p:cNvSpPr txBox="1">
+            <a:spLocks noGrp="1"/>
+          </p:cNvSpPr>
           <p:nvPr>
-            <p:ph idx="12" type="sldNum"/>
+            <p:ph type="sldNum" idx="12"/>
           </p:nvPr>
         </p:nvSpPr>
         <p:spPr>
@@ -4235,7 +4354,7 @@
           </a:prstGeom>
         </p:spPr>
         <p:txBody>
-          <a:bodyPr anchorCtr="0" anchor="ctr" bIns="91425" lIns="91425" spcFirstLastPara="1" rIns="91425" wrap="square" tIns="91425">
+          <a:bodyPr spcFirstLastPara="1" wrap="square" lIns="91425" tIns="91425" rIns="91425" bIns="91425" anchor="ctr" anchorCtr="0">
             <a:normAutofit/>
           </a:bodyPr>
           <a:lstStyle>
@@ -4277,7 +4396,7 @@
             </a:lvl9pPr>
           </a:lstStyle>
           <a:p>
-            <a:pPr indent="0" lvl="0" marL="0" rtl="0" algn="r">
+            <a:pPr marL="0" lvl="0" indent="0" algn="r" rtl="0">
               <a:spcBef>
                 <a:spcPts val="0"/>
               </a:spcBef>
@@ -4303,11 +4422,11 @@
 </file>
 
 <file path=ppt/slideLayouts/slideLayout8.xml><?xml version="1.0" encoding="utf-8"?>
-<p:sldLayout xmlns:a="http://schemas.openxmlformats.org/drawingml/2006/main" xmlns:r="http://schemas.openxmlformats.org/officeDocument/2006/relationships" xmlns:mc="http://schemas.openxmlformats.org/markup-compatibility/2006" xmlns:mv="urn:schemas-microsoft-com:mac:vml" xmlns:p="http://schemas.openxmlformats.org/presentationml/2006/main" xmlns:c="http://schemas.openxmlformats.org/drawingml/2006/chart" xmlns:dgm="http://schemas.openxmlformats.org/drawingml/2006/diagram" xmlns:o="urn:schemas-microsoft-com:office:office" xmlns:v="urn:schemas-microsoft-com:vml" xmlns:pvml="urn:schemas-microsoft-com:office:powerpoint" xmlns:com="http://schemas.openxmlformats.org/drawingml/2006/compatibility" xmlns:p14="http://schemas.microsoft.com/office/powerpoint/2010/main" xmlns:p15="http://schemas.microsoft.com/office/powerpoint/2012/main" xmlns:ahyp="http://schemas.microsoft.com/office/drawing/2018/hyperlinkcolor" matchingName="Section title and description">
+<p:sldLayout xmlns:a="http://schemas.openxmlformats.org/drawingml/2006/main" xmlns:r="http://schemas.openxmlformats.org/officeDocument/2006/relationships" xmlns:p="http://schemas.openxmlformats.org/presentationml/2006/main" matchingName="Section title and description">
   <p:cSld name="SECTION_TITLE_AND_DESCRIPTION">
     <p:spTree>
       <p:nvGrpSpPr>
-        <p:cNvPr id="41" name="Shape 41"/>
+        <p:cNvPr id="1" name="Shape 41"/>
         <p:cNvGrpSpPr/>
         <p:nvPr/>
       </p:nvGrpSpPr>
@@ -4341,12 +4460,12 @@
           </a:ln>
         </p:spPr>
         <p:txBody>
-          <a:bodyPr anchorCtr="0" anchor="ctr" bIns="91425" lIns="91425" spcFirstLastPara="1" rIns="91425" wrap="square" tIns="91425">
+          <a:bodyPr spcFirstLastPara="1" wrap="square" lIns="91425" tIns="91425" rIns="91425" bIns="91425" anchor="ctr" anchorCtr="0">
             <a:noAutofit/>
           </a:bodyPr>
           <a:lstStyle/>
           <a:p>
-            <a:pPr indent="0" lvl="0" marL="0" rtl="0" algn="l">
+            <a:pPr marL="0" lvl="0" indent="0" algn="l" rtl="0">
               <a:spcBef>
                 <a:spcPts val="0"/>
               </a:spcBef>
@@ -4355,9 +4474,6 @@
               </a:spcAft>
               <a:buNone/>
             </a:pPr>
-            <a:r>
-              <a:t/>
-            </a:r>
             <a:endParaRPr/>
           </a:p>
         </p:txBody>
@@ -4377,21 +4493,23 @@
             <a:avLst/>
           </a:prstGeom>
           <a:noFill/>
-          <a:ln cap="flat" cmpd="sng" w="19050">
+          <a:ln w="19050" cap="flat" cmpd="sng">
             <a:solidFill>
               <a:schemeClr val="lt1"/>
             </a:solidFill>
             <a:prstDash val="solid"/>
             <a:round/>
-            <a:headEnd len="sm" w="sm" type="none"/>
-            <a:tailEnd len="sm" w="sm" type="none"/>
+            <a:headEnd type="none" w="sm" len="sm"/>
+            <a:tailEnd type="none" w="sm" len="sm"/>
           </a:ln>
         </p:spPr>
       </p:cxnSp>
       <p:sp>
         <p:nvSpPr>
           <p:cNvPr id="44" name="Google Shape;44;p9"/>
-          <p:cNvSpPr txBox="1"/>
+          <p:cNvSpPr txBox="1">
+            <a:spLocks noGrp="1"/>
+          </p:cNvSpPr>
           <p:nvPr>
             <p:ph type="title"/>
           </p:nvPr>
@@ -4406,7 +4524,7 @@
           </a:prstGeom>
         </p:spPr>
         <p:txBody>
-          <a:bodyPr anchorCtr="0" anchor="b" bIns="91425" lIns="91425" spcFirstLastPara="1" rIns="91425" wrap="square" tIns="91425">
+          <a:bodyPr spcFirstLastPara="1" wrap="square" lIns="91425" tIns="91425" rIns="91425" bIns="91425" anchor="b" anchorCtr="0">
             <a:normAutofit/>
           </a:bodyPr>
           <a:lstStyle>
@@ -4573,15 +4691,19 @@
               </a:defRPr>
             </a:lvl9pPr>
           </a:lstStyle>
-          <a:p/>
+          <a:p>
+            <a:endParaRPr/>
+          </a:p>
         </p:txBody>
       </p:sp>
       <p:sp>
         <p:nvSpPr>
           <p:cNvPr id="45" name="Google Shape;45;p9"/>
-          <p:cNvSpPr txBox="1"/>
+          <p:cNvSpPr txBox="1">
+            <a:spLocks noGrp="1"/>
+          </p:cNvSpPr>
           <p:nvPr>
-            <p:ph idx="1" type="subTitle"/>
+            <p:ph type="subTitle" idx="1"/>
           </p:nvPr>
         </p:nvSpPr>
         <p:spPr>
@@ -4594,7 +4716,7 @@
           </a:prstGeom>
         </p:spPr>
         <p:txBody>
-          <a:bodyPr anchorCtr="0" anchor="t" bIns="91425" lIns="91425" spcFirstLastPara="1" rIns="91425" wrap="square" tIns="91425">
+          <a:bodyPr spcFirstLastPara="1" wrap="square" lIns="91425" tIns="91425" rIns="91425" bIns="91425" anchor="t" anchorCtr="0">
             <a:normAutofit/>
           </a:bodyPr>
           <a:lstStyle>
@@ -4779,15 +4901,19 @@
               </a:defRPr>
             </a:lvl9pPr>
           </a:lstStyle>
-          <a:p/>
+          <a:p>
+            <a:endParaRPr/>
+          </a:p>
         </p:txBody>
       </p:sp>
       <p:sp>
         <p:nvSpPr>
           <p:cNvPr id="46" name="Google Shape;46;p9"/>
-          <p:cNvSpPr txBox="1"/>
+          <p:cNvSpPr txBox="1">
+            <a:spLocks noGrp="1"/>
+          </p:cNvSpPr>
           <p:nvPr>
-            <p:ph idx="2" type="body"/>
+            <p:ph type="body" idx="2"/>
           </p:nvPr>
         </p:nvSpPr>
         <p:spPr>
@@ -4800,11 +4926,11 @@
           </a:prstGeom>
         </p:spPr>
         <p:txBody>
-          <a:bodyPr anchorCtr="0" anchor="ctr" bIns="91425" lIns="91425" spcFirstLastPara="1" rIns="91425" wrap="square" tIns="91425">
+          <a:bodyPr spcFirstLastPara="1" wrap="square" lIns="91425" tIns="91425" rIns="91425" bIns="91425" anchor="ctr" anchorCtr="0">
             <a:normAutofit/>
           </a:bodyPr>
           <a:lstStyle>
-            <a:lvl1pPr indent="-342900" lvl="0" marL="457200">
+            <a:lvl1pPr marL="457200" lvl="0" indent="-342900">
               <a:spcBef>
                 <a:spcPts val="0"/>
               </a:spcBef>
@@ -4822,7 +4948,7 @@
                 </a:solidFill>
               </a:defRPr>
             </a:lvl1pPr>
-            <a:lvl2pPr indent="-317500" lvl="1" marL="914400">
+            <a:lvl2pPr marL="914400" lvl="1" indent="-317500">
               <a:spcBef>
                 <a:spcPts val="0"/>
               </a:spcBef>
@@ -4840,7 +4966,7 @@
                 </a:solidFill>
               </a:defRPr>
             </a:lvl2pPr>
-            <a:lvl3pPr indent="-317500" lvl="2" marL="1371600">
+            <a:lvl3pPr marL="1371600" lvl="2" indent="-317500">
               <a:spcBef>
                 <a:spcPts val="0"/>
               </a:spcBef>
@@ -4858,7 +4984,7 @@
                 </a:solidFill>
               </a:defRPr>
             </a:lvl3pPr>
-            <a:lvl4pPr indent="-317500" lvl="3" marL="1828800">
+            <a:lvl4pPr marL="1828800" lvl="3" indent="-317500">
               <a:spcBef>
                 <a:spcPts val="0"/>
               </a:spcBef>
@@ -4876,7 +5002,7 @@
                 </a:solidFill>
               </a:defRPr>
             </a:lvl4pPr>
-            <a:lvl5pPr indent="-317500" lvl="4" marL="2286000">
+            <a:lvl5pPr marL="2286000" lvl="4" indent="-317500">
               <a:spcBef>
                 <a:spcPts val="0"/>
               </a:spcBef>
@@ -4894,7 +5020,7 @@
                 </a:solidFill>
               </a:defRPr>
             </a:lvl5pPr>
-            <a:lvl6pPr indent="-317500" lvl="5" marL="2743200">
+            <a:lvl6pPr marL="2743200" lvl="5" indent="-317500">
               <a:spcBef>
                 <a:spcPts val="0"/>
               </a:spcBef>
@@ -4912,7 +5038,7 @@
                 </a:solidFill>
               </a:defRPr>
             </a:lvl6pPr>
-            <a:lvl7pPr indent="-317500" lvl="6" marL="3200400">
+            <a:lvl7pPr marL="3200400" lvl="6" indent="-317500">
               <a:spcBef>
                 <a:spcPts val="0"/>
               </a:spcBef>
@@ -4930,7 +5056,7 @@
                 </a:solidFill>
               </a:defRPr>
             </a:lvl7pPr>
-            <a:lvl8pPr indent="-317500" lvl="7" marL="3657600">
+            <a:lvl8pPr marL="3657600" lvl="7" indent="-317500">
               <a:spcBef>
                 <a:spcPts val="0"/>
               </a:spcBef>
@@ -4948,7 +5074,7 @@
                 </a:solidFill>
               </a:defRPr>
             </a:lvl8pPr>
-            <a:lvl9pPr indent="-317500" lvl="8" marL="4114800">
+            <a:lvl9pPr marL="4114800" lvl="8" indent="-317500">
               <a:spcBef>
                 <a:spcPts val="0"/>
               </a:spcBef>
@@ -4967,15 +5093,19 @@
               </a:defRPr>
             </a:lvl9pPr>
           </a:lstStyle>
-          <a:p/>
+          <a:p>
+            <a:endParaRPr/>
+          </a:p>
         </p:txBody>
       </p:sp>
       <p:sp>
         <p:nvSpPr>
           <p:cNvPr id="47" name="Google Shape;47;p9"/>
-          <p:cNvSpPr txBox="1"/>
+          <p:cNvSpPr txBox="1">
+            <a:spLocks noGrp="1"/>
+          </p:cNvSpPr>
           <p:nvPr>
-            <p:ph idx="12" type="sldNum"/>
+            <p:ph type="sldNum" idx="12"/>
           </p:nvPr>
         </p:nvSpPr>
         <p:spPr>
@@ -4988,7 +5118,7 @@
           </a:prstGeom>
         </p:spPr>
         <p:txBody>
-          <a:bodyPr anchorCtr="0" anchor="ctr" bIns="91425" lIns="91425" spcFirstLastPara="1" rIns="91425" wrap="square" tIns="91425">
+          <a:bodyPr spcFirstLastPara="1" wrap="square" lIns="91425" tIns="91425" rIns="91425" bIns="91425" anchor="ctr" anchorCtr="0">
             <a:normAutofit/>
           </a:bodyPr>
           <a:lstStyle>
@@ -5066,7 +5196,7 @@
             </a:lvl9pPr>
           </a:lstStyle>
           <a:p>
-            <a:pPr indent="0" lvl="0" marL="0" rtl="0" algn="r">
+            <a:pPr marL="0" lvl="0" indent="0" algn="r" rtl="0">
               <a:spcBef>
                 <a:spcPts val="0"/>
               </a:spcBef>
@@ -5092,11 +5222,11 @@
 </file>
 
 <file path=ppt/slideLayouts/slideLayout9.xml><?xml version="1.0" encoding="utf-8"?>
-<p:sldLayout xmlns:a="http://schemas.openxmlformats.org/drawingml/2006/main" xmlns:r="http://schemas.openxmlformats.org/officeDocument/2006/relationships" xmlns:mc="http://schemas.openxmlformats.org/markup-compatibility/2006" xmlns:mv="urn:schemas-microsoft-com:mac:vml" xmlns:p="http://schemas.openxmlformats.org/presentationml/2006/main" xmlns:c="http://schemas.openxmlformats.org/drawingml/2006/chart" xmlns:dgm="http://schemas.openxmlformats.org/drawingml/2006/diagram" xmlns:o="urn:schemas-microsoft-com:office:office" xmlns:v="urn:schemas-microsoft-com:vml" xmlns:pvml="urn:schemas-microsoft-com:office:powerpoint" xmlns:com="http://schemas.openxmlformats.org/drawingml/2006/compatibility" xmlns:p14="http://schemas.microsoft.com/office/powerpoint/2010/main" xmlns:p15="http://schemas.microsoft.com/office/powerpoint/2012/main" xmlns:ahyp="http://schemas.microsoft.com/office/drawing/2018/hyperlinkcolor" matchingName="Caption">
+<p:sldLayout xmlns:a="http://schemas.openxmlformats.org/drawingml/2006/main" xmlns:r="http://schemas.openxmlformats.org/officeDocument/2006/relationships" xmlns:p="http://schemas.openxmlformats.org/presentationml/2006/main" matchingName="Caption">
   <p:cSld name="CAPTION_ONLY">
     <p:spTree>
       <p:nvGrpSpPr>
-        <p:cNvPr id="48" name="Shape 48"/>
+        <p:cNvPr id="1" name="Shape 48"/>
         <p:cNvGrpSpPr/>
         <p:nvPr/>
       </p:nvGrpSpPr>
@@ -5111,9 +5241,11 @@
       <p:sp>
         <p:nvSpPr>
           <p:cNvPr id="49" name="Google Shape;49;p10"/>
-          <p:cNvSpPr txBox="1"/>
+          <p:cNvSpPr txBox="1">
+            <a:spLocks noGrp="1"/>
+          </p:cNvSpPr>
           <p:nvPr>
-            <p:ph idx="1" type="body"/>
+            <p:ph type="body" idx="1"/>
           </p:nvPr>
         </p:nvSpPr>
         <p:spPr>
@@ -5126,11 +5258,11 @@
           </a:prstGeom>
         </p:spPr>
         <p:txBody>
-          <a:bodyPr anchorCtr="0" anchor="ctr" bIns="91425" lIns="91425" spcFirstLastPara="1" rIns="91425" wrap="square" tIns="91425">
+          <a:bodyPr spcFirstLastPara="1" wrap="square" lIns="91425" tIns="91425" rIns="91425" bIns="91425" anchor="ctr" anchorCtr="0">
             <a:normAutofit/>
           </a:bodyPr>
           <a:lstStyle>
-            <a:lvl1pPr indent="-228600" lvl="0" marL="457200">
+            <a:lvl1pPr marL="457200" lvl="0" indent="-228600">
               <a:lnSpc>
                 <a:spcPct val="100000"/>
               </a:lnSpc>
@@ -5151,15 +5283,19 @@
               </a:defRPr>
             </a:lvl1pPr>
           </a:lstStyle>
-          <a:p/>
+          <a:p>
+            <a:endParaRPr/>
+          </a:p>
         </p:txBody>
       </p:sp>
       <p:sp>
         <p:nvSpPr>
           <p:cNvPr id="50" name="Google Shape;50;p10"/>
-          <p:cNvSpPr txBox="1"/>
+          <p:cNvSpPr txBox="1">
+            <a:spLocks noGrp="1"/>
+          </p:cNvSpPr>
           <p:nvPr>
-            <p:ph idx="12" type="sldNum"/>
+            <p:ph type="sldNum" idx="12"/>
           </p:nvPr>
         </p:nvSpPr>
         <p:spPr>
@@ -5172,7 +5308,7 @@
           </a:prstGeom>
         </p:spPr>
         <p:txBody>
-          <a:bodyPr anchorCtr="0" anchor="ctr" bIns="91425" lIns="91425" spcFirstLastPara="1" rIns="91425" wrap="square" tIns="91425">
+          <a:bodyPr spcFirstLastPara="1" wrap="square" lIns="91425" tIns="91425" rIns="91425" bIns="91425" anchor="ctr" anchorCtr="0">
             <a:normAutofit/>
           </a:bodyPr>
           <a:lstStyle>
@@ -5214,7 +5350,7 @@
             </a:lvl9pPr>
           </a:lstStyle>
           <a:p>
-            <a:pPr indent="0" lvl="0" marL="0" rtl="0" algn="r">
+            <a:pPr marL="0" lvl="0" indent="0" algn="r" rtl="0">
               <a:spcBef>
                 <a:spcPts val="0"/>
               </a:spcBef>
@@ -5240,18 +5376,19 @@
 </file>
 
 <file path=ppt/slideMasters/slideMaster1.xml><?xml version="1.0" encoding="utf-8"?>
-<p:sldMaster xmlns:a="http://schemas.openxmlformats.org/drawingml/2006/main" xmlns:r="http://schemas.openxmlformats.org/officeDocument/2006/relationships" xmlns:mc="http://schemas.openxmlformats.org/markup-compatibility/2006" xmlns:mv="urn:schemas-microsoft-com:mac:vml" xmlns:p="http://schemas.openxmlformats.org/presentationml/2006/main" xmlns:c="http://schemas.openxmlformats.org/drawingml/2006/chart" xmlns:dgm="http://schemas.openxmlformats.org/drawingml/2006/diagram" xmlns:o="urn:schemas-microsoft-com:office:office" xmlns:v="urn:schemas-microsoft-com:vml" xmlns:pvml="urn:schemas-microsoft-com:office:powerpoint" xmlns:com="http://schemas.openxmlformats.org/drawingml/2006/compatibility" xmlns:p14="http://schemas.microsoft.com/office/powerpoint/2010/main" xmlns:p15="http://schemas.microsoft.com/office/powerpoint/2012/main" xmlns:ahyp="http://schemas.microsoft.com/office/drawing/2018/hyperlinkcolor">
+<p:sldMaster xmlns:a="http://schemas.openxmlformats.org/drawingml/2006/main" xmlns:r="http://schemas.openxmlformats.org/officeDocument/2006/relationships" xmlns:p="http://schemas.openxmlformats.org/presentationml/2006/main">
   <p:cSld name="luxe">
     <p:bg>
       <p:bgPr>
         <a:solidFill>
           <a:schemeClr val="lt1"/>
         </a:solidFill>
+        <a:effectLst/>
       </p:bgPr>
     </p:bg>
     <p:spTree>
       <p:nvGrpSpPr>
-        <p:cNvPr id="5" name="Shape 5"/>
+        <p:cNvPr id="1" name="Shape 5"/>
         <p:cNvGrpSpPr/>
         <p:nvPr/>
       </p:nvGrpSpPr>
@@ -5266,7 +5403,9 @@
       <p:sp>
         <p:nvSpPr>
           <p:cNvPr id="6" name="Google Shape;6;p1"/>
-          <p:cNvSpPr txBox="1"/>
+          <p:cNvSpPr txBox="1">
+            <a:spLocks noGrp="1"/>
+          </p:cNvSpPr>
           <p:nvPr>
             <p:ph type="title"/>
           </p:nvPr>
@@ -5285,7 +5424,7 @@
           </a:ln>
         </p:spPr>
         <p:txBody>
-          <a:bodyPr anchorCtr="0" anchor="b" bIns="91425" lIns="91425" spcFirstLastPara="1" rIns="91425" wrap="square" tIns="91425">
+          <a:bodyPr spcFirstLastPara="1" wrap="square" lIns="91425" tIns="91425" rIns="91425" bIns="91425" anchor="b" anchorCtr="0">
             <a:normAutofit/>
           </a:bodyPr>
           <a:lstStyle>
@@ -5497,15 +5636,19 @@
               </a:defRPr>
             </a:lvl9pPr>
           </a:lstStyle>
-          <a:p/>
+          <a:p>
+            <a:endParaRPr/>
+          </a:p>
         </p:txBody>
       </p:sp>
       <p:sp>
         <p:nvSpPr>
           <p:cNvPr id="7" name="Google Shape;7;p1"/>
-          <p:cNvSpPr txBox="1"/>
+          <p:cNvSpPr txBox="1">
+            <a:spLocks noGrp="1"/>
+          </p:cNvSpPr>
           <p:nvPr>
-            <p:ph idx="1" type="body"/>
+            <p:ph type="body" idx="1"/>
           </p:nvPr>
         </p:nvSpPr>
         <p:spPr>
@@ -5522,11 +5665,11 @@
           </a:ln>
         </p:spPr>
         <p:txBody>
-          <a:bodyPr anchorCtr="0" anchor="t" bIns="91425" lIns="91425" spcFirstLastPara="1" rIns="91425" wrap="square" tIns="91425">
+          <a:bodyPr spcFirstLastPara="1" wrap="square" lIns="91425" tIns="91425" rIns="91425" bIns="91425" anchor="t" anchorCtr="0">
             <a:normAutofit/>
           </a:bodyPr>
           <a:lstStyle>
-            <a:lvl1pPr indent="-342900" lvl="0" marL="457200">
+            <a:lvl1pPr marL="457200" lvl="0" indent="-342900">
               <a:lnSpc>
                 <a:spcPct val="115000"/>
               </a:lnSpc>
@@ -5552,7 +5695,7 @@
                 <a:sym typeface="Open Sans"/>
               </a:defRPr>
             </a:lvl1pPr>
-            <a:lvl2pPr indent="-317500" lvl="1" marL="914400">
+            <a:lvl2pPr marL="914400" lvl="1" indent="-317500">
               <a:lnSpc>
                 <a:spcPct val="115000"/>
               </a:lnSpc>
@@ -5578,7 +5721,7 @@
                 <a:sym typeface="Open Sans"/>
               </a:defRPr>
             </a:lvl2pPr>
-            <a:lvl3pPr indent="-317500" lvl="2" marL="1371600">
+            <a:lvl3pPr marL="1371600" lvl="2" indent="-317500">
               <a:lnSpc>
                 <a:spcPct val="115000"/>
               </a:lnSpc>
@@ -5604,7 +5747,7 @@
                 <a:sym typeface="Open Sans"/>
               </a:defRPr>
             </a:lvl3pPr>
-            <a:lvl4pPr indent="-317500" lvl="3" marL="1828800">
+            <a:lvl4pPr marL="1828800" lvl="3" indent="-317500">
               <a:lnSpc>
                 <a:spcPct val="115000"/>
               </a:lnSpc>
@@ -5630,7 +5773,7 @@
                 <a:sym typeface="Open Sans"/>
               </a:defRPr>
             </a:lvl4pPr>
-            <a:lvl5pPr indent="-317500" lvl="4" marL="2286000">
+            <a:lvl5pPr marL="2286000" lvl="4" indent="-317500">
               <a:lnSpc>
                 <a:spcPct val="115000"/>
               </a:lnSpc>
@@ -5656,7 +5799,7 @@
                 <a:sym typeface="Open Sans"/>
               </a:defRPr>
             </a:lvl5pPr>
-            <a:lvl6pPr indent="-317500" lvl="5" marL="2743200">
+            <a:lvl6pPr marL="2743200" lvl="5" indent="-317500">
               <a:lnSpc>
                 <a:spcPct val="115000"/>
               </a:lnSpc>
@@ -5682,7 +5825,7 @@
                 <a:sym typeface="Open Sans"/>
               </a:defRPr>
             </a:lvl6pPr>
-            <a:lvl7pPr indent="-317500" lvl="6" marL="3200400">
+            <a:lvl7pPr marL="3200400" lvl="6" indent="-317500">
               <a:lnSpc>
                 <a:spcPct val="115000"/>
               </a:lnSpc>
@@ -5708,7 +5851,7 @@
                 <a:sym typeface="Open Sans"/>
               </a:defRPr>
             </a:lvl7pPr>
-            <a:lvl8pPr indent="-317500" lvl="7" marL="3657600">
+            <a:lvl8pPr marL="3657600" lvl="7" indent="-317500">
               <a:lnSpc>
                 <a:spcPct val="115000"/>
               </a:lnSpc>
@@ -5734,7 +5877,7 @@
                 <a:sym typeface="Open Sans"/>
               </a:defRPr>
             </a:lvl8pPr>
-            <a:lvl9pPr indent="-317500" lvl="8" marL="4114800">
+            <a:lvl9pPr marL="4114800" lvl="8" indent="-317500">
               <a:lnSpc>
                 <a:spcPct val="115000"/>
               </a:lnSpc>
@@ -5761,15 +5904,19 @@
               </a:defRPr>
             </a:lvl9pPr>
           </a:lstStyle>
-          <a:p/>
+          <a:p>
+            <a:endParaRPr/>
+          </a:p>
         </p:txBody>
       </p:sp>
       <p:sp>
         <p:nvSpPr>
           <p:cNvPr id="8" name="Google Shape;8;p1"/>
-          <p:cNvSpPr txBox="1"/>
+          <p:cNvSpPr txBox="1">
+            <a:spLocks noGrp="1"/>
+          </p:cNvSpPr>
           <p:nvPr>
-            <p:ph idx="12" type="sldNum"/>
+            <p:ph type="sldNum" idx="12"/>
           </p:nvPr>
         </p:nvSpPr>
         <p:spPr>
@@ -5786,7 +5933,7 @@
           </a:ln>
         </p:spPr>
         <p:txBody>
-          <a:bodyPr anchorCtr="0" anchor="ctr" bIns="91425" lIns="91425" spcFirstLastPara="1" rIns="91425" wrap="square" tIns="91425">
+          <a:bodyPr spcFirstLastPara="1" wrap="square" lIns="91425" tIns="91425" rIns="91425" bIns="91425" anchor="ctr" anchorCtr="0">
             <a:normAutofit/>
           </a:bodyPr>
           <a:lstStyle>
@@ -5900,7 +6047,7 @@
             </a:lvl9pPr>
           </a:lstStyle>
           <a:p>
-            <a:pPr indent="0" lvl="0" marL="0" rtl="0" algn="r">
+            <a:pPr marL="0" lvl="0" indent="0" algn="r" rtl="0">
               <a:spcBef>
                 <a:spcPts val="0"/>
               </a:spcBef>
@@ -5919,7 +6066,7 @@
       </p:sp>
     </p:spTree>
   </p:cSld>
-  <p:clrMap accent1="accent1" accent2="accent2" accent3="accent3" accent4="accent4" accent5="accent5" accent6="accent6" bg1="lt1" bg2="dk2" tx1="dk1" tx2="lt2" folHlink="folHlink" hlink="hlink"/>
+  <p:clrMap bg1="lt1" tx1="dk1" bg2="dk2" tx2="lt2" accent1="accent1" accent2="accent2" accent3="accent3" accent4="accent4" accent5="accent5" accent6="accent6" hlink="hlink" folHlink="folHlink"/>
   <p:sldLayoutIdLst>
     <p:sldLayoutId id="2147483648" r:id="rId1"/>
     <p:sldLayoutId id="2147483649" r:id="rId2"/>
@@ -5933,10 +6080,10 @@
     <p:sldLayoutId id="2147483657" r:id="rId10"/>
     <p:sldLayoutId id="2147483658" r:id="rId11"/>
   </p:sldLayoutIdLst>
-  <p:hf dt="0" ftr="0" hdr="0" sldNum="0"/>
+  <p:hf sldNum="0" hdr="0" ftr="0" dt="0"/>
   <p:txStyles>
     <p:titleStyle>
-      <a:defPPr lvl="0" marR="0" rtl="0" algn="l">
+      <a:defPPr marR="0" lvl="0" algn="l" rtl="0">
         <a:lnSpc>
           <a:spcPct val="100000"/>
         </a:lnSpc>
@@ -5947,7 +6094,7 @@
           <a:spcPts val="0"/>
         </a:spcAft>
       </a:defPPr>
-      <a:lvl1pPr lvl="0" marR="0" rtl="0" algn="l">
+      <a:lvl1pPr marR="0" lvl="0" algn="l" rtl="0">
         <a:lnSpc>
           <a:spcPct val="100000"/>
         </a:lnSpc>
@@ -5961,7 +6108,7 @@
           <a:srgbClr val="000000"/>
         </a:buClr>
         <a:buFont typeface="Arial"/>
-        <a:defRPr b="0" i="0" sz="1400" u="none" cap="none" strike="noStrike">
+        <a:defRPr sz="1400" b="0" i="0" u="none" strike="noStrike" cap="none">
           <a:solidFill>
             <a:srgbClr val="000000"/>
           </a:solidFill>
@@ -5971,7 +6118,7 @@
           <a:sym typeface="Arial"/>
         </a:defRPr>
       </a:lvl1pPr>
-      <a:lvl2pPr lvl="1" marR="0" rtl="0" algn="l">
+      <a:lvl2pPr marR="0" lvl="1" algn="l" rtl="0">
         <a:lnSpc>
           <a:spcPct val="100000"/>
         </a:lnSpc>
@@ -5985,7 +6132,7 @@
           <a:srgbClr val="000000"/>
         </a:buClr>
         <a:buFont typeface="Arial"/>
-        <a:defRPr b="0" i="0" sz="1400" u="none" cap="none" strike="noStrike">
+        <a:defRPr sz="1400" b="0" i="0" u="none" strike="noStrike" cap="none">
           <a:solidFill>
             <a:srgbClr val="000000"/>
           </a:solidFill>
@@ -5995,7 +6142,7 @@
           <a:sym typeface="Arial"/>
         </a:defRPr>
       </a:lvl2pPr>
-      <a:lvl3pPr lvl="2" marR="0" rtl="0" algn="l">
+      <a:lvl3pPr marR="0" lvl="2" algn="l" rtl="0">
         <a:lnSpc>
           <a:spcPct val="100000"/>
         </a:lnSpc>
@@ -6009,7 +6156,7 @@
           <a:srgbClr val="000000"/>
         </a:buClr>
         <a:buFont typeface="Arial"/>
-        <a:defRPr b="0" i="0" sz="1400" u="none" cap="none" strike="noStrike">
+        <a:defRPr sz="1400" b="0" i="0" u="none" strike="noStrike" cap="none">
           <a:solidFill>
             <a:srgbClr val="000000"/>
           </a:solidFill>
@@ -6019,7 +6166,7 @@
           <a:sym typeface="Arial"/>
         </a:defRPr>
       </a:lvl3pPr>
-      <a:lvl4pPr lvl="3" marR="0" rtl="0" algn="l">
+      <a:lvl4pPr marR="0" lvl="3" algn="l" rtl="0">
         <a:lnSpc>
           <a:spcPct val="100000"/>
         </a:lnSpc>
@@ -6033,7 +6180,7 @@
           <a:srgbClr val="000000"/>
         </a:buClr>
         <a:buFont typeface="Arial"/>
-        <a:defRPr b="0" i="0" sz="1400" u="none" cap="none" strike="noStrike">
+        <a:defRPr sz="1400" b="0" i="0" u="none" strike="noStrike" cap="none">
           <a:solidFill>
             <a:srgbClr val="000000"/>
           </a:solidFill>
@@ -6043,7 +6190,7 @@
           <a:sym typeface="Arial"/>
         </a:defRPr>
       </a:lvl4pPr>
-      <a:lvl5pPr lvl="4" marR="0" rtl="0" algn="l">
+      <a:lvl5pPr marR="0" lvl="4" algn="l" rtl="0">
         <a:lnSpc>
           <a:spcPct val="100000"/>
         </a:lnSpc>
@@ -6057,7 +6204,7 @@
           <a:srgbClr val="000000"/>
         </a:buClr>
         <a:buFont typeface="Arial"/>
-        <a:defRPr b="0" i="0" sz="1400" u="none" cap="none" strike="noStrike">
+        <a:defRPr sz="1400" b="0" i="0" u="none" strike="noStrike" cap="none">
           <a:solidFill>
             <a:srgbClr val="000000"/>
           </a:solidFill>
@@ -6067,7 +6214,7 @@
           <a:sym typeface="Arial"/>
         </a:defRPr>
       </a:lvl5pPr>
-      <a:lvl6pPr lvl="5" marR="0" rtl="0" algn="l">
+      <a:lvl6pPr marR="0" lvl="5" algn="l" rtl="0">
         <a:lnSpc>
           <a:spcPct val="100000"/>
         </a:lnSpc>
@@ -6081,7 +6228,7 @@
           <a:srgbClr val="000000"/>
         </a:buClr>
         <a:buFont typeface="Arial"/>
-        <a:defRPr b="0" i="0" sz="1400" u="none" cap="none" strike="noStrike">
+        <a:defRPr sz="1400" b="0" i="0" u="none" strike="noStrike" cap="none">
           <a:solidFill>
             <a:srgbClr val="000000"/>
           </a:solidFill>
@@ -6091,7 +6238,7 @@
           <a:sym typeface="Arial"/>
         </a:defRPr>
       </a:lvl6pPr>
-      <a:lvl7pPr lvl="6" marR="0" rtl="0" algn="l">
+      <a:lvl7pPr marR="0" lvl="6" algn="l" rtl="0">
         <a:lnSpc>
           <a:spcPct val="100000"/>
         </a:lnSpc>
@@ -6105,7 +6252,7 @@
           <a:srgbClr val="000000"/>
         </a:buClr>
         <a:buFont typeface="Arial"/>
-        <a:defRPr b="0" i="0" sz="1400" u="none" cap="none" strike="noStrike">
+        <a:defRPr sz="1400" b="0" i="0" u="none" strike="noStrike" cap="none">
           <a:solidFill>
             <a:srgbClr val="000000"/>
           </a:solidFill>
@@ -6115,7 +6262,7 @@
           <a:sym typeface="Arial"/>
         </a:defRPr>
       </a:lvl7pPr>
-      <a:lvl8pPr lvl="7" marR="0" rtl="0" algn="l">
+      <a:lvl8pPr marR="0" lvl="7" algn="l" rtl="0">
         <a:lnSpc>
           <a:spcPct val="100000"/>
         </a:lnSpc>
@@ -6129,7 +6276,7 @@
           <a:srgbClr val="000000"/>
         </a:buClr>
         <a:buFont typeface="Arial"/>
-        <a:defRPr b="0" i="0" sz="1400" u="none" cap="none" strike="noStrike">
+        <a:defRPr sz="1400" b="0" i="0" u="none" strike="noStrike" cap="none">
           <a:solidFill>
             <a:srgbClr val="000000"/>
           </a:solidFill>
@@ -6139,7 +6286,7 @@
           <a:sym typeface="Arial"/>
         </a:defRPr>
       </a:lvl8pPr>
-      <a:lvl9pPr lvl="8" marR="0" rtl="0" algn="l">
+      <a:lvl9pPr marR="0" lvl="8" algn="l" rtl="0">
         <a:lnSpc>
           <a:spcPct val="100000"/>
         </a:lnSpc>
@@ -6153,7 +6300,7 @@
           <a:srgbClr val="000000"/>
         </a:buClr>
         <a:buFont typeface="Arial"/>
-        <a:defRPr b="0" i="0" sz="1400" u="none" cap="none" strike="noStrike">
+        <a:defRPr sz="1400" b="0" i="0" u="none" strike="noStrike" cap="none">
           <a:solidFill>
             <a:srgbClr val="000000"/>
           </a:solidFill>
@@ -6165,7 +6312,7 @@
       </a:lvl9pPr>
     </p:titleStyle>
     <p:bodyStyle>
-      <a:defPPr lvl="0" marR="0" rtl="0" algn="l">
+      <a:defPPr marR="0" lvl="0" algn="l" rtl="0">
         <a:lnSpc>
           <a:spcPct val="100000"/>
         </a:lnSpc>
@@ -6176,7 +6323,7 @@
           <a:spcPts val="0"/>
         </a:spcAft>
       </a:defPPr>
-      <a:lvl1pPr lvl="0" marR="0" rtl="0" algn="l">
+      <a:lvl1pPr marR="0" lvl="0" algn="l" rtl="0">
         <a:lnSpc>
           <a:spcPct val="100000"/>
         </a:lnSpc>
@@ -6190,7 +6337,7 @@
           <a:srgbClr val="000000"/>
         </a:buClr>
         <a:buFont typeface="Arial"/>
-        <a:defRPr b="0" i="0" sz="1400" u="none" cap="none" strike="noStrike">
+        <a:defRPr sz="1400" b="0" i="0" u="none" strike="noStrike" cap="none">
           <a:solidFill>
             <a:srgbClr val="000000"/>
           </a:solidFill>
@@ -6200,7 +6347,7 @@
           <a:sym typeface="Arial"/>
         </a:defRPr>
       </a:lvl1pPr>
-      <a:lvl2pPr lvl="1" marR="0" rtl="0" algn="l">
+      <a:lvl2pPr marR="0" lvl="1" algn="l" rtl="0">
         <a:lnSpc>
           <a:spcPct val="100000"/>
         </a:lnSpc>
@@ -6214,7 +6361,7 @@
           <a:srgbClr val="000000"/>
         </a:buClr>
         <a:buFont typeface="Arial"/>
-        <a:defRPr b="0" i="0" sz="1400" u="none" cap="none" strike="noStrike">
+        <a:defRPr sz="1400" b="0" i="0" u="none" strike="noStrike" cap="none">
           <a:solidFill>
             <a:srgbClr val="000000"/>
           </a:solidFill>
@@ -6224,7 +6371,7 @@
           <a:sym typeface="Arial"/>
         </a:defRPr>
       </a:lvl2pPr>
-      <a:lvl3pPr lvl="2" marR="0" rtl="0" algn="l">
+      <a:lvl3pPr marR="0" lvl="2" algn="l" rtl="0">
         <a:lnSpc>
           <a:spcPct val="100000"/>
         </a:lnSpc>
@@ -6238,7 +6385,7 @@
           <a:srgbClr val="000000"/>
         </a:buClr>
         <a:buFont typeface="Arial"/>
-        <a:defRPr b="0" i="0" sz="1400" u="none" cap="none" strike="noStrike">
+        <a:defRPr sz="1400" b="0" i="0" u="none" strike="noStrike" cap="none">
           <a:solidFill>
             <a:srgbClr val="000000"/>
           </a:solidFill>
@@ -6248,7 +6395,7 @@
           <a:sym typeface="Arial"/>
         </a:defRPr>
       </a:lvl3pPr>
-      <a:lvl4pPr lvl="3" marR="0" rtl="0" algn="l">
+      <a:lvl4pPr marR="0" lvl="3" algn="l" rtl="0">
         <a:lnSpc>
           <a:spcPct val="100000"/>
         </a:lnSpc>
@@ -6262,7 +6409,7 @@
           <a:srgbClr val="000000"/>
         </a:buClr>
         <a:buFont typeface="Arial"/>
-        <a:defRPr b="0" i="0" sz="1400" u="none" cap="none" strike="noStrike">
+        <a:defRPr sz="1400" b="0" i="0" u="none" strike="noStrike" cap="none">
           <a:solidFill>
             <a:srgbClr val="000000"/>
           </a:solidFill>
@@ -6272,7 +6419,7 @@
           <a:sym typeface="Arial"/>
         </a:defRPr>
       </a:lvl4pPr>
-      <a:lvl5pPr lvl="4" marR="0" rtl="0" algn="l">
+      <a:lvl5pPr marR="0" lvl="4" algn="l" rtl="0">
         <a:lnSpc>
           <a:spcPct val="100000"/>
         </a:lnSpc>
@@ -6286,7 +6433,7 @@
           <a:srgbClr val="000000"/>
         </a:buClr>
         <a:buFont typeface="Arial"/>
-        <a:defRPr b="0" i="0" sz="1400" u="none" cap="none" strike="noStrike">
+        <a:defRPr sz="1400" b="0" i="0" u="none" strike="noStrike" cap="none">
           <a:solidFill>
             <a:srgbClr val="000000"/>
           </a:solidFill>
@@ -6296,7 +6443,7 @@
           <a:sym typeface="Arial"/>
         </a:defRPr>
       </a:lvl5pPr>
-      <a:lvl6pPr lvl="5" marR="0" rtl="0" algn="l">
+      <a:lvl6pPr marR="0" lvl="5" algn="l" rtl="0">
         <a:lnSpc>
           <a:spcPct val="100000"/>
         </a:lnSpc>
@@ -6310,7 +6457,7 @@
           <a:srgbClr val="000000"/>
         </a:buClr>
         <a:buFont typeface="Arial"/>
-        <a:defRPr b="0" i="0" sz="1400" u="none" cap="none" strike="noStrike">
+        <a:defRPr sz="1400" b="0" i="0" u="none" strike="noStrike" cap="none">
           <a:solidFill>
             <a:srgbClr val="000000"/>
           </a:solidFill>
@@ -6320,7 +6467,7 @@
           <a:sym typeface="Arial"/>
         </a:defRPr>
       </a:lvl6pPr>
-      <a:lvl7pPr lvl="6" marR="0" rtl="0" algn="l">
+      <a:lvl7pPr marR="0" lvl="6" algn="l" rtl="0">
         <a:lnSpc>
           <a:spcPct val="100000"/>
         </a:lnSpc>
@@ -6334,7 +6481,7 @@
           <a:srgbClr val="000000"/>
         </a:buClr>
         <a:buFont typeface="Arial"/>
-        <a:defRPr b="0" i="0" sz="1400" u="none" cap="none" strike="noStrike">
+        <a:defRPr sz="1400" b="0" i="0" u="none" strike="noStrike" cap="none">
           <a:solidFill>
             <a:srgbClr val="000000"/>
           </a:solidFill>
@@ -6344,7 +6491,7 @@
           <a:sym typeface="Arial"/>
         </a:defRPr>
       </a:lvl7pPr>
-      <a:lvl8pPr lvl="7" marR="0" rtl="0" algn="l">
+      <a:lvl8pPr marR="0" lvl="7" algn="l" rtl="0">
         <a:lnSpc>
           <a:spcPct val="100000"/>
         </a:lnSpc>
@@ -6358,7 +6505,7 @@
           <a:srgbClr val="000000"/>
         </a:buClr>
         <a:buFont typeface="Arial"/>
-        <a:defRPr b="0" i="0" sz="1400" u="none" cap="none" strike="noStrike">
+        <a:defRPr sz="1400" b="0" i="0" u="none" strike="noStrike" cap="none">
           <a:solidFill>
             <a:srgbClr val="000000"/>
           </a:solidFill>
@@ -6368,7 +6515,7 @@
           <a:sym typeface="Arial"/>
         </a:defRPr>
       </a:lvl8pPr>
-      <a:lvl9pPr lvl="8" marR="0" rtl="0" algn="l">
+      <a:lvl9pPr marR="0" lvl="8" algn="l" rtl="0">
         <a:lnSpc>
           <a:spcPct val="100000"/>
         </a:lnSpc>
@@ -6382,7 +6529,7 @@
           <a:srgbClr val="000000"/>
         </a:buClr>
         <a:buFont typeface="Arial"/>
-        <a:defRPr b="0" i="0" sz="1400" u="none" cap="none" strike="noStrike">
+        <a:defRPr sz="1400" b="0" i="0" u="none" strike="noStrike" cap="none">
           <a:solidFill>
             <a:srgbClr val="000000"/>
           </a:solidFill>
@@ -6394,7 +6541,7 @@
       </a:lvl9pPr>
     </p:bodyStyle>
     <p:otherStyle>
-      <a:defPPr lvl="0" marR="0" rtl="0" algn="l">
+      <a:defPPr marR="0" lvl="0" algn="l" rtl="0">
         <a:lnSpc>
           <a:spcPct val="100000"/>
         </a:lnSpc>
@@ -6405,7 +6552,7 @@
           <a:spcPts val="0"/>
         </a:spcAft>
       </a:defPPr>
-      <a:lvl1pPr lvl="0" marR="0" rtl="0" algn="l">
+      <a:lvl1pPr marR="0" lvl="0" algn="l" rtl="0">
         <a:lnSpc>
           <a:spcPct val="100000"/>
         </a:lnSpc>
@@ -6419,7 +6566,7 @@
           <a:srgbClr val="000000"/>
         </a:buClr>
         <a:buFont typeface="Arial"/>
-        <a:defRPr b="0" i="0" sz="1400" u="none" cap="none" strike="noStrike">
+        <a:defRPr sz="1400" b="0" i="0" u="none" strike="noStrike" cap="none">
           <a:solidFill>
             <a:srgbClr val="000000"/>
           </a:solidFill>
@@ -6429,7 +6576,7 @@
           <a:sym typeface="Arial"/>
         </a:defRPr>
       </a:lvl1pPr>
-      <a:lvl2pPr lvl="1" marR="0" rtl="0" algn="l">
+      <a:lvl2pPr marR="0" lvl="1" algn="l" rtl="0">
         <a:lnSpc>
           <a:spcPct val="100000"/>
         </a:lnSpc>
@@ -6443,7 +6590,7 @@
           <a:srgbClr val="000000"/>
         </a:buClr>
         <a:buFont typeface="Arial"/>
-        <a:defRPr b="0" i="0" sz="1400" u="none" cap="none" strike="noStrike">
+        <a:defRPr sz="1400" b="0" i="0" u="none" strike="noStrike" cap="none">
           <a:solidFill>
             <a:srgbClr val="000000"/>
           </a:solidFill>
@@ -6453,7 +6600,7 @@
           <a:sym typeface="Arial"/>
         </a:defRPr>
       </a:lvl2pPr>
-      <a:lvl3pPr lvl="2" marR="0" rtl="0" algn="l">
+      <a:lvl3pPr marR="0" lvl="2" algn="l" rtl="0">
         <a:lnSpc>
           <a:spcPct val="100000"/>
         </a:lnSpc>
@@ -6467,7 +6614,7 @@
           <a:srgbClr val="000000"/>
         </a:buClr>
         <a:buFont typeface="Arial"/>
-        <a:defRPr b="0" i="0" sz="1400" u="none" cap="none" strike="noStrike">
+        <a:defRPr sz="1400" b="0" i="0" u="none" strike="noStrike" cap="none">
           <a:solidFill>
             <a:srgbClr val="000000"/>
           </a:solidFill>
@@ -6477,7 +6624,7 @@
           <a:sym typeface="Arial"/>
         </a:defRPr>
       </a:lvl3pPr>
-      <a:lvl4pPr lvl="3" marR="0" rtl="0" algn="l">
+      <a:lvl4pPr marR="0" lvl="3" algn="l" rtl="0">
         <a:lnSpc>
           <a:spcPct val="100000"/>
         </a:lnSpc>
@@ -6491,7 +6638,7 @@
           <a:srgbClr val="000000"/>
         </a:buClr>
         <a:buFont typeface="Arial"/>
-        <a:defRPr b="0" i="0" sz="1400" u="none" cap="none" strike="noStrike">
+        <a:defRPr sz="1400" b="0" i="0" u="none" strike="noStrike" cap="none">
           <a:solidFill>
             <a:srgbClr val="000000"/>
           </a:solidFill>
@@ -6501,7 +6648,7 @@
           <a:sym typeface="Arial"/>
         </a:defRPr>
       </a:lvl4pPr>
-      <a:lvl5pPr lvl="4" marR="0" rtl="0" algn="l">
+      <a:lvl5pPr marR="0" lvl="4" algn="l" rtl="0">
         <a:lnSpc>
           <a:spcPct val="100000"/>
         </a:lnSpc>
@@ -6515,7 +6662,7 @@
           <a:srgbClr val="000000"/>
         </a:buClr>
         <a:buFont typeface="Arial"/>
-        <a:defRPr b="0" i="0" sz="1400" u="none" cap="none" strike="noStrike">
+        <a:defRPr sz="1400" b="0" i="0" u="none" strike="noStrike" cap="none">
           <a:solidFill>
             <a:srgbClr val="000000"/>
           </a:solidFill>
@@ -6525,7 +6672,7 @@
           <a:sym typeface="Arial"/>
         </a:defRPr>
       </a:lvl5pPr>
-      <a:lvl6pPr lvl="5" marR="0" rtl="0" algn="l">
+      <a:lvl6pPr marR="0" lvl="5" algn="l" rtl="0">
         <a:lnSpc>
           <a:spcPct val="100000"/>
         </a:lnSpc>
@@ -6539,7 +6686,7 @@
           <a:srgbClr val="000000"/>
         </a:buClr>
         <a:buFont typeface="Arial"/>
-        <a:defRPr b="0" i="0" sz="1400" u="none" cap="none" strike="noStrike">
+        <a:defRPr sz="1400" b="0" i="0" u="none" strike="noStrike" cap="none">
           <a:solidFill>
             <a:srgbClr val="000000"/>
           </a:solidFill>
@@ -6549,7 +6696,7 @@
           <a:sym typeface="Arial"/>
         </a:defRPr>
       </a:lvl6pPr>
-      <a:lvl7pPr lvl="6" marR="0" rtl="0" algn="l">
+      <a:lvl7pPr marR="0" lvl="6" algn="l" rtl="0">
         <a:lnSpc>
           <a:spcPct val="100000"/>
         </a:lnSpc>
@@ -6563,7 +6710,7 @@
           <a:srgbClr val="000000"/>
         </a:buClr>
         <a:buFont typeface="Arial"/>
-        <a:defRPr b="0" i="0" sz="1400" u="none" cap="none" strike="noStrike">
+        <a:defRPr sz="1400" b="0" i="0" u="none" strike="noStrike" cap="none">
           <a:solidFill>
             <a:srgbClr val="000000"/>
           </a:solidFill>
@@ -6573,7 +6720,7 @@
           <a:sym typeface="Arial"/>
         </a:defRPr>
       </a:lvl7pPr>
-      <a:lvl8pPr lvl="7" marR="0" rtl="0" algn="l">
+      <a:lvl8pPr marR="0" lvl="7" algn="l" rtl="0">
         <a:lnSpc>
           <a:spcPct val="100000"/>
         </a:lnSpc>
@@ -6587,7 +6734,7 @@
           <a:srgbClr val="000000"/>
         </a:buClr>
         <a:buFont typeface="Arial"/>
-        <a:defRPr b="0" i="0" sz="1400" u="none" cap="none" strike="noStrike">
+        <a:defRPr sz="1400" b="0" i="0" u="none" strike="noStrike" cap="none">
           <a:solidFill>
             <a:srgbClr val="000000"/>
           </a:solidFill>
@@ -6597,7 +6744,7 @@
           <a:sym typeface="Arial"/>
         </a:defRPr>
       </a:lvl8pPr>
-      <a:lvl9pPr lvl="8" marR="0" rtl="0" algn="l">
+      <a:lvl9pPr marR="0" lvl="8" algn="l" rtl="0">
         <a:lnSpc>
           <a:spcPct val="100000"/>
         </a:lnSpc>
@@ -6611,7 +6758,7 @@
           <a:srgbClr val="000000"/>
         </a:buClr>
         <a:buFont typeface="Arial"/>
-        <a:defRPr b="0" i="0" sz="1400" u="none" cap="none" strike="noStrike">
+        <a:defRPr sz="1400" b="0" i="0" u="none" strike="noStrike" cap="none">
           <a:solidFill>
             <a:srgbClr val="000000"/>
           </a:solidFill>
@@ -6627,11 +6774,11 @@
 </file>
 
 <file path=ppt/slides/slide1.xml><?xml version="1.0" encoding="utf-8"?>
-<p:sld xmlns:a="http://schemas.openxmlformats.org/drawingml/2006/main" xmlns:r="http://schemas.openxmlformats.org/officeDocument/2006/relationships" xmlns:mc="http://schemas.openxmlformats.org/markup-compatibility/2006" xmlns:mv="urn:schemas-microsoft-com:mac:vml" xmlns:p="http://schemas.openxmlformats.org/presentationml/2006/main" xmlns:c="http://schemas.openxmlformats.org/drawingml/2006/chart" xmlns:dgm="http://schemas.openxmlformats.org/drawingml/2006/diagram" xmlns:o="urn:schemas-microsoft-com:office:office" xmlns:v="urn:schemas-microsoft-com:vml" xmlns:pvml="urn:schemas-microsoft-com:office:powerpoint" xmlns:com="http://schemas.openxmlformats.org/drawingml/2006/compatibility" xmlns:p14="http://schemas.microsoft.com/office/powerpoint/2010/main" xmlns:p15="http://schemas.microsoft.com/office/powerpoint/2012/main" xmlns:ahyp="http://schemas.microsoft.com/office/drawing/2018/hyperlinkcolor">
+<p:sld xmlns:a="http://schemas.openxmlformats.org/drawingml/2006/main" xmlns:r="http://schemas.openxmlformats.org/officeDocument/2006/relationships" xmlns:p="http://schemas.openxmlformats.org/presentationml/2006/main">
   <p:cSld>
     <p:spTree>
       <p:nvGrpSpPr>
-        <p:cNvPr id="61" name="Shape 61"/>
+        <p:cNvPr id="1" name="Shape 61"/>
         <p:cNvGrpSpPr/>
         <p:nvPr/>
       </p:nvGrpSpPr>
@@ -6646,7 +6793,9 @@
       <p:sp>
         <p:nvSpPr>
           <p:cNvPr id="62" name="Google Shape;62;p13"/>
-          <p:cNvSpPr txBox="1"/>
+          <p:cNvSpPr txBox="1">
+            <a:spLocks noGrp="1"/>
+          </p:cNvSpPr>
           <p:nvPr>
             <p:ph type="ctrTitle"/>
           </p:nvPr>
@@ -6661,12 +6810,12 @@
           </a:prstGeom>
         </p:spPr>
         <p:txBody>
-          <a:bodyPr anchorCtr="0" anchor="b" bIns="91425" lIns="91425" spcFirstLastPara="1" rIns="91425" wrap="square" tIns="91425">
+          <a:bodyPr spcFirstLastPara="1" wrap="square" lIns="91425" tIns="91425" rIns="91425" bIns="91425" anchor="b" anchorCtr="0">
             <a:normAutofit fontScale="90000"/>
           </a:bodyPr>
           <a:lstStyle/>
           <a:p>
-            <a:pPr indent="0" lvl="0" marL="0" rtl="0" algn="l">
+            <a:pPr marL="0" lvl="0" indent="0" algn="l" rtl="0">
               <a:lnSpc>
                 <a:spcPct val="115000"/>
               </a:lnSpc>
@@ -6690,7 +6839,7 @@
             <a:endParaRPr/>
           </a:p>
           <a:p>
-            <a:pPr indent="0" lvl="0" marL="0" rtl="0" algn="ctr">
+            <a:pPr marL="0" lvl="0" indent="0" algn="ctr" rtl="0">
               <a:spcBef>
                 <a:spcPts val="0"/>
               </a:spcBef>
@@ -6699,9 +6848,6 @@
               </a:spcAft>
               <a:buNone/>
             </a:pPr>
-            <a:r>
-              <a:t/>
-            </a:r>
             <a:endParaRPr/>
           </a:p>
         </p:txBody>
@@ -6709,9 +6855,11 @@
       <p:sp>
         <p:nvSpPr>
           <p:cNvPr id="63" name="Google Shape;63;p13"/>
-          <p:cNvSpPr txBox="1"/>
+          <p:cNvSpPr txBox="1">
+            <a:spLocks noGrp="1"/>
+          </p:cNvSpPr>
           <p:nvPr>
-            <p:ph idx="1" type="subTitle"/>
+            <p:ph type="subTitle" idx="1"/>
           </p:nvPr>
         </p:nvSpPr>
         <p:spPr>
@@ -6724,12 +6872,12 @@
           </a:prstGeom>
         </p:spPr>
         <p:txBody>
-          <a:bodyPr anchorCtr="0" anchor="t" bIns="91425" lIns="91425" spcFirstLastPara="1" rIns="91425" wrap="square" tIns="91425">
+          <a:bodyPr spcFirstLastPara="1" wrap="square" lIns="91425" tIns="91425" rIns="91425" bIns="91425" anchor="t" anchorCtr="0">
             <a:normAutofit/>
           </a:bodyPr>
           <a:lstStyle/>
           <a:p>
-            <a:pPr indent="0" lvl="0" marL="0" rtl="0" algn="ctr">
+            <a:pPr marL="0" lvl="0" indent="0" algn="ctr" rtl="0">
               <a:spcBef>
                 <a:spcPts val="0"/>
               </a:spcBef>
@@ -6755,11 +6903,11 @@
 </file>
 
 <file path=ppt/slides/slide2.xml><?xml version="1.0" encoding="utf-8"?>
-<p:sld xmlns:a="http://schemas.openxmlformats.org/drawingml/2006/main" xmlns:r="http://schemas.openxmlformats.org/officeDocument/2006/relationships" xmlns:mc="http://schemas.openxmlformats.org/markup-compatibility/2006" xmlns:mv="urn:schemas-microsoft-com:mac:vml" xmlns:p="http://schemas.openxmlformats.org/presentationml/2006/main" xmlns:c="http://schemas.openxmlformats.org/drawingml/2006/chart" xmlns:dgm="http://schemas.openxmlformats.org/drawingml/2006/diagram" xmlns:o="urn:schemas-microsoft-com:office:office" xmlns:v="urn:schemas-microsoft-com:vml" xmlns:pvml="urn:schemas-microsoft-com:office:powerpoint" xmlns:com="http://schemas.openxmlformats.org/drawingml/2006/compatibility" xmlns:p14="http://schemas.microsoft.com/office/powerpoint/2010/main" xmlns:p15="http://schemas.microsoft.com/office/powerpoint/2012/main" xmlns:ahyp="http://schemas.microsoft.com/office/drawing/2018/hyperlinkcolor">
+<p:sld xmlns:a="http://schemas.openxmlformats.org/drawingml/2006/main" xmlns:r="http://schemas.openxmlformats.org/officeDocument/2006/relationships" xmlns:p="http://schemas.openxmlformats.org/presentationml/2006/main">
   <p:cSld>
     <p:spTree>
       <p:nvGrpSpPr>
-        <p:cNvPr id="67" name="Shape 67"/>
+        <p:cNvPr id="1" name="Shape 67"/>
         <p:cNvGrpSpPr/>
         <p:nvPr/>
       </p:nvGrpSpPr>
@@ -6774,7 +6922,9 @@
       <p:sp>
         <p:nvSpPr>
           <p:cNvPr id="68" name="Google Shape;68;p14"/>
-          <p:cNvSpPr txBox="1"/>
+          <p:cNvSpPr txBox="1">
+            <a:spLocks noGrp="1"/>
+          </p:cNvSpPr>
           <p:nvPr>
             <p:ph type="title"/>
           </p:nvPr>
@@ -6789,12 +6939,12 @@
           </a:prstGeom>
         </p:spPr>
         <p:txBody>
-          <a:bodyPr anchorCtr="0" anchor="b" bIns="91425" lIns="91425" spcFirstLastPara="1" rIns="91425" wrap="square" tIns="91425">
+          <a:bodyPr spcFirstLastPara="1" wrap="square" lIns="91425" tIns="91425" rIns="91425" bIns="91425" anchor="b" anchorCtr="0">
             <a:normAutofit fontScale="90000"/>
           </a:bodyPr>
           <a:lstStyle/>
           <a:p>
-            <a:pPr indent="0" lvl="0" marL="0" rtl="0" algn="l">
+            <a:pPr marL="0" lvl="0" indent="0" algn="l" rtl="0">
               <a:lnSpc>
                 <a:spcPct val="115000"/>
               </a:lnSpc>
@@ -6818,7 +6968,7 @@
             <a:endParaRPr/>
           </a:p>
           <a:p>
-            <a:pPr indent="0" lvl="0" marL="0" rtl="0" algn="l">
+            <a:pPr marL="0" lvl="0" indent="0" algn="l" rtl="0">
               <a:spcBef>
                 <a:spcPts val="0"/>
               </a:spcBef>
@@ -6827,9 +6977,6 @@
               </a:spcAft>
               <a:buNone/>
             </a:pPr>
-            <a:r>
-              <a:t/>
-            </a:r>
             <a:endParaRPr/>
           </a:p>
         </p:txBody>
@@ -6837,9 +6984,11 @@
       <p:sp>
         <p:nvSpPr>
           <p:cNvPr id="69" name="Google Shape;69;p14"/>
-          <p:cNvSpPr txBox="1"/>
+          <p:cNvSpPr txBox="1">
+            <a:spLocks noGrp="1"/>
+          </p:cNvSpPr>
           <p:nvPr>
-            <p:ph idx="1" type="body"/>
+            <p:ph type="body" idx="1"/>
           </p:nvPr>
         </p:nvSpPr>
         <p:spPr>
@@ -6852,12 +7001,12 @@
           </a:prstGeom>
         </p:spPr>
         <p:txBody>
-          <a:bodyPr anchorCtr="0" anchor="t" bIns="91425" lIns="91425" spcFirstLastPara="1" rIns="91425" wrap="square" tIns="91425">
+          <a:bodyPr spcFirstLastPara="1" wrap="square" lIns="91425" tIns="91425" rIns="91425" bIns="91425" anchor="t" anchorCtr="0">
             <a:normAutofit/>
           </a:bodyPr>
           <a:lstStyle/>
           <a:p>
-            <a:pPr indent="0" lvl="0" marL="0" rtl="0" algn="l">
+            <a:pPr marL="0" lvl="0" indent="0" algn="l" rtl="0">
               <a:spcBef>
                 <a:spcPts val="0"/>
               </a:spcBef>
@@ -6878,7 +7027,7 @@
             <a:endParaRPr/>
           </a:p>
           <a:p>
-            <a:pPr indent="0" lvl="0" marL="0" rtl="0" algn="l">
+            <a:pPr marL="0" lvl="0" indent="0" algn="l" rtl="0">
               <a:spcBef>
                 <a:spcPts val="1200"/>
               </a:spcBef>
@@ -6899,7 +7048,7 @@
             <a:endParaRPr/>
           </a:p>
           <a:p>
-            <a:pPr indent="0" lvl="0" marL="0" rtl="0" algn="l">
+            <a:pPr marL="0" lvl="0" indent="0" algn="l" rtl="0">
               <a:spcBef>
                 <a:spcPts val="1200"/>
               </a:spcBef>
@@ -6920,7 +7069,7 @@
             <a:endParaRPr/>
           </a:p>
           <a:p>
-            <a:pPr indent="0" lvl="0" marL="0" rtl="0" algn="l">
+            <a:pPr marL="0" lvl="0" indent="0" algn="l" rtl="0">
               <a:spcBef>
                 <a:spcPts val="1200"/>
               </a:spcBef>
@@ -6941,7 +7090,7 @@
             <a:endParaRPr/>
           </a:p>
           <a:p>
-            <a:pPr indent="0" lvl="0" marL="0" rtl="0" algn="l">
+            <a:pPr marL="0" lvl="0" indent="0" algn="l" rtl="0">
               <a:spcBef>
                 <a:spcPts val="1200"/>
               </a:spcBef>
@@ -6967,11 +7116,11 @@
 </file>
 
 <file path=ppt/slides/slide3.xml><?xml version="1.0" encoding="utf-8"?>
-<p:sld xmlns:a="http://schemas.openxmlformats.org/drawingml/2006/main" xmlns:r="http://schemas.openxmlformats.org/officeDocument/2006/relationships" xmlns:mc="http://schemas.openxmlformats.org/markup-compatibility/2006" xmlns:mv="urn:schemas-microsoft-com:mac:vml" xmlns:p="http://schemas.openxmlformats.org/presentationml/2006/main" xmlns:c="http://schemas.openxmlformats.org/drawingml/2006/chart" xmlns:dgm="http://schemas.openxmlformats.org/drawingml/2006/diagram" xmlns:o="urn:schemas-microsoft-com:office:office" xmlns:v="urn:schemas-microsoft-com:vml" xmlns:pvml="urn:schemas-microsoft-com:office:powerpoint" xmlns:com="http://schemas.openxmlformats.org/drawingml/2006/compatibility" xmlns:p14="http://schemas.microsoft.com/office/powerpoint/2010/main" xmlns:p15="http://schemas.microsoft.com/office/powerpoint/2012/main" xmlns:ahyp="http://schemas.microsoft.com/office/drawing/2018/hyperlinkcolor">
+<p:sld xmlns:a="http://schemas.openxmlformats.org/drawingml/2006/main" xmlns:r="http://schemas.openxmlformats.org/officeDocument/2006/relationships" xmlns:p="http://schemas.openxmlformats.org/presentationml/2006/main">
   <p:cSld>
     <p:spTree>
       <p:nvGrpSpPr>
-        <p:cNvPr id="73" name="Shape 73"/>
+        <p:cNvPr id="1" name="Shape 73"/>
         <p:cNvGrpSpPr/>
         <p:nvPr/>
       </p:nvGrpSpPr>
@@ -6986,7 +7135,9 @@
       <p:sp>
         <p:nvSpPr>
           <p:cNvPr id="74" name="Google Shape;74;p15"/>
-          <p:cNvSpPr txBox="1"/>
+          <p:cNvSpPr txBox="1">
+            <a:spLocks noGrp="1"/>
+          </p:cNvSpPr>
           <p:nvPr>
             <p:ph type="title"/>
           </p:nvPr>
@@ -7001,12 +7152,12 @@
           </a:prstGeom>
         </p:spPr>
         <p:txBody>
-          <a:bodyPr anchorCtr="0" anchor="b" bIns="91425" lIns="91425" spcFirstLastPara="1" rIns="91425" wrap="square" tIns="91425">
+          <a:bodyPr spcFirstLastPara="1" wrap="square" lIns="91425" tIns="91425" rIns="91425" bIns="91425" anchor="b" anchorCtr="0">
             <a:normAutofit fontScale="90000"/>
           </a:bodyPr>
           <a:lstStyle/>
           <a:p>
-            <a:pPr indent="0" lvl="0" marL="0" rtl="0" algn="l">
+            <a:pPr marL="0" lvl="0" indent="0" algn="l" rtl="0">
               <a:lnSpc>
                 <a:spcPct val="115000"/>
               </a:lnSpc>
@@ -7030,7 +7181,7 @@
             <a:endParaRPr/>
           </a:p>
           <a:p>
-            <a:pPr indent="0" lvl="0" marL="0" rtl="0" algn="l">
+            <a:pPr marL="0" lvl="0" indent="0" algn="l" rtl="0">
               <a:spcBef>
                 <a:spcPts val="0"/>
               </a:spcBef>
@@ -7039,9 +7190,6 @@
               </a:spcAft>
               <a:buNone/>
             </a:pPr>
-            <a:r>
-              <a:t/>
-            </a:r>
             <a:endParaRPr/>
           </a:p>
         </p:txBody>
@@ -7049,9 +7197,11 @@
       <p:sp>
         <p:nvSpPr>
           <p:cNvPr id="75" name="Google Shape;75;p15"/>
-          <p:cNvSpPr txBox="1"/>
+          <p:cNvSpPr txBox="1">
+            <a:spLocks noGrp="1"/>
+          </p:cNvSpPr>
           <p:nvPr>
-            <p:ph idx="1" type="body"/>
+            <p:ph type="body" idx="1"/>
           </p:nvPr>
         </p:nvSpPr>
         <p:spPr>
@@ -7064,12 +7214,12 @@
           </a:prstGeom>
         </p:spPr>
         <p:txBody>
-          <a:bodyPr anchorCtr="0" anchor="t" bIns="91425" lIns="91425" spcFirstLastPara="1" rIns="91425" wrap="square" tIns="91425">
+          <a:bodyPr spcFirstLastPara="1" wrap="square" lIns="91425" tIns="91425" rIns="91425" bIns="91425" anchor="t" anchorCtr="0">
             <a:noAutofit/>
           </a:bodyPr>
           <a:lstStyle/>
           <a:p>
-            <a:pPr indent="0" lvl="0" marL="0" rtl="0" algn="l">
+            <a:pPr marL="0" lvl="0" indent="0" algn="l" rtl="0">
               <a:lnSpc>
                 <a:spcPct val="95000"/>
               </a:lnSpc>
@@ -7093,7 +7243,7 @@
             <a:endParaRPr sz="1455"/>
           </a:p>
           <a:p>
-            <a:pPr indent="0" lvl="0" marL="0" rtl="0" algn="l">
+            <a:pPr marL="0" lvl="0" indent="0" algn="l" rtl="0">
               <a:lnSpc>
                 <a:spcPct val="95000"/>
               </a:lnSpc>
@@ -7117,7 +7267,7 @@
             <a:endParaRPr sz="1455"/>
           </a:p>
           <a:p>
-            <a:pPr indent="0" lvl="0" marL="0" rtl="0" algn="l">
+            <a:pPr marL="0" lvl="0" indent="0" algn="l" rtl="0">
               <a:lnSpc>
                 <a:spcPct val="95000"/>
               </a:lnSpc>
@@ -7141,7 +7291,7 @@
             <a:endParaRPr sz="1455"/>
           </a:p>
           <a:p>
-            <a:pPr indent="0" lvl="0" marL="0" rtl="0" algn="l">
+            <a:pPr marL="0" lvl="0" indent="0" algn="l" rtl="0">
               <a:lnSpc>
                 <a:spcPct val="95000"/>
               </a:lnSpc>
@@ -7165,7 +7315,7 @@
             <a:endParaRPr sz="1455"/>
           </a:p>
           <a:p>
-            <a:pPr indent="0" lvl="0" marL="0" rtl="0" algn="l">
+            <a:pPr marL="0" lvl="0" indent="0" algn="l" rtl="0">
               <a:lnSpc>
                 <a:spcPct val="95000"/>
               </a:lnSpc>
@@ -7189,7 +7339,7 @@
             <a:endParaRPr sz="1455"/>
           </a:p>
           <a:p>
-            <a:pPr indent="0" lvl="0" marL="0" rtl="0" algn="l">
+            <a:pPr marL="0" lvl="0" indent="0" algn="l" rtl="0">
               <a:lnSpc>
                 <a:spcPct val="95000"/>
               </a:lnSpc>
@@ -7213,7 +7363,7 @@
             <a:endParaRPr sz="1455"/>
           </a:p>
           <a:p>
-            <a:pPr indent="0" lvl="0" marL="0" rtl="0" algn="l">
+            <a:pPr marL="0" lvl="0" indent="0" algn="l" rtl="0">
               <a:lnSpc>
                 <a:spcPct val="95000"/>
               </a:lnSpc>
@@ -7237,7 +7387,7 @@
             <a:endParaRPr sz="1455"/>
           </a:p>
           <a:p>
-            <a:pPr indent="0" lvl="0" marL="0" rtl="0" algn="l">
+            <a:pPr marL="0" lvl="0" indent="0" algn="l" rtl="0">
               <a:lnSpc>
                 <a:spcPct val="95000"/>
               </a:lnSpc>
@@ -7261,7 +7411,7 @@
             <a:endParaRPr sz="1455"/>
           </a:p>
           <a:p>
-            <a:pPr indent="0" lvl="0" marL="0" rtl="0" algn="l">
+            <a:pPr marL="0" lvl="0" indent="0" algn="l" rtl="0">
               <a:lnSpc>
                 <a:spcPct val="95000"/>
               </a:lnSpc>
@@ -7285,7 +7435,7 @@
             <a:endParaRPr sz="1455"/>
           </a:p>
           <a:p>
-            <a:pPr indent="0" lvl="0" marL="0" rtl="0" algn="l">
+            <a:pPr marL="0" lvl="0" indent="0" algn="l" rtl="0">
               <a:lnSpc>
                 <a:spcPct val="95000"/>
               </a:lnSpc>
@@ -7309,7 +7459,7 @@
             <a:endParaRPr sz="1455"/>
           </a:p>
           <a:p>
-            <a:pPr indent="0" lvl="0" marL="0" rtl="0" algn="l">
+            <a:pPr marL="0" lvl="0" indent="0" algn="l" rtl="0">
               <a:lnSpc>
                 <a:spcPct val="95000"/>
               </a:lnSpc>
@@ -7333,7 +7483,7 @@
             <a:endParaRPr sz="1455"/>
           </a:p>
           <a:p>
-            <a:pPr indent="0" lvl="0" marL="0" rtl="0" algn="l">
+            <a:pPr marL="0" lvl="0" indent="0" algn="l" rtl="0">
               <a:lnSpc>
                 <a:spcPct val="95000"/>
               </a:lnSpc>
@@ -7346,9 +7496,6 @@
               <a:buSzPts val="523"/>
               <a:buNone/>
             </a:pPr>
-            <a:r>
-              <a:t/>
-            </a:r>
             <a:endParaRPr sz="1455"/>
           </a:p>
         </p:txBody>
@@ -7373,12 +7520,12 @@
           </a:ln>
         </p:spPr>
         <p:txBody>
-          <a:bodyPr anchorCtr="0" anchor="t" bIns="91425" lIns="91425" spcFirstLastPara="1" rIns="91425" wrap="square" tIns="91425">
+          <a:bodyPr spcFirstLastPara="1" wrap="square" lIns="91425" tIns="91425" rIns="91425" bIns="91425" anchor="t" anchorCtr="0">
             <a:noAutofit/>
           </a:bodyPr>
           <a:lstStyle/>
           <a:p>
-            <a:pPr indent="0" lvl="0" marL="0" rtl="0" algn="l">
+            <a:pPr marL="0" lvl="0" indent="0" algn="l" rtl="0">
               <a:spcBef>
                 <a:spcPts val="0"/>
               </a:spcBef>
@@ -7415,7 +7562,7 @@
             </a:endParaRPr>
           </a:p>
           <a:p>
-            <a:pPr indent="0" lvl="0" marL="0" rtl="0" algn="l">
+            <a:pPr marL="0" lvl="0" indent="0" algn="l" rtl="0">
               <a:spcBef>
                 <a:spcPts val="0"/>
               </a:spcBef>
@@ -7429,9 +7576,6 @@
               <a:buFont typeface="Arial"/>
               <a:buNone/>
             </a:pPr>
-            <a:r>
-              <a:t/>
-            </a:r>
             <a:endParaRPr sz="1800">
               <a:solidFill>
                 <a:schemeClr val="dk1"/>
@@ -7443,7 +7587,7 @@
             </a:endParaRPr>
           </a:p>
           <a:p>
-            <a:pPr indent="0" lvl="0" marL="0" rtl="0" algn="l">
+            <a:pPr marL="0" lvl="0" indent="0" algn="l" rtl="0">
               <a:spcBef>
                 <a:spcPts val="0"/>
               </a:spcBef>
@@ -7480,7 +7624,7 @@
             </a:endParaRPr>
           </a:p>
           <a:p>
-            <a:pPr indent="0" lvl="0" marL="0" rtl="0" algn="l">
+            <a:pPr marL="0" lvl="0" indent="0" algn="l" rtl="0">
               <a:spcBef>
                 <a:spcPts val="0"/>
               </a:spcBef>
@@ -7517,7 +7661,7 @@
             </a:endParaRPr>
           </a:p>
           <a:p>
-            <a:pPr indent="0" lvl="0" marL="0" rtl="0" algn="l">
+            <a:pPr marL="0" lvl="0" indent="0" algn="l" rtl="0">
               <a:spcBef>
                 <a:spcPts val="0"/>
               </a:spcBef>
@@ -7554,7 +7698,7 @@
             </a:endParaRPr>
           </a:p>
           <a:p>
-            <a:pPr indent="0" lvl="0" marL="0" rtl="0" algn="l">
+            <a:pPr marL="0" lvl="0" indent="0" algn="l" rtl="0">
               <a:spcBef>
                 <a:spcPts val="0"/>
               </a:spcBef>
@@ -7591,7 +7735,7 @@
             </a:endParaRPr>
           </a:p>
           <a:p>
-            <a:pPr indent="0" lvl="0" marL="0" rtl="0" algn="l">
+            <a:pPr marL="0" lvl="0" indent="0" algn="l" rtl="0">
               <a:spcBef>
                 <a:spcPts val="0"/>
               </a:spcBef>
@@ -7600,9 +7744,6 @@
               </a:spcAft>
               <a:buNone/>
             </a:pPr>
-            <a:r>
-              <a:t/>
-            </a:r>
             <a:endParaRPr sz="1800">
               <a:solidFill>
                 <a:schemeClr val="dk1"/>
@@ -7624,11 +7765,11 @@
 </file>
 
 <file path=ppt/slides/slide4.xml><?xml version="1.0" encoding="utf-8"?>
-<p:sld xmlns:a="http://schemas.openxmlformats.org/drawingml/2006/main" xmlns:r="http://schemas.openxmlformats.org/officeDocument/2006/relationships" xmlns:mc="http://schemas.openxmlformats.org/markup-compatibility/2006" xmlns:mv="urn:schemas-microsoft-com:mac:vml" xmlns:p="http://schemas.openxmlformats.org/presentationml/2006/main" xmlns:c="http://schemas.openxmlformats.org/drawingml/2006/chart" xmlns:dgm="http://schemas.openxmlformats.org/drawingml/2006/diagram" xmlns:o="urn:schemas-microsoft-com:office:office" xmlns:v="urn:schemas-microsoft-com:vml" xmlns:pvml="urn:schemas-microsoft-com:office:powerpoint" xmlns:com="http://schemas.openxmlformats.org/drawingml/2006/compatibility" xmlns:p14="http://schemas.microsoft.com/office/powerpoint/2010/main" xmlns:p15="http://schemas.microsoft.com/office/powerpoint/2012/main" xmlns:ahyp="http://schemas.microsoft.com/office/drawing/2018/hyperlinkcolor">
+<p:sld xmlns:a="http://schemas.openxmlformats.org/drawingml/2006/main" xmlns:r="http://schemas.openxmlformats.org/officeDocument/2006/relationships" xmlns:p="http://schemas.openxmlformats.org/presentationml/2006/main">
   <p:cSld>
     <p:spTree>
       <p:nvGrpSpPr>
-        <p:cNvPr id="80" name="Shape 80"/>
+        <p:cNvPr id="1" name="Shape 80"/>
         <p:cNvGrpSpPr/>
         <p:nvPr/>
       </p:nvGrpSpPr>
@@ -7643,7 +7784,9 @@
       <p:sp>
         <p:nvSpPr>
           <p:cNvPr id="81" name="Google Shape;81;p16"/>
-          <p:cNvSpPr txBox="1"/>
+          <p:cNvSpPr txBox="1">
+            <a:spLocks noGrp="1"/>
+          </p:cNvSpPr>
           <p:nvPr>
             <p:ph type="title"/>
           </p:nvPr>
@@ -7658,12 +7801,12 @@
           </a:prstGeom>
         </p:spPr>
         <p:txBody>
-          <a:bodyPr anchorCtr="0" anchor="b" bIns="91425" lIns="91425" spcFirstLastPara="1" rIns="91425" wrap="square" tIns="91425">
+          <a:bodyPr spcFirstLastPara="1" wrap="square" lIns="91425" tIns="91425" rIns="91425" bIns="91425" anchor="b" anchorCtr="0">
             <a:normAutofit fontScale="90000"/>
           </a:bodyPr>
           <a:lstStyle/>
           <a:p>
-            <a:pPr indent="0" lvl="0" marL="0" rtl="0" algn="l">
+            <a:pPr marL="0" lvl="0" indent="0" algn="l" rtl="0">
               <a:lnSpc>
                 <a:spcPct val="115000"/>
               </a:lnSpc>
@@ -7682,7 +7825,7 @@
             <a:endParaRPr/>
           </a:p>
           <a:p>
-            <a:pPr indent="0" lvl="0" marL="0" rtl="0" algn="l">
+            <a:pPr marL="0" lvl="0" indent="0" algn="l" rtl="0">
               <a:spcBef>
                 <a:spcPts val="0"/>
               </a:spcBef>
@@ -7691,9 +7834,6 @@
               </a:spcAft>
               <a:buNone/>
             </a:pPr>
-            <a:r>
-              <a:t/>
-            </a:r>
             <a:endParaRPr/>
           </a:p>
         </p:txBody>
@@ -7701,9 +7841,11 @@
       <p:sp>
         <p:nvSpPr>
           <p:cNvPr id="82" name="Google Shape;82;p16"/>
-          <p:cNvSpPr txBox="1"/>
+          <p:cNvSpPr txBox="1">
+            <a:spLocks noGrp="1"/>
+          </p:cNvSpPr>
           <p:nvPr>
-            <p:ph idx="1" type="body"/>
+            <p:ph type="body" idx="1"/>
           </p:nvPr>
         </p:nvSpPr>
         <p:spPr>
@@ -7716,12 +7858,12 @@
           </a:prstGeom>
         </p:spPr>
         <p:txBody>
-          <a:bodyPr anchorCtr="0" anchor="t" bIns="91425" lIns="91425" spcFirstLastPara="1" rIns="91425" wrap="square" tIns="91425">
+          <a:bodyPr spcFirstLastPara="1" wrap="square" lIns="91425" tIns="91425" rIns="91425" bIns="91425" anchor="t" anchorCtr="0">
             <a:normAutofit/>
           </a:bodyPr>
           <a:lstStyle/>
           <a:p>
-            <a:pPr indent="0" lvl="0" marL="0" rtl="0" algn="l">
+            <a:pPr marL="0" lvl="0" indent="0" algn="l" rtl="0">
               <a:spcBef>
                 <a:spcPts val="0"/>
               </a:spcBef>
@@ -7730,67 +7872,68 @@
               </a:spcAft>
               <a:buNone/>
             </a:pPr>
-            <a:r>
-              <a:t/>
-            </a:r>
             <a:endParaRPr/>
           </a:p>
         </p:txBody>
       </p:sp>
       <p:pic>
         <p:nvPicPr>
-          <p:cNvPr id="83" name="Google Shape;83;p16"/>
-          <p:cNvPicPr preferRelativeResize="0"/>
+          <p:cNvPr id="3" name="Picture 2">
+            <a:extLst>
+              <a:ext uri="{FF2B5EF4-FFF2-40B4-BE49-F238E27FC236}">
+                <a16:creationId xmlns:a16="http://schemas.microsoft.com/office/drawing/2014/main" id="{4A08FF56-9633-A182-656A-5D9EBD44A495}"/>
+              </a:ext>
+            </a:extLst>
+          </p:cNvPr>
+          <p:cNvPicPr>
+            <a:picLocks noChangeAspect="1"/>
+          </p:cNvPicPr>
           <p:nvPr/>
         </p:nvPicPr>
         <p:blipFill>
-          <a:blip r:embed="rId3">
-            <a:alphaModFix/>
-          </a:blip>
+          <a:blip r:embed="rId3"/>
           <a:stretch>
             <a:fillRect/>
           </a:stretch>
         </p:blipFill>
         <p:spPr>
           <a:xfrm>
-            <a:off x="185225" y="1225225"/>
-            <a:ext cx="6998574" cy="1501825"/>
+            <a:off x="311700" y="1029270"/>
+            <a:ext cx="8453682" cy="1346120"/>
           </a:xfrm>
           <a:prstGeom prst="rect">
             <a:avLst/>
           </a:prstGeom>
-          <a:noFill/>
-          <a:ln>
-            <a:noFill/>
-          </a:ln>
         </p:spPr>
       </p:pic>
       <p:pic>
         <p:nvPicPr>
-          <p:cNvPr id="84" name="Google Shape;84;p16"/>
-          <p:cNvPicPr preferRelativeResize="0"/>
+          <p:cNvPr id="5" name="Picture 4">
+            <a:extLst>
+              <a:ext uri="{FF2B5EF4-FFF2-40B4-BE49-F238E27FC236}">
+                <a16:creationId xmlns:a16="http://schemas.microsoft.com/office/drawing/2014/main" id="{BABEB271-061D-D908-4606-4C67335C775E}"/>
+              </a:ext>
+            </a:extLst>
+          </p:cNvPr>
+          <p:cNvPicPr>
+            <a:picLocks noChangeAspect="1"/>
+          </p:cNvPicPr>
           <p:nvPr/>
         </p:nvPicPr>
         <p:blipFill>
-          <a:blip r:embed="rId4">
-            <a:alphaModFix/>
-          </a:blip>
+          <a:blip r:embed="rId4"/>
           <a:stretch>
             <a:fillRect/>
           </a:stretch>
         </p:blipFill>
         <p:spPr>
           <a:xfrm>
-            <a:off x="2659600" y="2898032"/>
-            <a:ext cx="6064400" cy="1280600"/>
+            <a:off x="311700" y="2898033"/>
+            <a:ext cx="8453681" cy="1621311"/>
           </a:xfrm>
           <a:prstGeom prst="rect">
             <a:avLst/>
           </a:prstGeom>
-          <a:noFill/>
-          <a:ln>
-            <a:noFill/>
-          </a:ln>
         </p:spPr>
       </p:pic>
     </p:spTree>
@@ -7802,11 +7945,11 @@
 </file>
 
 <file path=ppt/slides/slide5.xml><?xml version="1.0" encoding="utf-8"?>
-<p:sld xmlns:a="http://schemas.openxmlformats.org/drawingml/2006/main" xmlns:r="http://schemas.openxmlformats.org/officeDocument/2006/relationships" xmlns:mc="http://schemas.openxmlformats.org/markup-compatibility/2006" xmlns:mv="urn:schemas-microsoft-com:mac:vml" xmlns:p="http://schemas.openxmlformats.org/presentationml/2006/main" xmlns:c="http://schemas.openxmlformats.org/drawingml/2006/chart" xmlns:dgm="http://schemas.openxmlformats.org/drawingml/2006/diagram" xmlns:o="urn:schemas-microsoft-com:office:office" xmlns:v="urn:schemas-microsoft-com:vml" xmlns:pvml="urn:schemas-microsoft-com:office:powerpoint" xmlns:com="http://schemas.openxmlformats.org/drawingml/2006/compatibility" xmlns:p14="http://schemas.microsoft.com/office/powerpoint/2010/main" xmlns:p15="http://schemas.microsoft.com/office/powerpoint/2012/main" xmlns:ahyp="http://schemas.microsoft.com/office/drawing/2018/hyperlinkcolor">
+<p:sld xmlns:a="http://schemas.openxmlformats.org/drawingml/2006/main" xmlns:r="http://schemas.openxmlformats.org/officeDocument/2006/relationships" xmlns:p="http://schemas.openxmlformats.org/presentationml/2006/main">
   <p:cSld>
     <p:spTree>
       <p:nvGrpSpPr>
-        <p:cNvPr id="88" name="Shape 88"/>
+        <p:cNvPr id="1" name="Shape 88"/>
         <p:cNvGrpSpPr/>
         <p:nvPr/>
       </p:nvGrpSpPr>
@@ -7821,7 +7964,9 @@
       <p:sp>
         <p:nvSpPr>
           <p:cNvPr id="89" name="Google Shape;89;p17"/>
-          <p:cNvSpPr txBox="1"/>
+          <p:cNvSpPr txBox="1">
+            <a:spLocks noGrp="1"/>
+          </p:cNvSpPr>
           <p:nvPr>
             <p:ph type="title"/>
           </p:nvPr>
@@ -7836,12 +7981,12 @@
           </a:prstGeom>
         </p:spPr>
         <p:txBody>
-          <a:bodyPr anchorCtr="0" anchor="b" bIns="91425" lIns="91425" spcFirstLastPara="1" rIns="91425" wrap="square" tIns="91425">
+          <a:bodyPr spcFirstLastPara="1" wrap="square" lIns="91425" tIns="91425" rIns="91425" bIns="91425" anchor="b" anchorCtr="0">
             <a:normAutofit/>
           </a:bodyPr>
           <a:lstStyle/>
           <a:p>
-            <a:pPr indent="0" lvl="0" marL="0" rtl="0" algn="l">
+            <a:pPr marL="0" lvl="0" indent="0" algn="l" rtl="0">
               <a:spcBef>
                 <a:spcPts val="0"/>
               </a:spcBef>
@@ -7861,9 +8006,11 @@
       <p:sp>
         <p:nvSpPr>
           <p:cNvPr id="90" name="Google Shape;90;p17"/>
-          <p:cNvSpPr txBox="1"/>
+          <p:cNvSpPr txBox="1">
+            <a:spLocks noGrp="1"/>
+          </p:cNvSpPr>
           <p:nvPr>
-            <p:ph idx="1" type="body"/>
+            <p:ph type="body" idx="1"/>
           </p:nvPr>
         </p:nvSpPr>
         <p:spPr>
@@ -7876,12 +8023,12 @@
           </a:prstGeom>
         </p:spPr>
         <p:txBody>
-          <a:bodyPr anchorCtr="0" anchor="t" bIns="91425" lIns="91425" spcFirstLastPara="1" rIns="91425" wrap="square" tIns="91425">
+          <a:bodyPr spcFirstLastPara="1" wrap="square" lIns="91425" tIns="91425" rIns="91425" bIns="91425" anchor="t" anchorCtr="0">
             <a:noAutofit/>
           </a:bodyPr>
           <a:lstStyle/>
           <a:p>
-            <a:pPr indent="0" lvl="0" marL="0" rtl="0" algn="l">
+            <a:pPr marL="0" lvl="0" indent="0" algn="l" rtl="0">
               <a:spcBef>
                 <a:spcPts val="0"/>
               </a:spcBef>
@@ -7896,7 +8043,7 @@
               <a:buNone/>
             </a:pPr>
             <a:r>
-              <a:rPr lang="fr" sz="1600">
+              <a:rPr lang="fr" sz="1600" dirty="0">
                 <a:latin typeface="Arial"/>
                 <a:ea typeface="Arial"/>
                 <a:cs typeface="Arial"/>
@@ -7904,7 +8051,7 @@
               </a:rPr>
               <a:t>The system successfully implements a complete RAG pipeline.</a:t>
             </a:r>
-            <a:endParaRPr sz="1600">
+            <a:endParaRPr sz="1600" dirty="0">
               <a:latin typeface="Arial"/>
               <a:ea typeface="Arial"/>
               <a:cs typeface="Arial"/>
@@ -7912,7 +8059,7 @@
             </a:endParaRPr>
           </a:p>
           <a:p>
-            <a:pPr indent="0" lvl="0" marL="0" rtl="0" algn="l">
+            <a:pPr marL="0" lvl="0" indent="0" algn="l" rtl="0">
               <a:spcBef>
                 <a:spcPts val="0"/>
               </a:spcBef>
@@ -7926,10 +8073,7 @@
               <a:buFont typeface="Arial"/>
               <a:buNone/>
             </a:pPr>
-            <a:r>
-              <a:t/>
-            </a:r>
-            <a:endParaRPr sz="1600">
+            <a:endParaRPr sz="1600" dirty="0">
               <a:latin typeface="Arial"/>
               <a:ea typeface="Arial"/>
               <a:cs typeface="Arial"/>
@@ -7937,7 +8081,7 @@
             </a:endParaRPr>
           </a:p>
           <a:p>
-            <a:pPr indent="0" lvl="0" marL="0" rtl="0" algn="l">
+            <a:pPr marL="0" lvl="0" indent="0" algn="l" rtl="0">
               <a:spcBef>
                 <a:spcPts val="0"/>
               </a:spcBef>
@@ -7952,7 +8096,7 @@
               <a:buNone/>
             </a:pPr>
             <a:r>
-              <a:rPr lang="fr" sz="1600">
+              <a:rPr lang="fr" sz="1600" dirty="0">
                 <a:latin typeface="Arial"/>
                 <a:ea typeface="Arial"/>
                 <a:cs typeface="Arial"/>
@@ -7960,7 +8104,7 @@
               </a:rPr>
               <a:t>Results:</a:t>
             </a:r>
-            <a:endParaRPr sz="1600">
+            <a:endParaRPr sz="1600" dirty="0">
               <a:latin typeface="Arial"/>
               <a:ea typeface="Arial"/>
               <a:cs typeface="Arial"/>
@@ -7968,7 +8112,7 @@
             </a:endParaRPr>
           </a:p>
           <a:p>
-            <a:pPr indent="0" lvl="0" marL="0" rtl="0" algn="l">
+            <a:pPr marL="0" lvl="0" indent="0" algn="l" rtl="0">
               <a:spcBef>
                 <a:spcPts val="0"/>
               </a:spcBef>
@@ -7982,10 +8126,7 @@
               <a:buFont typeface="Arial"/>
               <a:buNone/>
             </a:pPr>
-            <a:r>
-              <a:t/>
-            </a:r>
-            <a:endParaRPr sz="1600">
+            <a:endParaRPr sz="1600" dirty="0">
               <a:latin typeface="Arial"/>
               <a:ea typeface="Arial"/>
               <a:cs typeface="Arial"/>
@@ -7993,7 +8134,7 @@
             </a:endParaRPr>
           </a:p>
           <a:p>
-            <a:pPr indent="0" lvl="0" marL="0" rtl="0" algn="l">
+            <a:pPr marL="0" lvl="0" indent="0" algn="l" rtl="0">
               <a:spcBef>
                 <a:spcPts val="0"/>
               </a:spcBef>
@@ -8008,7 +8149,7 @@
               <a:buNone/>
             </a:pPr>
             <a:r>
-              <a:rPr lang="fr" sz="1600">
+              <a:rPr lang="fr" sz="1600" dirty="0">
                 <a:latin typeface="Arial"/>
                 <a:ea typeface="Arial"/>
                 <a:cs typeface="Arial"/>
@@ -8016,7 +8157,7 @@
               </a:rPr>
               <a:t>• Relevant information is retrieved from the document</a:t>
             </a:r>
-            <a:endParaRPr sz="1600">
+            <a:endParaRPr sz="1600" dirty="0">
               <a:latin typeface="Arial"/>
               <a:ea typeface="Arial"/>
               <a:cs typeface="Arial"/>
@@ -8024,7 +8165,7 @@
             </a:endParaRPr>
           </a:p>
           <a:p>
-            <a:pPr indent="0" lvl="0" marL="0" rtl="0" algn="l">
+            <a:pPr marL="0" lvl="0" indent="0" algn="l" rtl="0">
               <a:spcBef>
                 <a:spcPts val="0"/>
               </a:spcBef>
@@ -8039,7 +8180,7 @@
               <a:buNone/>
             </a:pPr>
             <a:r>
-              <a:rPr lang="fr" sz="1600">
+              <a:rPr lang="fr" sz="1600" dirty="0">
                 <a:latin typeface="Arial"/>
                 <a:ea typeface="Arial"/>
                 <a:cs typeface="Arial"/>
@@ -8047,7 +8188,7 @@
               </a:rPr>
               <a:t>• The language model generates contextual answers</a:t>
             </a:r>
-            <a:endParaRPr sz="1600">
+            <a:endParaRPr sz="1600" dirty="0">
               <a:latin typeface="Arial"/>
               <a:ea typeface="Arial"/>
               <a:cs typeface="Arial"/>
@@ -8055,7 +8196,7 @@
             </a:endParaRPr>
           </a:p>
           <a:p>
-            <a:pPr indent="0" lvl="0" marL="0" rtl="0" algn="l">
+            <a:pPr marL="0" lvl="0" indent="0" algn="l" rtl="0">
               <a:spcBef>
                 <a:spcPts val="0"/>
               </a:spcBef>
@@ -8070,7 +8211,7 @@
               <a:buNone/>
             </a:pPr>
             <a:r>
-              <a:rPr lang="fr" sz="1600">
+              <a:rPr lang="fr" sz="1600" dirty="0">
                 <a:latin typeface="Arial"/>
                 <a:ea typeface="Arial"/>
                 <a:cs typeface="Arial"/>
@@ -8078,7 +8219,7 @@
               </a:rPr>
               <a:t>• The system works efficiently using ChromaDB</a:t>
             </a:r>
-            <a:endParaRPr sz="1600">
+            <a:endParaRPr sz="1600" dirty="0">
               <a:latin typeface="Arial"/>
               <a:ea typeface="Arial"/>
               <a:cs typeface="Arial"/>
@@ -8086,7 +8227,7 @@
             </a:endParaRPr>
           </a:p>
           <a:p>
-            <a:pPr indent="0" lvl="0" marL="0" rtl="0" algn="l">
+            <a:pPr marL="0" lvl="0" indent="0" algn="l" rtl="0">
               <a:spcBef>
                 <a:spcPts val="0"/>
               </a:spcBef>
@@ -8100,10 +8241,7 @@
               <a:buFont typeface="Arial"/>
               <a:buNone/>
             </a:pPr>
-            <a:r>
-              <a:t/>
-            </a:r>
-            <a:endParaRPr sz="1600">
+            <a:endParaRPr sz="1600" dirty="0">
               <a:latin typeface="Arial"/>
               <a:ea typeface="Arial"/>
               <a:cs typeface="Arial"/>
@@ -8111,7 +8249,7 @@
             </a:endParaRPr>
           </a:p>
           <a:p>
-            <a:pPr indent="0" lvl="0" marL="0" rtl="0" algn="l">
+            <a:pPr marL="0" lvl="0" indent="0" algn="l" rtl="0">
               <a:spcBef>
                 <a:spcPts val="0"/>
               </a:spcBef>
@@ -8126,7 +8264,7 @@
               <a:buNone/>
             </a:pPr>
             <a:r>
-              <a:rPr lang="fr" sz="1600">
+              <a:rPr lang="fr" sz="1600" dirty="0">
                 <a:latin typeface="Arial"/>
                 <a:ea typeface="Arial"/>
                 <a:cs typeface="Arial"/>
@@ -8134,7 +8272,7 @@
               </a:rPr>
               <a:t>Future improvements:</a:t>
             </a:r>
-            <a:endParaRPr sz="1600">
+            <a:endParaRPr sz="1600" dirty="0">
               <a:latin typeface="Arial"/>
               <a:ea typeface="Arial"/>
               <a:cs typeface="Arial"/>
@@ -8142,7 +8280,7 @@
             </a:endParaRPr>
           </a:p>
           <a:p>
-            <a:pPr indent="0" lvl="0" marL="0" rtl="0" algn="l">
+            <a:pPr marL="0" lvl="0" indent="0" algn="l" rtl="0">
               <a:spcBef>
                 <a:spcPts val="0"/>
               </a:spcBef>
@@ -8156,10 +8294,7 @@
               <a:buFont typeface="Arial"/>
               <a:buNone/>
             </a:pPr>
-            <a:r>
-              <a:t/>
-            </a:r>
-            <a:endParaRPr sz="1600">
+            <a:endParaRPr sz="1600" dirty="0">
               <a:latin typeface="Arial"/>
               <a:ea typeface="Arial"/>
               <a:cs typeface="Arial"/>
@@ -8167,7 +8302,7 @@
             </a:endParaRPr>
           </a:p>
           <a:p>
-            <a:pPr indent="0" lvl="0" marL="0" rtl="0" algn="l">
+            <a:pPr marL="0" lvl="0" indent="0" algn="l" rtl="0">
               <a:spcBef>
                 <a:spcPts val="0"/>
               </a:spcBef>
@@ -8182,7 +8317,7 @@
               <a:buNone/>
             </a:pPr>
             <a:r>
-              <a:rPr lang="fr" sz="1600">
+              <a:rPr lang="fr" sz="1600" dirty="0">
                 <a:latin typeface="Arial"/>
                 <a:ea typeface="Arial"/>
                 <a:cs typeface="Arial"/>
@@ -8190,7 +8325,7 @@
               </a:rPr>
               <a:t>• Use a larger dataset</a:t>
             </a:r>
-            <a:endParaRPr sz="1600">
+            <a:endParaRPr sz="1600" dirty="0">
               <a:latin typeface="Arial"/>
               <a:ea typeface="Arial"/>
               <a:cs typeface="Arial"/>
@@ -8198,7 +8333,7 @@
             </a:endParaRPr>
           </a:p>
           <a:p>
-            <a:pPr indent="0" lvl="0" marL="0" rtl="0" algn="l">
+            <a:pPr marL="0" lvl="0" indent="0" algn="l" rtl="0">
               <a:spcBef>
                 <a:spcPts val="0"/>
               </a:spcBef>
@@ -8213,7 +8348,7 @@
               <a:buNone/>
             </a:pPr>
             <a:r>
-              <a:rPr lang="fr" sz="1600">
+              <a:rPr lang="fr" sz="1600" dirty="0">
                 <a:latin typeface="Arial"/>
                 <a:ea typeface="Arial"/>
                 <a:cs typeface="Arial"/>
@@ -8221,7 +8356,7 @@
               </a:rPr>
               <a:t>• Test different language models</a:t>
             </a:r>
-            <a:endParaRPr sz="1600">
+            <a:endParaRPr sz="1600" dirty="0">
               <a:latin typeface="Arial"/>
               <a:ea typeface="Arial"/>
               <a:cs typeface="Arial"/>
@@ -8229,7 +8364,7 @@
             </a:endParaRPr>
           </a:p>
           <a:p>
-            <a:pPr indent="0" lvl="0" marL="0" rtl="0" algn="l">
+            <a:pPr marL="0" lvl="0" indent="0" algn="l" rtl="0">
               <a:spcBef>
                 <a:spcPts val="0"/>
               </a:spcBef>
@@ -8238,25 +8373,7 @@
               </a:spcAft>
               <a:buNone/>
             </a:pPr>
-            <a:r>
-              <a:rPr lang="fr" sz="1600">
-                <a:latin typeface="Arial"/>
-                <a:ea typeface="Arial"/>
-                <a:cs typeface="Arial"/>
-                <a:sym typeface="Arial"/>
-              </a:rPr>
-              <a:t>• Build a web interfac</a:t>
-            </a:r>
-            <a:r>
-              <a:rPr lang="fr" sz="1600">
-                <a:latin typeface="Arial"/>
-                <a:ea typeface="Arial"/>
-                <a:cs typeface="Arial"/>
-                <a:sym typeface="Arial"/>
-              </a:rPr>
-              <a:t>e</a:t>
-            </a:r>
-            <a:endParaRPr sz="2300"/>
+            <a:endParaRPr sz="2300" dirty="0"/>
           </a:p>
         </p:txBody>
       </p:sp>
@@ -8269,7 +8386,288 @@
 </file>
 
 <file path=ppt/theme/theme1.xml><?xml version="1.0" encoding="utf-8"?>
-<a:theme xmlns:a="http://schemas.openxmlformats.org/drawingml/2006/main" xmlns:r="http://schemas.openxmlformats.org/officeDocument/2006/relationships">
+<a:theme xmlns:a="http://schemas.openxmlformats.org/drawingml/2006/main" name="Luxe">
+  <a:themeElements>
+    <a:clrScheme name="Luxe">
+      <a:dk1>
+        <a:srgbClr val="000000"/>
+      </a:dk1>
+      <a:lt1>
+        <a:srgbClr val="FFFFFF"/>
+      </a:lt1>
+      <a:dk2>
+        <a:srgbClr val="B7B7B7"/>
+      </a:dk2>
+      <a:lt2>
+        <a:srgbClr val="CCA677"/>
+      </a:lt2>
+      <a:accent1>
+        <a:srgbClr val="5D4037"/>
+      </a:accent1>
+      <a:accent2>
+        <a:srgbClr val="455A64"/>
+      </a:accent2>
+      <a:accent3>
+        <a:srgbClr val="57BB8A"/>
+      </a:accent3>
+      <a:accent4>
+        <a:srgbClr val="78909C"/>
+      </a:accent4>
+      <a:accent5>
+        <a:srgbClr val="607D8B"/>
+      </a:accent5>
+      <a:accent6>
+        <a:srgbClr val="DCE755"/>
+      </a:accent6>
+      <a:hlink>
+        <a:srgbClr val="607D8B"/>
+      </a:hlink>
+      <a:folHlink>
+        <a:srgbClr val="607D8B"/>
+      </a:folHlink>
+    </a:clrScheme>
+    <a:fontScheme name="Office">
+      <a:majorFont>
+        <a:latin typeface="Arial"/>
+        <a:ea typeface=""/>
+        <a:cs typeface=""/>
+        <a:font script="Jpan" typeface="ＭＳ Ｐゴシック"/>
+        <a:font script="Hang" typeface="맑은 고딕"/>
+        <a:font script="Hans" typeface="宋体"/>
+        <a:font script="Hant" typeface="新細明體"/>
+        <a:font script="Arab" typeface="Times New Roman"/>
+        <a:font script="Hebr" typeface="Times New Roman"/>
+        <a:font script="Thai" typeface="Angsana New"/>
+        <a:font script="Ethi" typeface="Nyala"/>
+        <a:font script="Beng" typeface="Vrinda"/>
+        <a:font script="Gujr" typeface="Shruti"/>
+        <a:font script="Khmr" typeface="MoolBoran"/>
+        <a:font script="Knda" typeface="Tunga"/>
+        <a:font script="Guru" typeface="Raavi"/>
+        <a:font script="Cans" typeface="Euphemia"/>
+        <a:font script="Cher" typeface="Plantagenet Cherokee"/>
+        <a:font script="Yiii" typeface="Microsoft Yi Baiti"/>
+        <a:font script="Tibt" typeface="Microsoft Himalaya"/>
+        <a:font script="Thaa" typeface="MV Boli"/>
+        <a:font script="Deva" typeface="Mangal"/>
+        <a:font script="Telu" typeface="Gautami"/>
+        <a:font script="Taml" typeface="Latha"/>
+        <a:font script="Syrc" typeface="Estrangelo Edessa"/>
+        <a:font script="Orya" typeface="Kalinga"/>
+        <a:font script="Mlym" typeface="Kartika"/>
+        <a:font script="Laoo" typeface="DokChampa"/>
+        <a:font script="Sinh" typeface="Iskoola Pota"/>
+        <a:font script="Mong" typeface="Mongolian Baiti"/>
+        <a:font script="Viet" typeface="Times New Roman"/>
+        <a:font script="Uigh" typeface="Microsoft Uighur"/>
+        <a:font script="Geor" typeface="Sylfaen"/>
+      </a:majorFont>
+      <a:minorFont>
+        <a:latin typeface="Arial"/>
+        <a:ea typeface=""/>
+        <a:cs typeface=""/>
+        <a:font script="Jpan" typeface="ＭＳ Ｐゴシック"/>
+        <a:font script="Hang" typeface="맑은 고딕"/>
+        <a:font script="Hans" typeface="宋体"/>
+        <a:font script="Hant" typeface="新細明體"/>
+        <a:font script="Arab" typeface="Arial"/>
+        <a:font script="Hebr" typeface="Arial"/>
+        <a:font script="Thai" typeface="Cordia New"/>
+        <a:font script="Ethi" typeface="Nyala"/>
+        <a:font script="Beng" typeface="Vrinda"/>
+        <a:font script="Gujr" typeface="Shruti"/>
+        <a:font script="Khmr" typeface="DaunPenh"/>
+        <a:font script="Knda" typeface="Tunga"/>
+        <a:font script="Guru" typeface="Raavi"/>
+        <a:font script="Cans" typeface="Euphemia"/>
+        <a:font script="Cher" typeface="Plantagenet Cherokee"/>
+        <a:font script="Yiii" typeface="Microsoft Yi Baiti"/>
+        <a:font script="Tibt" typeface="Microsoft Himalaya"/>
+        <a:font script="Thaa" typeface="MV Boli"/>
+        <a:font script="Deva" typeface="Mangal"/>
+        <a:font script="Telu" typeface="Gautami"/>
+        <a:font script="Taml" typeface="Latha"/>
+        <a:font script="Syrc" typeface="Estrangelo Edessa"/>
+        <a:font script="Orya" typeface="Kalinga"/>
+        <a:font script="Mlym" typeface="Kartika"/>
+        <a:font script="Laoo" typeface="DokChampa"/>
+        <a:font script="Sinh" typeface="Iskoola Pota"/>
+        <a:font script="Mong" typeface="Mongolian Baiti"/>
+        <a:font script="Viet" typeface="Arial"/>
+        <a:font script="Uigh" typeface="Microsoft Uighur"/>
+        <a:font script="Geor" typeface="Sylfaen"/>
+      </a:minorFont>
+    </a:fontScheme>
+    <a:fmtScheme name="Office">
+      <a:fillStyleLst>
+        <a:solidFill>
+          <a:schemeClr val="phClr"/>
+        </a:solidFill>
+        <a:gradFill rotWithShape="1">
+          <a:gsLst>
+            <a:gs pos="0">
+              <a:schemeClr val="phClr">
+                <a:tint val="50000"/>
+                <a:satMod val="300000"/>
+              </a:schemeClr>
+            </a:gs>
+            <a:gs pos="35000">
+              <a:schemeClr val="phClr">
+                <a:tint val="37000"/>
+                <a:satMod val="300000"/>
+              </a:schemeClr>
+            </a:gs>
+            <a:gs pos="100000">
+              <a:schemeClr val="phClr">
+                <a:tint val="15000"/>
+                <a:satMod val="350000"/>
+              </a:schemeClr>
+            </a:gs>
+          </a:gsLst>
+          <a:lin ang="16200000" scaled="1"/>
+        </a:gradFill>
+        <a:gradFill rotWithShape="1">
+          <a:gsLst>
+            <a:gs pos="0">
+              <a:schemeClr val="phClr">
+                <a:tint val="100000"/>
+                <a:shade val="100000"/>
+                <a:satMod val="130000"/>
+              </a:schemeClr>
+            </a:gs>
+            <a:gs pos="100000">
+              <a:schemeClr val="phClr">
+                <a:tint val="50000"/>
+                <a:shade val="100000"/>
+                <a:satMod val="350000"/>
+              </a:schemeClr>
+            </a:gs>
+          </a:gsLst>
+          <a:lin ang="16200000" scaled="0"/>
+        </a:gradFill>
+      </a:fillStyleLst>
+      <a:lnStyleLst>
+        <a:ln w="9525" cap="flat" cmpd="sng" algn="ctr">
+          <a:solidFill>
+            <a:schemeClr val="phClr">
+              <a:shade val="95000"/>
+              <a:satMod val="105000"/>
+            </a:schemeClr>
+          </a:solidFill>
+          <a:prstDash val="solid"/>
+        </a:ln>
+        <a:ln w="25400" cap="flat" cmpd="sng" algn="ctr">
+          <a:solidFill>
+            <a:schemeClr val="phClr"/>
+          </a:solidFill>
+          <a:prstDash val="solid"/>
+        </a:ln>
+        <a:ln w="38100" cap="flat" cmpd="sng" algn="ctr">
+          <a:solidFill>
+            <a:schemeClr val="phClr"/>
+          </a:solidFill>
+          <a:prstDash val="solid"/>
+        </a:ln>
+      </a:lnStyleLst>
+      <a:effectStyleLst>
+        <a:effectStyle>
+          <a:effectLst>
+            <a:outerShdw blurRad="40000" dist="20000" dir="5400000" rotWithShape="0">
+              <a:srgbClr val="000000">
+                <a:alpha val="38000"/>
+              </a:srgbClr>
+            </a:outerShdw>
+          </a:effectLst>
+        </a:effectStyle>
+        <a:effectStyle>
+          <a:effectLst>
+            <a:outerShdw blurRad="40000" dist="23000" dir="5400000" rotWithShape="0">
+              <a:srgbClr val="000000">
+                <a:alpha val="35000"/>
+              </a:srgbClr>
+            </a:outerShdw>
+          </a:effectLst>
+        </a:effectStyle>
+        <a:effectStyle>
+          <a:effectLst>
+            <a:outerShdw blurRad="40000" dist="23000" dir="5400000" rotWithShape="0">
+              <a:srgbClr val="000000">
+                <a:alpha val="35000"/>
+              </a:srgbClr>
+            </a:outerShdw>
+          </a:effectLst>
+          <a:scene3d>
+            <a:camera prst="orthographicFront">
+              <a:rot lat="0" lon="0" rev="0"/>
+            </a:camera>
+            <a:lightRig rig="threePt" dir="t">
+              <a:rot lat="0" lon="0" rev="1200000"/>
+            </a:lightRig>
+          </a:scene3d>
+          <a:sp3d>
+            <a:bevelT w="63500" h="25400"/>
+          </a:sp3d>
+        </a:effectStyle>
+      </a:effectStyleLst>
+      <a:bgFillStyleLst>
+        <a:solidFill>
+          <a:schemeClr val="phClr"/>
+        </a:solidFill>
+        <a:gradFill rotWithShape="1">
+          <a:gsLst>
+            <a:gs pos="0">
+              <a:schemeClr val="phClr">
+                <a:tint val="40000"/>
+                <a:satMod val="350000"/>
+              </a:schemeClr>
+            </a:gs>
+            <a:gs pos="40000">
+              <a:schemeClr val="phClr">
+                <a:tint val="45000"/>
+                <a:shade val="99000"/>
+                <a:satMod val="350000"/>
+              </a:schemeClr>
+            </a:gs>
+            <a:gs pos="100000">
+              <a:schemeClr val="phClr">
+                <a:shade val="20000"/>
+                <a:satMod val="255000"/>
+              </a:schemeClr>
+            </a:gs>
+          </a:gsLst>
+          <a:path path="circle">
+            <a:fillToRect l="50000" t="-80000" r="50000" b="180000"/>
+          </a:path>
+        </a:gradFill>
+        <a:gradFill rotWithShape="1">
+          <a:gsLst>
+            <a:gs pos="0">
+              <a:schemeClr val="phClr">
+                <a:tint val="80000"/>
+                <a:satMod val="300000"/>
+              </a:schemeClr>
+            </a:gs>
+            <a:gs pos="100000">
+              <a:schemeClr val="phClr">
+                <a:shade val="30000"/>
+                <a:satMod val="200000"/>
+              </a:schemeClr>
+            </a:gs>
+          </a:gsLst>
+          <a:path path="circle">
+            <a:fillToRect l="50000" t="50000" r="50000" b="50000"/>
+          </a:path>
+        </a:gradFill>
+      </a:bgFillStyleLst>
+    </a:fmtScheme>
+  </a:themeElements>
+  <a:objectDefaults/>
+  <a:extraClrSchemeLst/>
+</a:theme>
+</file>
+
+<file path=ppt/theme/theme2.xml><?xml version="1.0" encoding="utf-8"?>
+<a:theme xmlns:a="http://schemas.openxmlformats.org/drawingml/2006/main">
   <a:themeElements>
     <a:clrScheme name="Default">
       <a:dk1>
@@ -8544,284 +8942,7 @@
       </a:bgFillStyleLst>
     </a:fmtScheme>
   </a:themeElements>
-</a:theme>
-</file>
-
-<file path=ppt/theme/theme2.xml><?xml version="1.0" encoding="utf-8"?>
-<a:theme xmlns:a="http://schemas.openxmlformats.org/drawingml/2006/main" xmlns:r="http://schemas.openxmlformats.org/officeDocument/2006/relationships" name="Luxe">
-  <a:themeElements>
-    <a:clrScheme name="Luxe">
-      <a:dk1>
-        <a:srgbClr val="000000"/>
-      </a:dk1>
-      <a:lt1>
-        <a:srgbClr val="FFFFFF"/>
-      </a:lt1>
-      <a:dk2>
-        <a:srgbClr val="B7B7B7"/>
-      </a:dk2>
-      <a:lt2>
-        <a:srgbClr val="CCA677"/>
-      </a:lt2>
-      <a:accent1>
-        <a:srgbClr val="5D4037"/>
-      </a:accent1>
-      <a:accent2>
-        <a:srgbClr val="455A64"/>
-      </a:accent2>
-      <a:accent3>
-        <a:srgbClr val="57BB8A"/>
-      </a:accent3>
-      <a:accent4>
-        <a:srgbClr val="78909C"/>
-      </a:accent4>
-      <a:accent5>
-        <a:srgbClr val="607D8B"/>
-      </a:accent5>
-      <a:accent6>
-        <a:srgbClr val="DCE755"/>
-      </a:accent6>
-      <a:hlink>
-        <a:srgbClr val="607D8B"/>
-      </a:hlink>
-      <a:folHlink>
-        <a:srgbClr val="607D8B"/>
-      </a:folHlink>
-    </a:clrScheme>
-    <a:fontScheme name="Office">
-      <a:majorFont>
-        <a:latin typeface="Arial"/>
-        <a:ea typeface=""/>
-        <a:cs typeface=""/>
-        <a:font script="Jpan" typeface="ＭＳ Ｐゴシック"/>
-        <a:font script="Hang" typeface="맑은 고딕"/>
-        <a:font script="Hans" typeface="宋体"/>
-        <a:font script="Hant" typeface="新細明體"/>
-        <a:font script="Arab" typeface="Times New Roman"/>
-        <a:font script="Hebr" typeface="Times New Roman"/>
-        <a:font script="Thai" typeface="Angsana New"/>
-        <a:font script="Ethi" typeface="Nyala"/>
-        <a:font script="Beng" typeface="Vrinda"/>
-        <a:font script="Gujr" typeface="Shruti"/>
-        <a:font script="Khmr" typeface="MoolBoran"/>
-        <a:font script="Knda" typeface="Tunga"/>
-        <a:font script="Guru" typeface="Raavi"/>
-        <a:font script="Cans" typeface="Euphemia"/>
-        <a:font script="Cher" typeface="Plantagenet Cherokee"/>
-        <a:font script="Yiii" typeface="Microsoft Yi Baiti"/>
-        <a:font script="Tibt" typeface="Microsoft Himalaya"/>
-        <a:font script="Thaa" typeface="MV Boli"/>
-        <a:font script="Deva" typeface="Mangal"/>
-        <a:font script="Telu" typeface="Gautami"/>
-        <a:font script="Taml" typeface="Latha"/>
-        <a:font script="Syrc" typeface="Estrangelo Edessa"/>
-        <a:font script="Orya" typeface="Kalinga"/>
-        <a:font script="Mlym" typeface="Kartika"/>
-        <a:font script="Laoo" typeface="DokChampa"/>
-        <a:font script="Sinh" typeface="Iskoola Pota"/>
-        <a:font script="Mong" typeface="Mongolian Baiti"/>
-        <a:font script="Viet" typeface="Times New Roman"/>
-        <a:font script="Uigh" typeface="Microsoft Uighur"/>
-        <a:font script="Geor" typeface="Sylfaen"/>
-      </a:majorFont>
-      <a:minorFont>
-        <a:latin typeface="Arial"/>
-        <a:ea typeface=""/>
-        <a:cs typeface=""/>
-        <a:font script="Jpan" typeface="ＭＳ Ｐゴシック"/>
-        <a:font script="Hang" typeface="맑은 고딕"/>
-        <a:font script="Hans" typeface="宋体"/>
-        <a:font script="Hant" typeface="新細明體"/>
-        <a:font script="Arab" typeface="Arial"/>
-        <a:font script="Hebr" typeface="Arial"/>
-        <a:font script="Thai" typeface="Cordia New"/>
-        <a:font script="Ethi" typeface="Nyala"/>
-        <a:font script="Beng" typeface="Vrinda"/>
-        <a:font script="Gujr" typeface="Shruti"/>
-        <a:font script="Khmr" typeface="DaunPenh"/>
-        <a:font script="Knda" typeface="Tunga"/>
-        <a:font script="Guru" typeface="Raavi"/>
-        <a:font script="Cans" typeface="Euphemia"/>
-        <a:font script="Cher" typeface="Plantagenet Cherokee"/>
-        <a:font script="Yiii" typeface="Microsoft Yi Baiti"/>
-        <a:font script="Tibt" typeface="Microsoft Himalaya"/>
-        <a:font script="Thaa" typeface="MV Boli"/>
-        <a:font script="Deva" typeface="Mangal"/>
-        <a:font script="Telu" typeface="Gautami"/>
-        <a:font script="Taml" typeface="Latha"/>
-        <a:font script="Syrc" typeface="Estrangelo Edessa"/>
-        <a:font script="Orya" typeface="Kalinga"/>
-        <a:font script="Mlym" typeface="Kartika"/>
-        <a:font script="Laoo" typeface="DokChampa"/>
-        <a:font script="Sinh" typeface="Iskoola Pota"/>
-        <a:font script="Mong" typeface="Mongolian Baiti"/>
-        <a:font script="Viet" typeface="Arial"/>
-        <a:font script="Uigh" typeface="Microsoft Uighur"/>
-        <a:font script="Geor" typeface="Sylfaen"/>
-      </a:minorFont>
-    </a:fontScheme>
-    <a:fmtScheme name="Office">
-      <a:fillStyleLst>
-        <a:solidFill>
-          <a:schemeClr val="phClr"/>
-        </a:solidFill>
-        <a:gradFill rotWithShape="1">
-          <a:gsLst>
-            <a:gs pos="0">
-              <a:schemeClr val="phClr">
-                <a:tint val="50000"/>
-                <a:satMod val="300000"/>
-              </a:schemeClr>
-            </a:gs>
-            <a:gs pos="35000">
-              <a:schemeClr val="phClr">
-                <a:tint val="37000"/>
-                <a:satMod val="300000"/>
-              </a:schemeClr>
-            </a:gs>
-            <a:gs pos="100000">
-              <a:schemeClr val="phClr">
-                <a:tint val="15000"/>
-                <a:satMod val="350000"/>
-              </a:schemeClr>
-            </a:gs>
-          </a:gsLst>
-          <a:lin ang="16200000" scaled="1"/>
-        </a:gradFill>
-        <a:gradFill rotWithShape="1">
-          <a:gsLst>
-            <a:gs pos="0">
-              <a:schemeClr val="phClr">
-                <a:tint val="100000"/>
-                <a:shade val="100000"/>
-                <a:satMod val="130000"/>
-              </a:schemeClr>
-            </a:gs>
-            <a:gs pos="100000">
-              <a:schemeClr val="phClr">
-                <a:tint val="50000"/>
-                <a:shade val="100000"/>
-                <a:satMod val="350000"/>
-              </a:schemeClr>
-            </a:gs>
-          </a:gsLst>
-          <a:lin ang="16200000" scaled="0"/>
-        </a:gradFill>
-      </a:fillStyleLst>
-      <a:lnStyleLst>
-        <a:ln w="9525" cap="flat" cmpd="sng" algn="ctr">
-          <a:solidFill>
-            <a:schemeClr val="phClr">
-              <a:shade val="95000"/>
-              <a:satMod val="105000"/>
-            </a:schemeClr>
-          </a:solidFill>
-          <a:prstDash val="solid"/>
-        </a:ln>
-        <a:ln w="25400" cap="flat" cmpd="sng" algn="ctr">
-          <a:solidFill>
-            <a:schemeClr val="phClr"/>
-          </a:solidFill>
-          <a:prstDash val="solid"/>
-        </a:ln>
-        <a:ln w="38100" cap="flat" cmpd="sng" algn="ctr">
-          <a:solidFill>
-            <a:schemeClr val="phClr"/>
-          </a:solidFill>
-          <a:prstDash val="solid"/>
-        </a:ln>
-      </a:lnStyleLst>
-      <a:effectStyleLst>
-        <a:effectStyle>
-          <a:effectLst>
-            <a:outerShdw blurRad="40000" dist="20000" dir="5400000" rotWithShape="0">
-              <a:srgbClr val="000000">
-                <a:alpha val="38000"/>
-              </a:srgbClr>
-            </a:outerShdw>
-          </a:effectLst>
-        </a:effectStyle>
-        <a:effectStyle>
-          <a:effectLst>
-            <a:outerShdw blurRad="40000" dist="23000" dir="5400000" rotWithShape="0">
-              <a:srgbClr val="000000">
-                <a:alpha val="35000"/>
-              </a:srgbClr>
-            </a:outerShdw>
-          </a:effectLst>
-        </a:effectStyle>
-        <a:effectStyle>
-          <a:effectLst>
-            <a:outerShdw blurRad="40000" dist="23000" dir="5400000" rotWithShape="0">
-              <a:srgbClr val="000000">
-                <a:alpha val="35000"/>
-              </a:srgbClr>
-            </a:outerShdw>
-          </a:effectLst>
-          <a:scene3d>
-            <a:camera prst="orthographicFront">
-              <a:rot lat="0" lon="0" rev="0"/>
-            </a:camera>
-            <a:lightRig rig="threePt" dir="t">
-              <a:rot lat="0" lon="0" rev="1200000"/>
-            </a:lightRig>
-          </a:scene3d>
-          <a:sp3d>
-            <a:bevelT w="63500" h="25400"/>
-          </a:sp3d>
-        </a:effectStyle>
-      </a:effectStyleLst>
-      <a:bgFillStyleLst>
-        <a:solidFill>
-          <a:schemeClr val="phClr"/>
-        </a:solidFill>
-        <a:gradFill rotWithShape="1">
-          <a:gsLst>
-            <a:gs pos="0">
-              <a:schemeClr val="phClr">
-                <a:tint val="40000"/>
-                <a:satMod val="350000"/>
-              </a:schemeClr>
-            </a:gs>
-            <a:gs pos="40000">
-              <a:schemeClr val="phClr">
-                <a:tint val="45000"/>
-                <a:shade val="99000"/>
-                <a:satMod val="350000"/>
-              </a:schemeClr>
-            </a:gs>
-            <a:gs pos="100000">
-              <a:schemeClr val="phClr">
-                <a:shade val="20000"/>
-                <a:satMod val="255000"/>
-              </a:schemeClr>
-            </a:gs>
-          </a:gsLst>
-          <a:path path="circle">
-            <a:fillToRect l="50000" t="-80000" r="50000" b="180000"/>
-          </a:path>
-        </a:gradFill>
-        <a:gradFill rotWithShape="1">
-          <a:gsLst>
-            <a:gs pos="0">
-              <a:schemeClr val="phClr">
-                <a:tint val="80000"/>
-                <a:satMod val="300000"/>
-              </a:schemeClr>
-            </a:gs>
-            <a:gs pos="100000">
-              <a:schemeClr val="phClr">
-                <a:shade val="30000"/>
-                <a:satMod val="200000"/>
-              </a:schemeClr>
-            </a:gs>
-          </a:gsLst>
-          <a:path path="circle">
-            <a:fillToRect l="50000" t="50000" r="50000" b="50000"/>
-          </a:path>
-        </a:gradFill>
-      </a:bgFillStyleLst>
-    </a:fmtScheme>
-  </a:themeElements>
+  <a:objectDefaults/>
+  <a:extraClrSchemeLst/>
 </a:theme>
 </file>